--- a/content/slides/project-explanation-20260822/output/gem-hunter_text.pptx
+++ b/content/slides/project-explanation-20260822/output/gem-hunter_text.pptx
@@ -24,7 +24,6 @@
     <p:sldId id="272" r:id="rId23"/>
     <p:sldId id="273" r:id="rId24"/>
     <p:sldId id="274" r:id="rId25"/>
-    <p:sldId id="275" r:id="rId26"/>
   </p:sldIdLst>
   <p:sldSz cx="12132000" cy="6840000" type="screen4x3"/>
   <p:notesSz cx="6858000" cy="9144000"/>
@@ -3947,7 +3946,7 @@
                 <a:latin typeface="Calibri"/>
                 <a:ea typeface="游ゴシック"/>
               </a:rPr>
-              <a:t>・GitHub Actions が使えないため、CI の代わりにセッション自身が npm run check を実行する</a:t>
+              <a:t>・GitHub Actions は使わない判断をし、CI の代わりにセッション自身が npm run check を実行する</a:t>
             </a:r>
           </a:p>
           <a:p>
@@ -4778,11 +4777,11 @@
                 <a:spcPct val="125000"/>
               </a:lnSpc>
               <a:spcAft>
-                <a:spcPts val="1125"/>
-              </a:spcAft>
-            </a:pPr>
-            <a:r>
-              <a:rPr sz="1500">
+                <a:spcPts val="1050"/>
+              </a:spcAft>
+            </a:pPr>
+            <a:r>
+              <a:rPr sz="1400">
                 <a:solidFill>
                   <a:srgbClr val="1B2A3A"/>
                 </a:solidFill>
@@ -4798,11 +4797,11 @@
                 <a:spcPct val="125000"/>
               </a:lnSpc>
               <a:spcAft>
-                <a:spcPts val="1125"/>
-              </a:spcAft>
-            </a:pPr>
-            <a:r>
-              <a:rPr sz="1500">
+                <a:spcPts val="1050"/>
+              </a:spcAft>
+            </a:pPr>
+            <a:r>
+              <a:rPr sz="1400">
                 <a:solidFill>
                   <a:srgbClr val="1B2A3A"/>
                 </a:solidFill>
@@ -4818,11 +4817,11 @@
                 <a:spcPct val="125000"/>
               </a:lnSpc>
               <a:spcAft>
-                <a:spcPts val="1125"/>
-              </a:spcAft>
-            </a:pPr>
-            <a:r>
-              <a:rPr sz="1500">
+                <a:spcPts val="1050"/>
+              </a:spcAft>
+            </a:pPr>
+            <a:r>
+              <a:rPr sz="1400">
                 <a:solidFill>
                   <a:srgbClr val="1B2A3A"/>
                 </a:solidFill>
@@ -4838,11 +4837,11 @@
                 <a:spcPct val="125000"/>
               </a:lnSpc>
               <a:spcAft>
-                <a:spcPts val="1125"/>
-              </a:spcAft>
-            </a:pPr>
-            <a:r>
-              <a:rPr sz="1500">
+                <a:spcPts val="1050"/>
+              </a:spcAft>
+            </a:pPr>
+            <a:r>
+              <a:rPr sz="1400">
                 <a:solidFill>
                   <a:srgbClr val="1B2A3A"/>
                 </a:solidFill>
@@ -4858,11 +4857,11 @@
                 <a:spcPct val="125000"/>
               </a:lnSpc>
               <a:spcAft>
-                <a:spcPts val="1125"/>
-              </a:spcAft>
-            </a:pPr>
-            <a:r>
-              <a:rPr sz="1500">
+                <a:spcPts val="1050"/>
+              </a:spcAft>
+            </a:pPr>
+            <a:r>
+              <a:rPr sz="1400">
                 <a:solidFill>
                   <a:srgbClr val="1B2A3A"/>
                 </a:solidFill>
@@ -4878,18 +4877,38 @@
                 <a:spcPct val="125000"/>
               </a:lnSpc>
               <a:spcAft>
-                <a:spcPts val="1125"/>
-              </a:spcAft>
-            </a:pPr>
-            <a:r>
-              <a:rPr sz="1500">
-                <a:solidFill>
-                  <a:srgbClr val="1B2A3A"/>
-                </a:solidFill>
-                <a:latin typeface="Calibri"/>
-                <a:ea typeface="游ゴシック"/>
-              </a:rPr>
-              <a:t>・被依存数は Ecosyste.ms、star は GitHub API から取る</a:t>
+                <a:spcPts val="1050"/>
+              </a:spcAft>
+            </a:pPr>
+            <a:r>
+              <a:rPr sz="1400">
+                <a:solidFill>
+                  <a:srgbClr val="1B2A3A"/>
+                </a:solidFill>
+                <a:latin typeface="Calibri"/>
+                <a:ea typeface="游ゴシック"/>
+              </a:rPr>
+              <a:t>・被依存数は Ecosyste.ms の npm レジストリ API、star は GitHub API から取る</a:t>
+            </a:r>
+          </a:p>
+          <a:p>
+            <a:pPr>
+              <a:lnSpc>
+                <a:spcPct val="125000"/>
+              </a:lnSpc>
+              <a:spcAft>
+                <a:spcPts val="1050"/>
+              </a:spcAft>
+            </a:pPr>
+            <a:r>
+              <a:rPr sz="1400">
+                <a:solidFill>
+                  <a:srgbClr val="1B2A3A"/>
+                </a:solidFill>
+                <a:latin typeface="Calibri"/>
+                <a:ea typeface="游ゴシック"/>
+              </a:rPr>
+              <a:t>・Ecosyste.ms のデータは CC BY-SA 4.0。画面に出典・ライセンス・生成時刻を明記している</a:t>
             </a:r>
           </a:p>
         </p:txBody>
@@ -5083,7 +5102,7 @@
                 <a:latin typeface="Calibri"/>
                 <a:ea typeface="游ゴシック"/>
               </a:rPr>
-              <a:t>・却下: 候補プールはユニーク 227 リポジトリしかなく、検索上位 100 件との一致は一般語でほぼ 0 件</a:t>
+              <a:t>・候補プールは Ecosyste.ms の npm レジストリを被依存数の降順に上位 294 件、事前バッチで取ったもの</a:t>
             </a:r>
           </a:p>
           <a:p>
@@ -5103,7 +5122,7 @@
                 <a:latin typeface="Calibri"/>
                 <a:ea typeface="游ゴシック"/>
               </a:rPr>
-              <a:t>・却下: 候補を広げる案もあったが、バンドルが Workers Free の 3 MB 上限を超える</a:t>
+              <a:t>・同じリポジトリが複数パッケージを出すため、ユニークなリポジトリは 227 件まで減る</a:t>
             </a:r>
           </a:p>
           <a:p>
@@ -5123,6 +5142,46 @@
                 <a:latin typeface="Calibri"/>
                 <a:ea typeface="游ゴシック"/>
               </a:rPr>
+              <a:t>・却下: この 227 件では検索上位 100 件との一致が一般語でほぼ 0 件で、並べ替える対象がなかった</a:t>
+            </a:r>
+          </a:p>
+          <a:p>
+            <a:pPr>
+              <a:lnSpc>
+                <a:spcPct val="125000"/>
+              </a:lnSpc>
+              <a:spcAft>
+                <a:spcPts val="1050"/>
+              </a:spcAft>
+            </a:pPr>
+            <a:r>
+              <a:rPr sz="1400">
+                <a:solidFill>
+                  <a:srgbClr val="1B2A3A"/>
+                </a:solidFill>
+                <a:latin typeface="Calibri"/>
+                <a:ea typeface="游ゴシック"/>
+              </a:rPr>
+              <a:t>・却下: 候補を広げる案も、バンドル 3 MB 上限に当たるうえ、npm 限定では非 JS 系に当たらない</a:t>
+            </a:r>
+          </a:p>
+          <a:p>
+            <a:pPr>
+              <a:lnSpc>
+                <a:spcPct val="125000"/>
+              </a:lnSpc>
+              <a:spcAft>
+                <a:spcPts val="1050"/>
+              </a:spcAft>
+            </a:pPr>
+            <a:r>
+              <a:rPr sz="1400">
+                <a:solidFill>
+                  <a:srgbClr val="1B2A3A"/>
+                </a:solidFill>
+                <a:latin typeface="Calibri"/>
+                <a:ea typeface="游ゴシック"/>
+              </a:rPr>
               <a:t>・採用: sort=gem-index を検索結果から撤去した（Gem Index の定義そのものは撤回しない）</a:t>
             </a:r>
           </a:p>
@@ -5143,7 +5202,7 @@
                 <a:latin typeface="Calibri"/>
                 <a:ea typeface="游ゴシック"/>
               </a:rPr>
-              <a:t>・採用: 1 検索あたり最大 10 リクエスト（体感 3〜8 秒）だったものが、常に 1 回（0.5〜1 秒）になった</a:t>
+              <a:t>・採用: 1 検索あたり最大 10 リクエスト（体感 3〜8 秒）が、常に 1 回（0.5〜1 秒）になった</a:t>
             </a:r>
           </a:p>
           <a:p>
@@ -6300,260 +6359,6 @@
                 <a:ea typeface="游ゴシック"/>
               </a:rPr>
               <a:t>・この画面がこの発表のゴール。ここに至るまでの判断をこれから話す</a:t>
-            </a:r>
-          </a:p>
-        </p:txBody>
-      </p:sp>
-    </p:spTree>
-  </p:cSld>
-  <p:clrMapOvr>
-    <a:masterClrMapping/>
-  </p:clrMapOvr>
-</p:sld>
-</file>
-
-<file path=ppt/slides/slide20.xml><?xml version="1.0" encoding="utf-8"?>
-<p:sld xmlns:a="http://schemas.openxmlformats.org/drawingml/2006/main" xmlns:p="http://schemas.openxmlformats.org/presentationml/2006/main" xmlns:r="http://schemas.openxmlformats.org/officeDocument/2006/relationships">
-  <p:cSld>
-    <p:bg>
-      <p:bgPr>
-        <a:solidFill>
-          <a:srgbClr val="FAF6EC"/>
-        </a:solidFill>
-        <a:effectLst/>
-      </p:bgPr>
-    </p:bg>
-    <p:spTree>
-      <p:nvGrpSpPr>
-        <p:cNvPr id="1" name=""/>
-        <p:cNvGrpSpPr/>
-        <p:nvPr/>
-      </p:nvGrpSpPr>
-      <p:grpSpPr/>
-      <p:sp>
-        <p:nvSpPr>
-          <p:cNvPr id="2" name="Rectangle 1"/>
-          <p:cNvSpPr/>
-          <p:nvPr/>
-        </p:nvSpPr>
-        <p:spPr>
-          <a:xfrm>
-            <a:off x="0" y="0"/>
-            <a:ext cx="12132000" cy="1008000"/>
-          </a:xfrm>
-          <a:prstGeom prst="rect">
-            <a:avLst/>
-          </a:prstGeom>
-          <a:solidFill>
-            <a:srgbClr val="14364F"/>
-          </a:solidFill>
-          <a:ln>
-            <a:noFill/>
-          </a:ln>
-        </p:spPr>
-        <p:style>
-          <a:lnRef idx="1">
-            <a:schemeClr val="accent1"/>
-          </a:lnRef>
-          <a:fillRef idx="3">
-            <a:schemeClr val="accent1"/>
-          </a:fillRef>
-          <a:effectRef idx="2">
-            <a:schemeClr val="accent1"/>
-          </a:effectRef>
-          <a:fontRef idx="minor">
-            <a:schemeClr val="lt1"/>
-          </a:fontRef>
-        </p:style>
-        <p:txBody>
-          <a:bodyPr rtlCol="0" anchor="ctr" wrap="none"/>
-          <a:lstStyle/>
-          <a:p>
-            <a:pPr algn="l"/>
-            <a:r>
-              <a:rPr sz="1800" b="1">
-                <a:solidFill>
-                  <a:srgbClr val="FFFFFF"/>
-                </a:solidFill>
-                <a:latin typeface="Calibri"/>
-                <a:ea typeface="游ゴシック"/>
-              </a:rPr>
-              <a:t>リポジトリとドキュメントの入口</a:t>
-            </a:r>
-          </a:p>
-        </p:txBody>
-      </p:sp>
-      <p:sp>
-        <p:nvSpPr>
-          <p:cNvPr id="3" name="Rectangle 2"/>
-          <p:cNvSpPr/>
-          <p:nvPr/>
-        </p:nvSpPr>
-        <p:spPr>
-          <a:xfrm>
-            <a:off x="612000" y="1368000"/>
-            <a:ext cx="10908000" cy="5292000"/>
-          </a:xfrm>
-          <a:prstGeom prst="rect">
-            <a:avLst/>
-          </a:prstGeom>
-          <a:solidFill>
-            <a:srgbClr val="FFFFFF"/>
-          </a:solidFill>
-          <a:ln w="6350">
-            <a:solidFill>
-              <a:srgbClr val="E2E8F0"/>
-            </a:solidFill>
-          </a:ln>
-          <a:effectLst>
-            <a:outerShdw blurRad="101600" dist="38100" dir="8100000">
-              <a:srgbClr val="000000">
-                <a:alpha val="10000"/>
-              </a:srgbClr>
-            </a:outerShdw>
-          </a:effectLst>
-        </p:spPr>
-        <p:style>
-          <a:lnRef idx="1">
-            <a:schemeClr val="accent1"/>
-          </a:lnRef>
-          <a:fillRef idx="3">
-            <a:schemeClr val="accent1"/>
-          </a:fillRef>
-          <a:effectRef idx="2">
-            <a:schemeClr val="accent1"/>
-          </a:effectRef>
-          <a:fontRef idx="minor">
-            <a:schemeClr val="lt1"/>
-          </a:fontRef>
-        </p:style>
-        <p:txBody>
-          <a:bodyPr rtlCol="0" anchor="ctr"/>
-          <a:lstStyle/>
-          <a:p>
-            <a:pPr algn="ctr"/>
-          </a:p>
-        </p:txBody>
-      </p:sp>
-      <p:sp>
-        <p:nvSpPr>
-          <p:cNvPr id="4" name="TextBox 3"/>
-          <p:cNvSpPr txBox="1"/>
-          <p:nvPr/>
-        </p:nvSpPr>
-        <p:spPr>
-          <a:xfrm>
-            <a:off x="900000" y="1656000"/>
-            <a:ext cx="10332000" cy="4716000"/>
-          </a:xfrm>
-          <a:prstGeom prst="rect">
-            <a:avLst/>
-          </a:prstGeom>
-          <a:noFill/>
-        </p:spPr>
-        <p:txBody>
-          <a:bodyPr wrap="square" anchor="ctr">
-            <a:spAutoFit/>
-          </a:bodyPr>
-          <a:lstStyle/>
-          <a:p>
-            <a:pPr>
-              <a:lnSpc>
-                <a:spcPct val="125000"/>
-              </a:lnSpc>
-              <a:spcAft>
-                <a:spcPts val="1200"/>
-              </a:spcAft>
-            </a:pPr>
-            <a:r>
-              <a:rPr sz="1600">
-                <a:solidFill>
-                  <a:srgbClr val="1B2A3A"/>
-                </a:solidFill>
-                <a:latin typeface="Calibri"/>
-                <a:ea typeface="游ゴシック"/>
-              </a:rPr>
-              <a:t>・動くものを触るなら: github.com/kai-kou/gem-hunter</a:t>
-            </a:r>
-          </a:p>
-          <a:p>
-            <a:pPr>
-              <a:lnSpc>
-                <a:spcPct val="125000"/>
-              </a:lnSpc>
-              <a:spcAft>
-                <a:spcPts val="1200"/>
-              </a:spcAft>
-            </a:pPr>
-            <a:r>
-              <a:rPr sz="1600">
-                <a:solidFill>
-                  <a:srgbClr val="1B2A3A"/>
-                </a:solidFill>
-                <a:latin typeface="Calibri"/>
-                <a:ea typeface="游ゴシック"/>
-              </a:rPr>
-              <a:t>・要件の正本: docs/02_requirements/prd.md</a:t>
-            </a:r>
-          </a:p>
-          <a:p>
-            <a:pPr>
-              <a:lnSpc>
-                <a:spcPct val="125000"/>
-              </a:lnSpc>
-              <a:spcAft>
-                <a:spcPts val="1200"/>
-              </a:spcAft>
-            </a:pPr>
-            <a:r>
-              <a:rPr sz="1600">
-                <a:solidFill>
-                  <a:srgbClr val="1B2A3A"/>
-                </a:solidFill>
-                <a:latin typeface="Calibri"/>
-                <a:ea typeface="游ゴシック"/>
-              </a:rPr>
-              <a:t>・決定の経緯: docs/02_requirements/open-questions.md</a:t>
-            </a:r>
-          </a:p>
-          <a:p>
-            <a:pPr>
-              <a:lnSpc>
-                <a:spcPct val="125000"/>
-              </a:lnSpc>
-              <a:spcAft>
-                <a:spcPts val="1200"/>
-              </a:spcAft>
-            </a:pPr>
-            <a:r>
-              <a:rPr sz="1600">
-                <a:solidFill>
-                  <a:srgbClr val="1B2A3A"/>
-                </a:solidFill>
-                <a:latin typeface="Calibri"/>
-                <a:ea typeface="游ゴシック"/>
-              </a:rPr>
-              <a:t>・技術的意思決定: docs/adr/（15 本）</a:t>
-            </a:r>
-          </a:p>
-          <a:p>
-            <a:pPr>
-              <a:lnSpc>
-                <a:spcPct val="125000"/>
-              </a:lnSpc>
-              <a:spcAft>
-                <a:spcPts val="1200"/>
-              </a:spcAft>
-            </a:pPr>
-            <a:r>
-              <a:rPr sz="1600">
-                <a:solidFill>
-                  <a:srgbClr val="1B2A3A"/>
-                </a:solidFill>
-                <a:latin typeface="Calibri"/>
-                <a:ea typeface="游ゴシック"/>
-              </a:rPr>
-              <a:t>・この発表の構成・画像・生成スクリプトもリポジトリに入っている</a:t>
             </a:r>
           </a:p>
         </p:txBody>

--- a/content/slides/project-explanation-20260822/output/gem-hunter_text.pptx
+++ b/content/slides/project-explanation-20260822/output/gem-hunter_text.pptx
@@ -24,6 +24,8 @@
     <p:sldId id="272" r:id="rId23"/>
     <p:sldId id="273" r:id="rId24"/>
     <p:sldId id="274" r:id="rId25"/>
+    <p:sldId id="275" r:id="rId26"/>
+    <p:sldId id="276" r:id="rId27"/>
   </p:sldIdLst>
   <p:sldSz cx="12132000" cy="6840000" type="screen4x3"/>
   <p:notesSz cx="6858000" cy="9144000"/>
@@ -3224,7 +3226,7 @@
                 <a:latin typeface="Calibri"/>
                 <a:ea typeface="游ゴシック"/>
               </a:rPr>
-              <a:t>star では埋もれる「実際に使われている OSS」を見つける / 開発者向け解説 / 2026-08-22</a:t>
+              <a:t>star では埋もれる「実際に使われている OSS」を見つける / 開発者向け解説 / 2026-08-23</a:t>
             </a:r>
           </a:p>
         </p:txBody>
@@ -3303,7 +3305,7 @@
                 <a:latin typeface="Calibri"/>
                 <a:ea typeface="游ゴシック"/>
               </a:rPr>
-              <a:t>1 セッションを 1 スプリントとして回す</a:t>
+              <a:t>同じコードでも、プレビューでだけ壊れる</a:t>
             </a:r>
           </a:p>
         </p:txBody>
@@ -3387,118 +3389,138 @@
                 <a:spcPct val="125000"/>
               </a:lnSpc>
               <a:spcAft>
-                <a:spcPts val="1125"/>
-              </a:spcAft>
-            </a:pPr>
-            <a:r>
-              <a:rPr sz="1500">
-                <a:solidFill>
-                  <a:srgbClr val="1B2A3A"/>
-                </a:solidFill>
-                <a:latin typeface="Calibri"/>
-                <a:ea typeface="游ゴシック"/>
-              </a:rPr>
-              <a:t>・着手したらまず Issue を status:in-progress にして論理ロックを取る</a:t>
-            </a:r>
-          </a:p>
-          <a:p>
-            <a:pPr>
-              <a:lnSpc>
-                <a:spcPct val="125000"/>
-              </a:lnSpc>
-              <a:spcAft>
-                <a:spcPts val="1125"/>
-              </a:spcAft>
-            </a:pPr>
-            <a:r>
-              <a:rPr sz="1500">
-                <a:solidFill>
-                  <a:srgbClr val="1B2A3A"/>
-                </a:solidFill>
-                <a:latin typeface="Calibri"/>
-                <a:ea typeface="游ゴシック"/>
-              </a:rPr>
-              <a:t>・スプリントゴールと編成（どの役割を何人置くか）を Issue に記録してから実装に入る</a:t>
-            </a:r>
-          </a:p>
-          <a:p>
-            <a:pPr>
-              <a:lnSpc>
-                <a:spcPct val="125000"/>
-              </a:lnSpc>
-              <a:spcAft>
-                <a:spcPts val="1125"/>
-              </a:spcAft>
-            </a:pPr>
-            <a:r>
-              <a:rPr sz="1500">
-                <a:solidFill>
-                  <a:srgbClr val="1B2A3A"/>
-                </a:solidFill>
-                <a:latin typeface="Calibri"/>
-                <a:ea typeface="游ゴシック"/>
-              </a:rPr>
-              <a:t>・確認を求めてよいのは A-1〜A-6（main への直接 push・課金設定など不可逆な操作）だけ</a:t>
-            </a:r>
-          </a:p>
-          <a:p>
-            <a:pPr>
-              <a:lnSpc>
-                <a:spcPct val="125000"/>
-              </a:lnSpc>
-              <a:spcAft>
-                <a:spcPts val="1125"/>
-              </a:spcAft>
-            </a:pPr>
-            <a:r>
-              <a:rPr sz="1500">
-                <a:solidFill>
-                  <a:srgbClr val="1B2A3A"/>
-                </a:solidFill>
-                <a:latin typeface="Calibri"/>
-                <a:ea typeface="游ゴシック"/>
-              </a:rPr>
-              <a:t>・もう 1 つの例外は、仕様解釈が 2 通り以上あって選択で成果物が変わるとき</a:t>
-            </a:r>
-          </a:p>
-          <a:p>
-            <a:pPr>
-              <a:lnSpc>
-                <a:spcPct val="125000"/>
-              </a:lnSpc>
-              <a:spcAft>
-                <a:spcPts val="1125"/>
-              </a:spcAft>
-            </a:pPr>
-            <a:r>
-              <a:rPr sz="1500">
-                <a:solidFill>
-                  <a:srgbClr val="1B2A3A"/>
-                </a:solidFill>
-                <a:latin typeface="Calibri"/>
-                <a:ea typeface="游ゴシック"/>
-              </a:rPr>
-              <a:t>・最初は各段階で確認を挟んでいたが、待ち時間がボトルネックになったので線引きを絞った</a:t>
-            </a:r>
-          </a:p>
-          <a:p>
-            <a:pPr>
-              <a:lnSpc>
-                <a:spcPct val="125000"/>
-              </a:lnSpc>
-              <a:spcAft>
-                <a:spcPts val="1125"/>
-              </a:spcAft>
-            </a:pPr>
-            <a:r>
-              <a:rPr sz="1500">
-                <a:solidFill>
-                  <a:srgbClr val="1B2A3A"/>
-                </a:solidFill>
-                <a:latin typeface="Calibri"/>
-                <a:ea typeface="游ゴシック"/>
-              </a:rPr>
-              <a:t>・セッションが途中で切れても、Issue のラベルと記録から次のセッションが再開できる</a:t>
+                <a:spcPts val="1050"/>
+              </a:spcAft>
+            </a:pPr>
+            <a:r>
+              <a:rPr sz="1400">
+                <a:solidFill>
+                  <a:srgbClr val="1B2A3A"/>
+                </a:solidFill>
+                <a:latin typeface="Calibri"/>
+                <a:ea typeface="游ゴシック"/>
+              </a:rPr>
+              <a:t>・redirects の destination に :path を書くと、プレビューでだけ 500 になる</a:t>
+            </a:r>
+          </a:p>
+          <a:p>
+            <a:pPr>
+              <a:lnSpc>
+                <a:spcPct val="125000"/>
+              </a:lnSpc>
+              <a:spcAft>
+                <a:spcPts val="1050"/>
+              </a:spcAft>
+            </a:pPr>
+            <a:r>
+              <a:rPr sz="1400">
+                <a:solidFill>
+                  <a:srgbClr val="1B2A3A"/>
+                </a:solidFill>
+                <a:latin typeface="Calibri"/>
+                <a:ea typeface="游ゴシック"/>
+              </a:rPr>
+              <a:t>・原因は OpenNext が path-to-regexp を validate: true で呼ぶこと（Next.js 本体は false）</a:t>
+            </a:r>
+          </a:p>
+          <a:p>
+            <a:pPr>
+              <a:lnSpc>
+                <a:spcPct val="125000"/>
+              </a:lnSpc>
+              <a:spcAft>
+                <a:spcPts val="1050"/>
+              </a:spcAft>
+            </a:pPr>
+            <a:r>
+              <a:rPr sz="1400">
+                <a:solidFill>
+                  <a:srgbClr val="1B2A3A"/>
+                </a:solidFill>
+                <a:latin typeface="Calibri"/>
+                <a:ea typeface="游ゴシック"/>
+              </a:rPr>
+              <a:t>・拡張子付きパスは /repos/angular/angular.js が 404、/ja を付けると 200 になる</a:t>
+            </a:r>
+          </a:p>
+          <a:p>
+            <a:pPr>
+              <a:lnSpc>
+                <a:spcPct val="125000"/>
+              </a:lnSpc>
+              <a:spcAft>
+                <a:spcPts val="1050"/>
+              </a:spcAft>
+            </a:pPr>
+            <a:r>
+              <a:rPr sz="1400">
+                <a:solidFill>
+                  <a:srgbClr val="1B2A3A"/>
+                </a:solidFill>
+                <a:latin typeface="Calibri"/>
+                <a:ea typeface="游ゴシック"/>
+              </a:rPr>
+              <a:t>・本番ビルドの npm は依存の install スクリプトを既定で止めるので、そこでだけ落ちた</a:t>
+            </a:r>
+          </a:p>
+          <a:p>
+            <a:pPr>
+              <a:lnSpc>
+                <a:spcPct val="125000"/>
+              </a:lnSpc>
+              <a:spcAft>
+                <a:spcPts val="1050"/>
+              </a:spcAft>
+            </a:pPr>
+            <a:r>
+              <a:rPr sz="1400">
+                <a:solidFill>
+                  <a:srgbClr val="1B2A3A"/>
+                </a:solidFill>
+                <a:latin typeface="Calibri"/>
+                <a:ea typeface="游ゴシック"/>
+              </a:rPr>
+              <a:t>・wrangler deploy がブロックされることがある（実測 5 回失敗・2 回成功の非決定的挙動）</a:t>
+            </a:r>
+          </a:p>
+          <a:p>
+            <a:pPr>
+              <a:lnSpc>
+                <a:spcPct val="125000"/>
+              </a:lnSpc>
+              <a:spcAft>
+                <a:spcPts val="1050"/>
+              </a:spcAft>
+            </a:pPr>
+            <a:r>
+              <a:rPr sz="1400">
+                <a:solidFill>
+                  <a:srgbClr val="1B2A3A"/>
+                </a:solidFill>
+                <a:latin typeface="Calibri"/>
+                <a:ea typeface="游ゴシック"/>
+              </a:rPr>
+              <a:t>・どれもローカルの next start では再現せず、上げて初めて壊れた</a:t>
+            </a:r>
+          </a:p>
+          <a:p>
+            <a:pPr>
+              <a:lnSpc>
+                <a:spcPct val="125000"/>
+              </a:lnSpc>
+              <a:spcAft>
+                <a:spcPts val="1050"/>
+              </a:spcAft>
+            </a:pPr>
+            <a:r>
+              <a:rPr sz="1400">
+                <a:solidFill>
+                  <a:srgbClr val="1B2A3A"/>
+                </a:solidFill>
+                <a:latin typeface="Calibri"/>
+                <a:ea typeface="游ゴシック"/>
+              </a:rPr>
+              <a:t>・以後「動いた」ではなく「どの環境で、どこまで見たか」で記録するようにした</a:t>
             </a:r>
           </a:p>
         </p:txBody>
@@ -3577,7 +3599,7 @@
                 <a:latin typeface="Calibri"/>
                 <a:ea typeface="游ゴシック"/>
               </a:rPr>
-              <a:t>テストを先に書き、緑でなければ進めない</a:t>
+              <a:t>1 セッションを 1 スプリントとして回す</a:t>
             </a:r>
           </a:p>
         </p:txBody>
@@ -3672,7 +3694,7 @@
                 <a:latin typeface="Calibri"/>
                 <a:ea typeface="游ゴシック"/>
               </a:rPr>
-              <a:t>・Red → Green → Refactor の順を崩さない。テストを後から足す順序を取らない</a:t>
+              <a:t>・着手したらまず Issue を status:in-progress にして論理ロックを取る</a:t>
             </a:r>
           </a:p>
           <a:p>
@@ -3692,7 +3714,7 @@
                 <a:latin typeface="Calibri"/>
                 <a:ea typeface="游ゴシック"/>
               </a:rPr>
-              <a:t>・単体・結合は Vitest + MSW でネットワークに触らず、E2E は Playwright + axe で実ブラウザを動かす</a:t>
+              <a:t>・スプリントゴールと編成（どの役割を何人置くか）を Issue に記録してから実装に入る</a:t>
             </a:r>
           </a:p>
           <a:p>
@@ -3712,7 +3734,7 @@
                 <a:latin typeface="Calibri"/>
                 <a:ea typeface="游ゴシック"/>
               </a:rPr>
-              <a:t>・操作レビューの手順をそのまま E2E に写すので、手で確かめたことが以後は自動で守られる</a:t>
+              <a:t>・確認を求めてよいのは A-1〜A-6（main への直接 push・課金設定など不可逆な操作）だけ</a:t>
             </a:r>
           </a:p>
           <a:p>
@@ -3732,7 +3754,7 @@
                 <a:latin typeface="Calibri"/>
                 <a:ea typeface="游ゴシック"/>
               </a:rPr>
-              <a:t>・テストのスキップ・無効化で緑にしない。落ちたまま次のタスクに進まない</a:t>
+              <a:t>・もう 1 つの例外は、仕様解釈が 2 通り以上あって選択で成果物が変わるとき</a:t>
             </a:r>
           </a:p>
           <a:p>
@@ -3752,7 +3774,7 @@
                 <a:latin typeface="Calibri"/>
                 <a:ea typeface="游ゴシック"/>
               </a:rPr>
-              <a:t>・外部 API はすべてモック化してあり、環境変数を 1 つも設定しなくてもテストが完走する</a:t>
+              <a:t>・最初は各段階で確認を挟んでいたが、待ち時間がボトルネックになったので線引きを絞った</a:t>
             </a:r>
           </a:p>
           <a:p>
@@ -3772,7 +3794,7 @@
                 <a:latin typeface="Calibri"/>
                 <a:ea typeface="游ゴシック"/>
               </a:rPr>
-              <a:t>・テストを後回しにした回は、動くものは早くできても後から直すコストの方が高くついた</a:t>
+              <a:t>・セッションが途中で切れても、Issue のラベルと記録から次のセッションが再開できる</a:t>
             </a:r>
           </a:p>
         </p:txBody>
@@ -3851,7 +3873,7 @@
                 <a:latin typeface="Calibri"/>
                 <a:ea typeface="游ゴシック"/>
               </a:rPr>
-              <a:t>機械検証を通さないと PR を出せない</a:t>
+              <a:t>テストを先に書き、緑でなければ進めない</a:t>
             </a:r>
           </a:p>
         </p:txBody>
@@ -3935,118 +3957,138 @@
                 <a:spcPct val="125000"/>
               </a:lnSpc>
               <a:spcAft>
-                <a:spcPts val="1125"/>
-              </a:spcAft>
-            </a:pPr>
-            <a:r>
-              <a:rPr sz="1500">
-                <a:solidFill>
-                  <a:srgbClr val="1B2A3A"/>
-                </a:solidFill>
-                <a:latin typeface="Calibri"/>
-                <a:ea typeface="游ゴシック"/>
-              </a:rPr>
-              <a:t>・GitHub Actions は使わない判断をし、CI の代わりにセッション自身が npm run check を実行する</a:t>
-            </a:r>
-          </a:p>
-          <a:p>
-            <a:pPr>
-              <a:lnSpc>
-                <a:spcPct val="125000"/>
-              </a:lnSpc>
-              <a:spcAft>
-                <a:spcPts val="1125"/>
-              </a:spcAft>
-            </a:pPr>
-            <a:r>
-              <a:rPr sz="1500">
-                <a:solidFill>
-                  <a:srgbClr val="1B2A3A"/>
-                </a:solidFill>
-                <a:latin typeface="Calibri"/>
-                <a:ea typeface="游ゴシック"/>
-              </a:rPr>
-              <a:t>・内訳は lint・型・単体/結合・E2E・Lighthouse の基本 5 点と、静的検査 6 点（依存規則・UI 寸法・コントラスト・Prose・ADR 記載・副作用 GET）</a:t>
-            </a:r>
-          </a:p>
-          <a:p>
-            <a:pPr>
-              <a:lnSpc>
-                <a:spcPct val="125000"/>
-              </a:lnSpc>
-              <a:spcAft>
-                <a:spcPts val="1125"/>
-              </a:spcAft>
-            </a:pPr>
-            <a:r>
-              <a:rPr sz="1500">
-                <a:solidFill>
-                  <a:srgbClr val="1B2A3A"/>
-                </a:solidFill>
-                <a:latin typeface="Calibri"/>
-                <a:ea typeface="游ゴシック"/>
-              </a:rPr>
-              <a:t>・残りは運用ツールの self-test（退役・デプロイゲート・Workers Builds・ダイジェスト鮮度・本番乖離・WIP 抑止）</a:t>
-            </a:r>
-          </a:p>
-          <a:p>
-            <a:pPr>
-              <a:lnSpc>
-                <a:spcPct val="125000"/>
-              </a:lnSpc>
-              <a:spcAft>
-                <a:spcPts val="1125"/>
-              </a:spcAft>
-            </a:pPr>
-            <a:r>
-              <a:rPr sz="1500">
-                <a:solidFill>
-                  <a:srgbClr val="1B2A3A"/>
-                </a:solidFill>
-                <a:latin typeface="Calibri"/>
-                <a:ea typeface="游ゴシック"/>
-              </a:rPr>
-              <a:t>・結果の Markdown 表を PR 本文に貼るのが必須。貼っていないとフックが PR 作成をブロックする</a:t>
-            </a:r>
-          </a:p>
-          <a:p>
-            <a:pPr>
-              <a:lnSpc>
-                <a:spcPct val="125000"/>
-              </a:lnSpc>
-              <a:spcAft>
-                <a:spcPts val="1125"/>
-              </a:spcAft>
-            </a:pPr>
-            <a:r>
-              <a:rPr sz="1500">
-                <a:solidFill>
-                  <a:srgbClr val="1B2A3A"/>
-                </a:solidFill>
-                <a:latin typeface="Calibri"/>
-                <a:ea typeface="游ゴシック"/>
-              </a:rPr>
-              <a:t>・機械で落とせる項目は人が見ないので、レビューは設計判断に集中できる</a:t>
-            </a:r>
-          </a:p>
-          <a:p>
-            <a:pPr>
-              <a:lnSpc>
-                <a:spcPct val="125000"/>
-              </a:lnSpc>
-              <a:spcAft>
-                <a:spcPts val="1125"/>
-              </a:spcAft>
-            </a:pPr>
-            <a:r>
-              <a:rPr sz="1500">
-                <a:solidFill>
-                  <a:srgbClr val="1B2A3A"/>
-                </a:solidFill>
-                <a:latin typeface="Calibri"/>
-                <a:ea typeface="游ゴシック"/>
-              </a:rPr>
-              <a:t>・アーキテクチャの依存規則もここで落ちる。規律が文書だけで終わらない仕組みにしている</a:t>
+                <a:spcPts val="1050"/>
+              </a:spcAft>
+            </a:pPr>
+            <a:r>
+              <a:rPr sz="1400">
+                <a:solidFill>
+                  <a:srgbClr val="1B2A3A"/>
+                </a:solidFill>
+                <a:latin typeface="Calibri"/>
+                <a:ea typeface="游ゴシック"/>
+              </a:rPr>
+              <a:t>・Red → Green → Refactor の順を崩さない。テストを後から足す順序を取らない</a:t>
+            </a:r>
+          </a:p>
+          <a:p>
+            <a:pPr>
+              <a:lnSpc>
+                <a:spcPct val="125000"/>
+              </a:lnSpc>
+              <a:spcAft>
+                <a:spcPts val="1050"/>
+              </a:spcAft>
+            </a:pPr>
+            <a:r>
+              <a:rPr sz="1400">
+                <a:solidFill>
+                  <a:srgbClr val="1B2A3A"/>
+                </a:solidFill>
+                <a:latin typeface="Calibri"/>
+                <a:ea typeface="游ゴシック"/>
+              </a:rPr>
+              <a:t>・単体・結合は Vitest + MSW でネットワークに触らず、E2E は Playwright + axe で実ブラウザを動かす</a:t>
+            </a:r>
+          </a:p>
+          <a:p>
+            <a:pPr>
+              <a:lnSpc>
+                <a:spcPct val="125000"/>
+              </a:lnSpc>
+              <a:spcAft>
+                <a:spcPts val="1050"/>
+              </a:spcAft>
+            </a:pPr>
+            <a:r>
+              <a:rPr sz="1400">
+                <a:solidFill>
+                  <a:srgbClr val="1B2A3A"/>
+                </a:solidFill>
+                <a:latin typeface="Calibri"/>
+                <a:ea typeface="游ゴシック"/>
+              </a:rPr>
+              <a:t>・操作レビューの手順をそのまま E2E に写すので、手で確かめたことが以後は自動で守られる</a:t>
+            </a:r>
+          </a:p>
+          <a:p>
+            <a:pPr>
+              <a:lnSpc>
+                <a:spcPct val="125000"/>
+              </a:lnSpc>
+              <a:spcAft>
+                <a:spcPts val="1050"/>
+              </a:spcAft>
+            </a:pPr>
+            <a:r>
+              <a:rPr sz="1400">
+                <a:solidFill>
+                  <a:srgbClr val="1B2A3A"/>
+                </a:solidFill>
+                <a:latin typeface="Calibri"/>
+                <a:ea typeface="游ゴシック"/>
+              </a:rPr>
+              <a:t>・いまの規模は単体・結合が 779 ケース、E2E が 106 ケース（2026-08-23 時点）</a:t>
+            </a:r>
+          </a:p>
+          <a:p>
+            <a:pPr>
+              <a:lnSpc>
+                <a:spcPct val="125000"/>
+              </a:lnSpc>
+              <a:spcAft>
+                <a:spcPts val="1050"/>
+              </a:spcAft>
+            </a:pPr>
+            <a:r>
+              <a:rPr sz="1400">
+                <a:solidFill>
+                  <a:srgbClr val="1B2A3A"/>
+                </a:solidFill>
+                <a:latin typeface="Calibri"/>
+                <a:ea typeface="游ゴシック"/>
+              </a:rPr>
+              <a:t>・テストのスキップ・無効化で緑にしない。落ちたまま次のタスクに進まない</a:t>
+            </a:r>
+          </a:p>
+          <a:p>
+            <a:pPr>
+              <a:lnSpc>
+                <a:spcPct val="125000"/>
+              </a:lnSpc>
+              <a:spcAft>
+                <a:spcPts val="1050"/>
+              </a:spcAft>
+            </a:pPr>
+            <a:r>
+              <a:rPr sz="1400">
+                <a:solidFill>
+                  <a:srgbClr val="1B2A3A"/>
+                </a:solidFill>
+                <a:latin typeface="Calibri"/>
+                <a:ea typeface="游ゴシック"/>
+              </a:rPr>
+              <a:t>・外部 API はすべてモック化してあり、環境変数を 1 つも設定しなくてもテストが完走する</a:t>
+            </a:r>
+          </a:p>
+          <a:p>
+            <a:pPr>
+              <a:lnSpc>
+                <a:spcPct val="125000"/>
+              </a:lnSpc>
+              <a:spcAft>
+                <a:spcPts val="1050"/>
+              </a:spcAft>
+            </a:pPr>
+            <a:r>
+              <a:rPr sz="1400">
+                <a:solidFill>
+                  <a:srgbClr val="1B2A3A"/>
+                </a:solidFill>
+                <a:latin typeface="Calibri"/>
+                <a:ea typeface="游ゴシック"/>
+              </a:rPr>
+              <a:t>・テストを後回しにした回は、動くものは早くできても後から直すコストの方が高くついた</a:t>
             </a:r>
           </a:p>
         </p:txBody>
@@ -4125,7 +4167,7 @@
                 <a:latin typeface="Calibri"/>
                 <a:ea typeface="游ゴシック"/>
               </a:rPr>
-              <a:t>レビューは、他人の PR として読み直す</a:t>
+              <a:t>機械検証を通さないと PR を出せない</a:t>
             </a:r>
           </a:p>
         </p:txBody>
@@ -4220,7 +4262,7 @@
                 <a:latin typeface="Calibri"/>
                 <a:ea typeface="游ゴシック"/>
               </a:rPr>
-              <a:t>・外部 AI レビュアー（Copilot・Gemini）は廃止。レビューは自前の /code-review で完結させる</a:t>
+              <a:t>・品質ゲートと本番デプロイに GitHub Actions は使わず、セッション自身が npm run check を走らせる</a:t>
             </a:r>
           </a:p>
           <a:p>
@@ -4240,7 +4282,7 @@
                 <a:latin typeface="Calibri"/>
                 <a:ea typeface="游ゴシック"/>
               </a:rPr>
-              <a:t>・第 1 段: 観点別に 5〜7 体のサブエージェントを並列起動し、事前文脈なしで差分を読ませる</a:t>
+              <a:t>・Actions の唯一の用途は Gem 候補プールの日次生成で、PR を作るところまでしかやらせない</a:t>
             </a:r>
           </a:p>
           <a:p>
@@ -4260,7 +4302,7 @@
                 <a:latin typeface="Calibri"/>
                 <a:ea typeface="游ゴシック"/>
               </a:rPr>
-              <a:t>・自分が書いたコードを自分で読むと盲点が残るため、あえて文脈を持たない読み手を立てる</a:t>
+              <a:t>・検査は 38 項目。lint・型・テスト・E2E・Lighthouse に、依存規則などの静的検査と運用ツール自身の self-test を重ねてある</a:t>
             </a:r>
           </a:p>
           <a:p>
@@ -4280,7 +4322,7 @@
                 <a:latin typeface="Calibri"/>
                 <a:ea typeface="游ゴシック"/>
               </a:rPr>
-              <a:t>・第 2 段: 指摘ごとに反証担当を立て、反証に耐えたものを CONFIRMED、疑いが残るものを PLAUSIBLE と明記する</a:t>
+              <a:t>・結果の Markdown 表を PR 本文に貼るのが必須。貼っていないとフックが PR 作成をブロックする</a:t>
             </a:r>
           </a:p>
           <a:p>
@@ -4300,7 +4342,7 @@
                 <a:latin typeface="Calibri"/>
                 <a:ea typeface="游ゴシック"/>
               </a:rPr>
-              <a:t>・第 3 段: 確度を問わず全件を行単位のインラインコメントに残す。指摘ゼロでもレビューを 1 件投稿する</a:t>
+              <a:t>・アーキテクチャの依存規則もここで落ちるので、規律が文書だけで終わらない</a:t>
             </a:r>
           </a:p>
           <a:p>
@@ -4320,7 +4362,7 @@
                 <a:latin typeface="Calibri"/>
                 <a:ea typeface="游ゴシック"/>
               </a:rPr>
-              <a:t>・対応しないと決めた指摘も、理由を返信してから Resolve する。黙って閉じない</a:t>
+              <a:t>・機械で落とせるものは人が見ない。レビューは設計判断に集中できる</a:t>
             </a:r>
           </a:p>
         </p:txBody>
@@ -4399,7 +4441,7 @@
                 <a:latin typeface="Calibri"/>
                 <a:ea typeface="游ゴシック"/>
               </a:rPr>
-              <a:t>実装からマージまで、確認なしで走り切る</a:t>
+              <a:t>レビューは、他人の PR として読み直す</a:t>
             </a:r>
           </a:p>
         </p:txBody>
@@ -4483,138 +4525,118 @@
                 <a:spcPct val="125000"/>
               </a:lnSpc>
               <a:spcAft>
-                <a:spcPts val="1050"/>
-              </a:spcAft>
-            </a:pPr>
-            <a:r>
-              <a:rPr sz="1400">
-                <a:solidFill>
-                  <a:srgbClr val="1B2A3A"/>
-                </a:solidFill>
-                <a:latin typeface="Calibri"/>
-                <a:ea typeface="游ゴシック"/>
-              </a:rPr>
-              <a:t>・実装 → セルフレビュー → PR 作成 → 機械ゲート + セルフレビュー → 指摘対応 → squash マージまで一続きで進む</a:t>
-            </a:r>
-          </a:p>
-          <a:p>
-            <a:pPr>
-              <a:lnSpc>
-                <a:spcPct val="125000"/>
-              </a:lnSpc>
-              <a:spcAft>
-                <a:spcPts val="1050"/>
-              </a:spcAft>
-            </a:pPr>
-            <a:r>
-              <a:rPr sz="1400">
-                <a:solidFill>
-                  <a:srgbClr val="1B2A3A"/>
-                </a:solidFill>
-                <a:latin typeface="Calibri"/>
-                <a:ea typeface="游ゴシック"/>
-              </a:rPr>
-              <a:t>・PR 本文には Sprint Goal・sp（見積もり）・Session-Id・Team（編成）を必ず書く</a:t>
-            </a:r>
-          </a:p>
-          <a:p>
-            <a:pPr>
-              <a:lnSpc>
-                <a:spcPct val="125000"/>
-              </a:lnSpc>
-              <a:spcAft>
-                <a:spcPts val="1050"/>
-              </a:spcAft>
-            </a:pPr>
-            <a:r>
-              <a:rPr sz="1400">
-                <a:solidFill>
-                  <a:srgbClr val="1B2A3A"/>
-                </a:solidFill>
-                <a:latin typeface="Calibri"/>
-                <a:ea typeface="游ゴシック"/>
-              </a:rPr>
-              <a:t>・Session-Id があるので、セッションが切れても「自分が出した PR」を後から決定論的に回収できる</a:t>
-            </a:r>
-          </a:p>
-          <a:p>
-            <a:pPr>
-              <a:lnSpc>
-                <a:spcPct val="125000"/>
-              </a:lnSpc>
-              <a:spcAft>
-                <a:spcPts val="1050"/>
-              </a:spcAft>
-            </a:pPr>
-            <a:r>
-              <a:rPr sz="1400">
-                <a:solidFill>
-                  <a:srgbClr val="1B2A3A"/>
-                </a:solidFill>
-                <a:latin typeface="Calibri"/>
-                <a:ea typeface="游ゴシック"/>
-              </a:rPr>
-              <a:t>・同じ箇所の修正サイクルが 2 回を超えたらサーキットブレーカーで止め、根本原因を分析して報告する</a:t>
-            </a:r>
-          </a:p>
-          <a:p>
-            <a:pPr>
-              <a:lnSpc>
-                <a:spcPct val="125000"/>
-              </a:lnSpc>
-              <a:spcAft>
-                <a:spcPts val="1050"/>
-              </a:spcAft>
-            </a:pPr>
-            <a:r>
-              <a:rPr sz="1400">
-                <a:solidFill>
-                  <a:srgbClr val="1B2A3A"/>
-                </a:solidFill>
-                <a:latin typeface="Calibri"/>
-                <a:ea typeface="游ゴシック"/>
-              </a:rPr>
-              <a:t>・止める条件を先に決めておくことが、確認を挟まずに走らせるための前提になっている</a:t>
-            </a:r>
-          </a:p>
-          <a:p>
-            <a:pPr>
-              <a:lnSpc>
-                <a:spcPct val="125000"/>
-              </a:lnSpc>
-              <a:spcAft>
-                <a:spcPts val="1050"/>
-              </a:spcAft>
-            </a:pPr>
-            <a:r>
-              <a:rPr sz="1400">
-                <a:solidFill>
-                  <a:srgbClr val="1B2A3A"/>
-                </a:solidFill>
-                <a:latin typeface="Calibri"/>
-                <a:ea typeface="游ゴシック"/>
-              </a:rPr>
-              <a:t>・この運用でマージ済みの PR は 90 件（2026-08-22 時点・GitHub 検索の実測）</a:t>
-            </a:r>
-          </a:p>
-          <a:p>
-            <a:pPr>
-              <a:lnSpc>
-                <a:spcPct val="125000"/>
-              </a:lnSpc>
-              <a:spcAft>
-                <a:spcPts val="1050"/>
-              </a:spcAft>
-            </a:pPr>
-            <a:r>
-              <a:rPr sz="1400">
-                <a:solidFill>
-                  <a:srgbClr val="1B2A3A"/>
-                </a:solidFill>
-                <a:latin typeface="Calibri"/>
-                <a:ea typeface="游ゴシック"/>
-              </a:rPr>
-              <a:t>・速度の効果は測っていないので語らない。言えるのは「この手順で回っている」ことだけ</a:t>
+                <a:spcPts val="1125"/>
+              </a:spcAft>
+            </a:pPr>
+            <a:r>
+              <a:rPr sz="1500">
+                <a:solidFill>
+                  <a:srgbClr val="1B2A3A"/>
+                </a:solidFill>
+                <a:latin typeface="Calibri"/>
+                <a:ea typeface="游ゴシック"/>
+              </a:rPr>
+              <a:t>・外部 AI レビュアー（Copilot・Gemini）は廃止。レビューは自前の /code-review で完結させる</a:t>
+            </a:r>
+          </a:p>
+          <a:p>
+            <a:pPr>
+              <a:lnSpc>
+                <a:spcPct val="125000"/>
+              </a:lnSpc>
+              <a:spcAft>
+                <a:spcPts val="1125"/>
+              </a:spcAft>
+            </a:pPr>
+            <a:r>
+              <a:rPr sz="1500">
+                <a:solidFill>
+                  <a:srgbClr val="1B2A3A"/>
+                </a:solidFill>
+                <a:latin typeface="Calibri"/>
+                <a:ea typeface="游ゴシック"/>
+              </a:rPr>
+              <a:t>・第 1 段: 観点別に 5〜7 体のサブエージェントを並列起動し、事前文脈なしで差分を読ませる</a:t>
+            </a:r>
+          </a:p>
+          <a:p>
+            <a:pPr>
+              <a:lnSpc>
+                <a:spcPct val="125000"/>
+              </a:lnSpc>
+              <a:spcAft>
+                <a:spcPts val="1125"/>
+              </a:spcAft>
+            </a:pPr>
+            <a:r>
+              <a:rPr sz="1500">
+                <a:solidFill>
+                  <a:srgbClr val="1B2A3A"/>
+                </a:solidFill>
+                <a:latin typeface="Calibri"/>
+                <a:ea typeface="游ゴシック"/>
+              </a:rPr>
+              <a:t>・自分が書いたコードを自分で読むと盲点が残るため、あえて文脈を持たない読み手を立てる</a:t>
+            </a:r>
+          </a:p>
+          <a:p>
+            <a:pPr>
+              <a:lnSpc>
+                <a:spcPct val="125000"/>
+              </a:lnSpc>
+              <a:spcAft>
+                <a:spcPts val="1125"/>
+              </a:spcAft>
+            </a:pPr>
+            <a:r>
+              <a:rPr sz="1500">
+                <a:solidFill>
+                  <a:srgbClr val="1B2A3A"/>
+                </a:solidFill>
+                <a:latin typeface="Calibri"/>
+                <a:ea typeface="游ゴシック"/>
+              </a:rPr>
+              <a:t>・第 2 段: 指摘ごとに反証担当を立て、反証に耐えたものを CONFIRMED、疑いが残るものを PLAUSIBLE と明記する</a:t>
+            </a:r>
+          </a:p>
+          <a:p>
+            <a:pPr>
+              <a:lnSpc>
+                <a:spcPct val="125000"/>
+              </a:lnSpc>
+              <a:spcAft>
+                <a:spcPts val="1125"/>
+              </a:spcAft>
+            </a:pPr>
+            <a:r>
+              <a:rPr sz="1500">
+                <a:solidFill>
+                  <a:srgbClr val="1B2A3A"/>
+                </a:solidFill>
+                <a:latin typeface="Calibri"/>
+                <a:ea typeface="游ゴシック"/>
+              </a:rPr>
+              <a:t>・第 3 段: 確度を問わず全件を行単位のインラインコメントに残す。指摘ゼロでもレビューを 1 件投稿する</a:t>
+            </a:r>
+          </a:p>
+          <a:p>
+            <a:pPr>
+              <a:lnSpc>
+                <a:spcPct val="125000"/>
+              </a:lnSpc>
+              <a:spcAft>
+                <a:spcPts val="1125"/>
+              </a:spcAft>
+            </a:pPr>
+            <a:r>
+              <a:rPr sz="1500">
+                <a:solidFill>
+                  <a:srgbClr val="1B2A3A"/>
+                </a:solidFill>
+                <a:latin typeface="Calibri"/>
+                <a:ea typeface="游ゴシック"/>
+              </a:rPr>
+              <a:t>・対応しないと決めた指摘も、理由を返信してから Resolve する。黙って閉じない</a:t>
             </a:r>
           </a:p>
         </p:txBody>
@@ -4693,7 +4715,7 @@
                 <a:latin typeface="Calibri"/>
                 <a:ea typeface="游ゴシック"/>
               </a:rPr>
-              <a:t>Gem Index ＝ 被依存数と star の残差</a:t>
+              <a:t>実装からマージまで、確認なしで走り切る</a:t>
             </a:r>
           </a:p>
         </p:txBody>
@@ -4788,7 +4810,7 @@
                 <a:latin typeface="Calibri"/>
                 <a:ea typeface="游ゴシック"/>
               </a:rPr>
-              <a:t>・エコシステム内での「被依存数のパーセンタイル順位」から「star のパーセンタイル順位」を引く</a:t>
+              <a:t>・実装 → セルフレビュー → PR 作成 → 機械ゲート + セルフレビュー → 指摘対応 → squash マージまで一続きで進む</a:t>
             </a:r>
           </a:p>
           <a:p>
@@ -4808,7 +4830,7 @@
                 <a:latin typeface="Calibri"/>
                 <a:ea typeface="游ゴシック"/>
               </a:rPr>
-              <a:t>・パーセンタイル順位で比べるので、言語やエコシステムの規模が違っても同じ尺度に乗る</a:t>
+              <a:t>・PR 本文には Sprint Goal・sp（見積もり）・Session-Id・Team（編成）を必ず書く</a:t>
             </a:r>
           </a:p>
           <a:p>
@@ -4828,7 +4850,7 @@
                 <a:latin typeface="Calibri"/>
                 <a:ea typeface="游ゴシック"/>
               </a:rPr>
-              <a:t>・star を水増しすると値は下がる。偽 star に構造的に強い</a:t>
+              <a:t>・Session-Id があるので、セッションが切れても「自分が出した PR」を後から決定論的に回収できる</a:t>
             </a:r>
           </a:p>
           <a:p>
@@ -4848,7 +4870,7 @@
                 <a:latin typeface="Calibri"/>
                 <a:ea typeface="游ゴシック"/>
               </a:rPr>
-              <a:t>・健全性は criticality_score（OpenSSF の既存指標）をそのまま使い、自作しない</a:t>
+              <a:t>・同じ箇所の修正サイクルが 2 回を超えたらサーキットブレーカーで止め、根本原因を分析して報告する</a:t>
             </a:r>
           </a:p>
           <a:p>
@@ -4868,7 +4890,7 @@
                 <a:latin typeface="Calibri"/>
                 <a:ea typeface="游ゴシック"/>
               </a:rPr>
-              <a:t>・健全性は合算せず足切りにだけ使う。合算すると「健全だが有名」が上位に戻る</a:t>
+              <a:t>・止める条件を先に決めておくことが、確認を挟まずに走らせるための前提になっている</a:t>
             </a:r>
           </a:p>
           <a:p>
@@ -4888,7 +4910,7 @@
                 <a:latin typeface="Calibri"/>
                 <a:ea typeface="游ゴシック"/>
               </a:rPr>
-              <a:t>・被依存数は Ecosyste.ms の npm レジストリ API、star は GitHub API から取る</a:t>
+              <a:t>・この運用でマージ済みの PR は 120 件（2026-08-23 時点・GitHub API の実測）</a:t>
             </a:r>
           </a:p>
           <a:p>
@@ -4908,7 +4930,7 @@
                 <a:latin typeface="Calibri"/>
                 <a:ea typeface="游ゴシック"/>
               </a:rPr>
-              <a:t>・Ecosyste.ms のデータは CC BY-SA 4.0。画面に出典・ライセンス・生成時刻を明記している</a:t>
+              <a:t>・速度の効果は測っていないので語らない。言えるのは「この手順で回っている」ことだけ</a:t>
             </a:r>
           </a:p>
         </p:txBody>
@@ -4987,7 +5009,7 @@
                 <a:latin typeface="Calibri"/>
                 <a:ea typeface="游ゴシック"/>
               </a:rPr>
-              <a:t>作った差別化機能を、実測で撤去した</a:t>
+              <a:t>Gem Index ＝ 被依存数と star の残差</a:t>
             </a:r>
           </a:p>
         </p:txBody>
@@ -5082,7 +5104,7 @@
                 <a:latin typeface="Calibri"/>
                 <a:ea typeface="游ゴシック"/>
               </a:rPr>
-              <a:t>・作る前は「被依存数で並べれば埋もれた良いものが出る」と考えていた</a:t>
+              <a:t>・エコシステム内での「被依存数のパーセンタイル順位」から「star のパーセンタイル順位」を引く</a:t>
             </a:r>
           </a:p>
           <a:p>
@@ -5102,7 +5124,7 @@
                 <a:latin typeface="Calibri"/>
                 <a:ea typeface="游ゴシック"/>
               </a:rPr>
-              <a:t>・候補プールは Ecosyste.ms の npm レジストリを被依存数の降順に上位 294 件、事前バッチで取ったもの</a:t>
+              <a:t>・パーセンタイル順位で比べるので、言語やエコシステムの規模が違っても同じ尺度に乗る</a:t>
             </a:r>
           </a:p>
           <a:p>
@@ -5122,7 +5144,7 @@
                 <a:latin typeface="Calibri"/>
                 <a:ea typeface="游ゴシック"/>
               </a:rPr>
-              <a:t>・同じリポジトリが複数パッケージを出すため、ユニークなリポジトリは 227 件まで減る</a:t>
+              <a:t>・star を水増しすると値は下がる。偽 star に構造的に強い</a:t>
             </a:r>
           </a:p>
           <a:p>
@@ -5142,7 +5164,7 @@
                 <a:latin typeface="Calibri"/>
                 <a:ea typeface="游ゴシック"/>
               </a:rPr>
-              <a:t>・却下: この 227 件では検索上位 100 件との一致が一般語でほぼ 0 件で、並べ替える対象がなかった</a:t>
+              <a:t>・健全性は criticality_score（OpenSSF の既存指標）をそのまま使い、自作しないと決めてある</a:t>
             </a:r>
           </a:p>
           <a:p>
@@ -5162,7 +5184,7 @@
                 <a:latin typeface="Calibri"/>
                 <a:ea typeface="游ゴシック"/>
               </a:rPr>
-              <a:t>・却下: 候補を広げる案も、バンドル 3 MB 上限に当たるうえ、npm 限定では非 JS 系に当たらない</a:t>
+              <a:t>・ただし今効いている足切りは star 下限 5 の汚染フィルタで、健全性の指標はまだ入れていない</a:t>
             </a:r>
           </a:p>
           <a:p>
@@ -5182,7 +5204,7 @@
                 <a:latin typeface="Calibri"/>
                 <a:ea typeface="游ゴシック"/>
               </a:rPr>
-              <a:t>・採用: sort=gem-index を検索結果から撤去した（Gem Index の定義そのものは撤回しない）</a:t>
+              <a:t>・被依存数は Ecosyste.ms の 12 レジストリ、star は GitHub API から取る</a:t>
             </a:r>
           </a:p>
           <a:p>
@@ -5202,47 +5224,7 @@
                 <a:latin typeface="Calibri"/>
                 <a:ea typeface="游ゴシック"/>
               </a:rPr>
-              <a:t>・採用: 1 検索あたり最大 10 リクエスト（体感 3〜8 秒）が、常に 1 回（0.5〜1 秒）になった</a:t>
-            </a:r>
-          </a:p>
-          <a:p>
-            <a:pPr>
-              <a:lnSpc>
-                <a:spcPct val="125000"/>
-              </a:lnSpc>
-              <a:spcAft>
-                <a:spcPts val="1050"/>
-              </a:spcAft>
-            </a:pPr>
-            <a:r>
-              <a:rPr sz="1400">
-                <a:solidFill>
-                  <a:srgbClr val="1B2A3A"/>
-                </a:solidFill>
-                <a:latin typeface="Calibri"/>
-                <a:ea typeface="游ゴシック"/>
-              </a:rPr>
-              <a:t>・採用: Gem Index は「今日の Gem」ダイジェストで使い続ける</a:t>
-            </a:r>
-          </a:p>
-          <a:p>
-            <a:pPr>
-              <a:lnSpc>
-                <a:spcPct val="125000"/>
-              </a:lnSpc>
-              <a:spcAft>
-                <a:spcPts val="1050"/>
-              </a:spcAft>
-            </a:pPr>
-            <a:r>
-              <a:rPr sz="1400">
-                <a:solidFill>
-                  <a:srgbClr val="1B2A3A"/>
-                </a:solidFill>
-                <a:latin typeface="Calibri"/>
-                <a:ea typeface="游ゴシック"/>
-              </a:rPr>
-              <a:t>・差別化の見せ場を自分で外す決定だったが、実測の数字の前では迷う余地がなかった</a:t>
+              <a:t>・Ecosyste.ms のデータは CC BY-SA 4.0。画面に出典・ライセンス・生成時刻を明記している</a:t>
             </a:r>
           </a:p>
         </p:txBody>
@@ -5321,7 +5303,7 @@
                 <a:latin typeface="Calibri"/>
                 <a:ea typeface="游ゴシック"/>
               </a:rPr>
-              <a:t>認証方式は 6 つの軸で選ぶ</a:t>
+              <a:t>作った差別化機能を、実測で撤去した</a:t>
             </a:r>
           </a:p>
         </p:txBody>
@@ -5416,7 +5398,7 @@
                 <a:latin typeface="Calibri"/>
                 <a:ea typeface="游ゴシック"/>
               </a:rPr>
-              <a:t>・最初は Fine-grained PAT で十分だと思っていた</a:t>
+              <a:t>・作る前は「被依存数で並べれば埋もれた良いものが出る」と考えていた</a:t>
             </a:r>
           </a:p>
           <a:p>
@@ -5436,7 +5418,7 @@
                 <a:latin typeface="Calibri"/>
                 <a:ea typeface="游ゴシック"/>
               </a:rPr>
-              <a:t>・却下: PAT は有効期限の更新が人手に残る（定常運用ゼロという要件と噛み合わない）</a:t>
+              <a:t>・当時の候補プールは npm だけの上位 294 件で、リポジトリ単位ではユニーク 227 件しかなかった</a:t>
             </a:r>
           </a:p>
           <a:p>
@@ -5456,7 +5438,7 @@
                 <a:latin typeface="Calibri"/>
                 <a:ea typeface="游ゴシック"/>
               </a:rPr>
-              <a:t>・却下: 未認証のまま叩く（レート枠が狭く、利用者が増えるほど体感が落ちる）</a:t>
+              <a:t>・却下: この 227 件では検索上位 100 件との一致が一般語でほぼ 0 件で、並べ替える対象がなかった</a:t>
             </a:r>
           </a:p>
           <a:p>
@@ -5476,7 +5458,7 @@
                 <a:latin typeface="Calibri"/>
                 <a:ea typeface="游ゴシック"/>
               </a:rPr>
-              <a:t>・採用: GitHub App の installation token（JWT 署名 → token 取得 → 失効前まで再利用）</a:t>
+              <a:t>・却下: 候補を広げる案も、バンドル 3 MB 上限に当たるうえ、npm 限定では非 JS 系に当たらない</a:t>
             </a:r>
           </a:p>
           <a:p>
@@ -5496,7 +5478,7 @@
                 <a:latin typeface="Calibri"/>
                 <a:ea typeface="游ゴシック"/>
               </a:rPr>
-              <a:t>・軸 2「取得の往復コストを払えるか」と軸 4「実装コストを払えるか」が拒否権を持つ</a:t>
+              <a:t>・採用: 検索結果を Gem Index 順に並べる sort=gem-index を用意していたが、これを撤去した</a:t>
             </a:r>
           </a:p>
           <a:p>
@@ -5516,7 +5498,7 @@
                 <a:latin typeface="Calibri"/>
                 <a:ea typeface="游ゴシック"/>
               </a:rPr>
-              <a:t>・決め手は軸 3（有効期限の更新を人手でやらない）。レート枠の拡大は付随して得られた利点</a:t>
+              <a:t>・採用: 1 検索あたり最大 10 リクエスト（体感 3〜8 秒）が、常に 1 回（0.5〜1 秒）になった</a:t>
             </a:r>
           </a:p>
           <a:p>
@@ -5536,7 +5518,27 @@
                 <a:latin typeface="Calibri"/>
                 <a:ea typeface="游ゴシック"/>
               </a:rPr>
-              <a:t>・軸は「どれが効いたか」ではなく「どれが拒否権を持つか」で並べてある</a:t>
+              <a:t>・差別化の見せ場を自分で外す決定だったが、実測の数字の前では迷う余地がなかった</a:t>
+            </a:r>
+          </a:p>
+          <a:p>
+            <a:pPr>
+              <a:lnSpc>
+                <a:spcPct val="125000"/>
+              </a:lnSpc>
+              <a:spcAft>
+                <a:spcPts val="1050"/>
+              </a:spcAft>
+            </a:pPr>
+            <a:r>
+              <a:rPr sz="1400">
+                <a:solidFill>
+                  <a:srgbClr val="1B2A3A"/>
+                </a:solidFill>
+                <a:latin typeface="Calibri"/>
+                <a:ea typeface="游ゴシック"/>
+              </a:rPr>
+              <a:t>・ただしこの 2 つの却下理由は、このあと前提ごと崩れることになる</a:t>
             </a:r>
           </a:p>
         </p:txBody>
@@ -5615,7 +5617,7 @@
                 <a:latin typeface="Calibri"/>
                 <a:ea typeface="游ゴシック"/>
               </a:rPr>
-              <a:t>Web アプリだが、DB を 1 つも持たない</a:t>
+              <a:t>母集団を広げたら、撤去の根拠が消えた</a:t>
             </a:r>
           </a:p>
         </p:txBody>
@@ -5710,7 +5712,7 @@
                 <a:latin typeface="Calibri"/>
                 <a:ea typeface="游ゴシック"/>
               </a:rPr>
-              <a:t>・却下: 自前 ETL + DB（単一開発者 + AI の運用では定常運用コストが見合わない）</a:t>
+              <a:t>・当時は「npm 限定だから広げても非 JS 系には効かない」と構造的な限界だと書いた。そこが間違っていた</a:t>
             </a:r>
           </a:p>
           <a:p>
@@ -5730,7 +5732,7 @@
                 <a:latin typeface="Calibri"/>
                 <a:ea typeface="游ゴシック"/>
               </a:rPr>
-              <a:t>・却下: お気に入りをサーバーに保存（端末間同期の利便性より DB レス原則を優先した）</a:t>
+              <a:t>・集める先を 12 レジストリへ広げ、被依存数の多い順に最大 15,000 件ずつ集め直した</a:t>
             </a:r>
           </a:p>
           <a:p>
@@ -5750,7 +5752,7 @@
                 <a:latin typeface="Calibri"/>
                 <a:ea typeface="游ゴシック"/>
               </a:rPr>
-              <a:t>・採用: 検索状態は URL に、ロケールはパスに置く</a:t>
+              <a:t>・汚染と重複を落として残ったのはユニーク 62,483 リポジトリ。最大の npm でも 15.5% にとどまる</a:t>
             </a:r>
           </a:p>
           <a:p>
@@ -5770,7 +5772,7 @@
                 <a:latin typeface="Calibri"/>
                 <a:ea typeface="游ゴシック"/>
               </a:rPr>
-              <a:t>・採用: セッションは暗号化 httpOnly Cookie、お気に入りは localStorage に置く</a:t>
+              <a:t>・一般語 24 語で測り直すと、検索上位 100 件の平均 34.5% に Gem Index が付いた</a:t>
             </a:r>
           </a:p>
           <a:p>
@@ -5790,7 +5792,7 @@
                 <a:latin typeface="Calibri"/>
                 <a:ea typeface="游ゴシック"/>
               </a:rPr>
-              <a:t>・唯一の例外が CachePort（アーキテクチャで触れた TTL 付きキャッシュ層のインターフェース）</a:t>
+              <a:t>・3 MB のバンドル上限も、静的アセットとして配る方式に変えたことで当たらなくなった</a:t>
             </a:r>
           </a:p>
           <a:p>
@@ -5810,7 +5812,7 @@
                 <a:latin typeface="Calibri"/>
                 <a:ea typeface="游ゴシック"/>
               </a:rPr>
-              <a:t>・DB を持たないので、バックアップもマイグレーションも運用から消えた</a:t>
+              <a:t>・それでも sort=gem-index は戻さない。100 件中 68 件に値が無く、主ソートには使えない</a:t>
             </a:r>
           </a:p>
           <a:p>
@@ -5830,7 +5832,7 @@
                 <a:latin typeface="Calibri"/>
                 <a:ea typeface="游ゴシック"/>
               </a:rPr>
-              <a:t>・代わりに利用者ごとの状態は端末に閉じ、端末間で共有できない（受け入れた代償）</a:t>
+              <a:t>・実測で殺した判断を、自分の実測でひっくり返す作業だった。記録が残っていたから測り直せた</a:t>
             </a:r>
           </a:p>
         </p:txBody>
@@ -5909,7 +5911,7 @@
                 <a:latin typeface="Calibri"/>
                 <a:ea typeface="游ゴシック"/>
               </a:rPr>
-              <a:t>持ち帰れる 4 つの考え方</a:t>
+              <a:t>認証方式は 6 つの軸で選ぶ</a:t>
             </a:r>
           </a:p>
         </p:txBody>
@@ -5993,98 +5995,138 @@
                 <a:spcPct val="125000"/>
               </a:lnSpc>
               <a:spcAft>
-                <a:spcPts val="1200"/>
-              </a:spcAft>
-            </a:pPr>
-            <a:r>
-              <a:rPr sz="1600">
-                <a:solidFill>
-                  <a:srgbClr val="1B2A3A"/>
-                </a:solidFill>
-                <a:latin typeface="Calibri"/>
-                <a:ea typeface="游ゴシック"/>
-              </a:rPr>
-              <a:t>・注目度ではなく実利用を起点に測ると、既存の順位づけとは別のものが見えてくる</a:t>
-            </a:r>
-          </a:p>
-          <a:p>
-            <a:pPr>
-              <a:lnSpc>
-                <a:spcPct val="125000"/>
-              </a:lnSpc>
-              <a:spcAft>
-                <a:spcPts val="1200"/>
-              </a:spcAft>
-            </a:pPr>
-            <a:r>
-              <a:rPr sz="1600">
-                <a:solidFill>
-                  <a:srgbClr val="1B2A3A"/>
-                </a:solidFill>
-                <a:latin typeface="Calibri"/>
-                <a:ea typeface="游ゴシック"/>
-              </a:rPr>
-              <a:t>・指標は絶対値ではなく残差で作ると、数字の水増しに構造的に強くなる</a:t>
-            </a:r>
-          </a:p>
-          <a:p>
-            <a:pPr>
-              <a:lnSpc>
-                <a:spcPct val="125000"/>
-              </a:lnSpc>
-              <a:spcAft>
-                <a:spcPts val="1200"/>
-              </a:spcAft>
-            </a:pPr>
-            <a:r>
-              <a:rPr sz="1600">
-                <a:solidFill>
-                  <a:srgbClr val="1B2A3A"/>
-                </a:solidFill>
-                <a:latin typeface="Calibri"/>
-                <a:ea typeface="游ゴシック"/>
-              </a:rPr>
-              <a:t>・層を足す前に「どの規律を守るためか」を 1 行で言えるかを問う。言えないなら足さない</a:t>
-            </a:r>
-          </a:p>
-          <a:p>
-            <a:pPr>
-              <a:lnSpc>
-                <a:spcPct val="125000"/>
-              </a:lnSpc>
-              <a:spcAft>
-                <a:spcPts val="1200"/>
-              </a:spcAft>
-            </a:pPr>
-            <a:r>
-              <a:rPr sz="1600">
-                <a:solidFill>
-                  <a:srgbClr val="1B2A3A"/>
-                </a:solidFill>
-                <a:latin typeface="Calibri"/>
-                <a:ea typeface="游ゴシック"/>
-              </a:rPr>
-              <a:t>・作った機能を実測で殺せるように、判断の根拠と却下案を記録に残しておく</a:t>
-            </a:r>
-          </a:p>
-          <a:p>
-            <a:pPr>
-              <a:lnSpc>
-                <a:spcPct val="125000"/>
-              </a:lnSpc>
-              <a:spcAft>
-                <a:spcPts val="1200"/>
-              </a:spcAft>
-            </a:pPr>
-            <a:r>
-              <a:rPr sz="1600">
-                <a:solidFill>
-                  <a:srgbClr val="1B2A3A"/>
-                </a:solidFill>
-                <a:latin typeface="Calibri"/>
-                <a:ea typeface="游ゴシック"/>
-              </a:rPr>
-              <a:t>・どれも gem-hunter に固有ではなく、次に作るものにそのまま持ち込める</a:t>
+                <a:spcPts val="1050"/>
+              </a:spcAft>
+            </a:pPr>
+            <a:r>
+              <a:rPr sz="1400">
+                <a:solidFill>
+                  <a:srgbClr val="1B2A3A"/>
+                </a:solidFill>
+                <a:latin typeface="Calibri"/>
+                <a:ea typeface="游ゴシック"/>
+              </a:rPr>
+              <a:t>・最初は Fine-grained PAT で十分だと思っていた</a:t>
+            </a:r>
+          </a:p>
+          <a:p>
+            <a:pPr>
+              <a:lnSpc>
+                <a:spcPct val="125000"/>
+              </a:lnSpc>
+              <a:spcAft>
+                <a:spcPts val="1050"/>
+              </a:spcAft>
+            </a:pPr>
+            <a:r>
+              <a:rPr sz="1400">
+                <a:solidFill>
+                  <a:srgbClr val="1B2A3A"/>
+                </a:solidFill>
+                <a:latin typeface="Calibri"/>
+                <a:ea typeface="游ゴシック"/>
+              </a:rPr>
+              <a:t>・却下: PAT は有効期限の更新が人手に残る（定常運用ゼロという要件と噛み合わない）</a:t>
+            </a:r>
+          </a:p>
+          <a:p>
+            <a:pPr>
+              <a:lnSpc>
+                <a:spcPct val="125000"/>
+              </a:lnSpc>
+              <a:spcAft>
+                <a:spcPts val="1050"/>
+              </a:spcAft>
+            </a:pPr>
+            <a:r>
+              <a:rPr sz="1400">
+                <a:solidFill>
+                  <a:srgbClr val="1B2A3A"/>
+                </a:solidFill>
+                <a:latin typeface="Calibri"/>
+                <a:ea typeface="游ゴシック"/>
+              </a:rPr>
+              <a:t>・却下: 未認証のまま叩く（レート枠が狭く、利用者が増えるほど体感が落ちる）</a:t>
+            </a:r>
+          </a:p>
+          <a:p>
+            <a:pPr>
+              <a:lnSpc>
+                <a:spcPct val="125000"/>
+              </a:lnSpc>
+              <a:spcAft>
+                <a:spcPts val="1050"/>
+              </a:spcAft>
+            </a:pPr>
+            <a:r>
+              <a:rPr sz="1400">
+                <a:solidFill>
+                  <a:srgbClr val="1B2A3A"/>
+                </a:solidFill>
+                <a:latin typeface="Calibri"/>
+                <a:ea typeface="游ゴシック"/>
+              </a:rPr>
+              <a:t>・採用: GitHub App の installation token（JWT 署名 → token 取得 → 失効前まで再利用）</a:t>
+            </a:r>
+          </a:p>
+          <a:p>
+            <a:pPr>
+              <a:lnSpc>
+                <a:spcPct val="125000"/>
+              </a:lnSpc>
+              <a:spcAft>
+                <a:spcPts val="1050"/>
+              </a:spcAft>
+            </a:pPr>
+            <a:r>
+              <a:rPr sz="1400">
+                <a:solidFill>
+                  <a:srgbClr val="1B2A3A"/>
+                </a:solidFill>
+                <a:latin typeface="Calibri"/>
+                <a:ea typeface="游ゴシック"/>
+              </a:rPr>
+              <a:t>・軸 2「取得の往復コストを払えるか」と軸 4「実装コストを払えるか」が拒否権を持つ</a:t>
+            </a:r>
+          </a:p>
+          <a:p>
+            <a:pPr>
+              <a:lnSpc>
+                <a:spcPct val="125000"/>
+              </a:lnSpc>
+              <a:spcAft>
+                <a:spcPts val="1050"/>
+              </a:spcAft>
+            </a:pPr>
+            <a:r>
+              <a:rPr sz="1400">
+                <a:solidFill>
+                  <a:srgbClr val="1B2A3A"/>
+                </a:solidFill>
+                <a:latin typeface="Calibri"/>
+                <a:ea typeface="游ゴシック"/>
+              </a:rPr>
+              <a:t>・決め手は軸 3（有効期限の更新を人手でやらない）。レート枠の拡大は付随して得られた利点</a:t>
+            </a:r>
+          </a:p>
+          <a:p>
+            <a:pPr>
+              <a:lnSpc>
+                <a:spcPct val="125000"/>
+              </a:lnSpc>
+              <a:spcAft>
+                <a:spcPts val="1050"/>
+              </a:spcAft>
+            </a:pPr>
+            <a:r>
+              <a:rPr sz="1400">
+                <a:solidFill>
+                  <a:srgbClr val="1B2A3A"/>
+                </a:solidFill>
+                <a:latin typeface="Calibri"/>
+                <a:ea typeface="游ゴシック"/>
+              </a:rPr>
+              <a:t>・軸は「どれが効いたか」ではなく「どれが拒否権を持つか」で並べてある</a:t>
             </a:r>
           </a:p>
         </p:txBody>
@@ -6358,7 +6400,555 @@
                 <a:latin typeface="Calibri"/>
                 <a:ea typeface="游ゴシック"/>
               </a:rPr>
-              <a:t>・この画面がこの発表のゴール。ここに至るまでの判断をこれから話す</a:t>
+              <a:t>・カードに付く「Gem」の印と一覧への導線は次で扱う。この画面がこの発表のゴール</a:t>
+            </a:r>
+          </a:p>
+        </p:txBody>
+      </p:sp>
+    </p:spTree>
+  </p:cSld>
+  <p:clrMapOvr>
+    <a:masterClrMapping/>
+  </p:clrMapOvr>
+</p:sld>
+</file>
+
+<file path=ppt/slides/slide20.xml><?xml version="1.0" encoding="utf-8"?>
+<p:sld xmlns:a="http://schemas.openxmlformats.org/drawingml/2006/main" xmlns:p="http://schemas.openxmlformats.org/presentationml/2006/main" xmlns:r="http://schemas.openxmlformats.org/officeDocument/2006/relationships">
+  <p:cSld>
+    <p:bg>
+      <p:bgPr>
+        <a:solidFill>
+          <a:srgbClr val="FAF6EC"/>
+        </a:solidFill>
+        <a:effectLst/>
+      </p:bgPr>
+    </p:bg>
+    <p:spTree>
+      <p:nvGrpSpPr>
+        <p:cNvPr id="1" name=""/>
+        <p:cNvGrpSpPr/>
+        <p:nvPr/>
+      </p:nvGrpSpPr>
+      <p:grpSpPr/>
+      <p:sp>
+        <p:nvSpPr>
+          <p:cNvPr id="2" name="Rectangle 1"/>
+          <p:cNvSpPr/>
+          <p:nvPr/>
+        </p:nvSpPr>
+        <p:spPr>
+          <a:xfrm>
+            <a:off x="0" y="0"/>
+            <a:ext cx="12132000" cy="1008000"/>
+          </a:xfrm>
+          <a:prstGeom prst="rect">
+            <a:avLst/>
+          </a:prstGeom>
+          <a:solidFill>
+            <a:srgbClr val="14364F"/>
+          </a:solidFill>
+          <a:ln>
+            <a:noFill/>
+          </a:ln>
+        </p:spPr>
+        <p:style>
+          <a:lnRef idx="1">
+            <a:schemeClr val="accent1"/>
+          </a:lnRef>
+          <a:fillRef idx="3">
+            <a:schemeClr val="accent1"/>
+          </a:fillRef>
+          <a:effectRef idx="2">
+            <a:schemeClr val="accent1"/>
+          </a:effectRef>
+          <a:fontRef idx="minor">
+            <a:schemeClr val="lt1"/>
+          </a:fontRef>
+        </p:style>
+        <p:txBody>
+          <a:bodyPr rtlCol="0" anchor="ctr" wrap="none"/>
+          <a:lstStyle/>
+          <a:p>
+            <a:pPr algn="l"/>
+            <a:r>
+              <a:rPr sz="1800" b="1">
+                <a:solidFill>
+                  <a:srgbClr val="FFFFFF"/>
+                </a:solidFill>
+                <a:latin typeface="Calibri"/>
+                <a:ea typeface="游ゴシック"/>
+              </a:rPr>
+              <a:t>Web アプリだが、DB を 1 つも持たない</a:t>
+            </a:r>
+          </a:p>
+        </p:txBody>
+      </p:sp>
+      <p:sp>
+        <p:nvSpPr>
+          <p:cNvPr id="3" name="Rectangle 2"/>
+          <p:cNvSpPr/>
+          <p:nvPr/>
+        </p:nvSpPr>
+        <p:spPr>
+          <a:xfrm>
+            <a:off x="612000" y="1368000"/>
+            <a:ext cx="10908000" cy="5292000"/>
+          </a:xfrm>
+          <a:prstGeom prst="rect">
+            <a:avLst/>
+          </a:prstGeom>
+          <a:solidFill>
+            <a:srgbClr val="FFFFFF"/>
+          </a:solidFill>
+          <a:ln w="6350">
+            <a:solidFill>
+              <a:srgbClr val="E2E8F0"/>
+            </a:solidFill>
+          </a:ln>
+          <a:effectLst>
+            <a:outerShdw blurRad="101600" dist="38100" dir="8100000">
+              <a:srgbClr val="000000">
+                <a:alpha val="10000"/>
+              </a:srgbClr>
+            </a:outerShdw>
+          </a:effectLst>
+        </p:spPr>
+        <p:style>
+          <a:lnRef idx="1">
+            <a:schemeClr val="accent1"/>
+          </a:lnRef>
+          <a:fillRef idx="3">
+            <a:schemeClr val="accent1"/>
+          </a:fillRef>
+          <a:effectRef idx="2">
+            <a:schemeClr val="accent1"/>
+          </a:effectRef>
+          <a:fontRef idx="minor">
+            <a:schemeClr val="lt1"/>
+          </a:fontRef>
+        </p:style>
+        <p:txBody>
+          <a:bodyPr rtlCol="0" anchor="ctr"/>
+          <a:lstStyle/>
+          <a:p>
+            <a:pPr algn="ctr"/>
+          </a:p>
+        </p:txBody>
+      </p:sp>
+      <p:sp>
+        <p:nvSpPr>
+          <p:cNvPr id="4" name="TextBox 3"/>
+          <p:cNvSpPr txBox="1"/>
+          <p:nvPr/>
+        </p:nvSpPr>
+        <p:spPr>
+          <a:xfrm>
+            <a:off x="900000" y="1656000"/>
+            <a:ext cx="10332000" cy="4716000"/>
+          </a:xfrm>
+          <a:prstGeom prst="rect">
+            <a:avLst/>
+          </a:prstGeom>
+          <a:noFill/>
+        </p:spPr>
+        <p:txBody>
+          <a:bodyPr wrap="square" anchor="ctr">
+            <a:spAutoFit/>
+          </a:bodyPr>
+          <a:lstStyle/>
+          <a:p>
+            <a:pPr>
+              <a:lnSpc>
+                <a:spcPct val="125000"/>
+              </a:lnSpc>
+              <a:spcAft>
+                <a:spcPts val="1050"/>
+              </a:spcAft>
+            </a:pPr>
+            <a:r>
+              <a:rPr sz="1400">
+                <a:solidFill>
+                  <a:srgbClr val="1B2A3A"/>
+                </a:solidFill>
+                <a:latin typeface="Calibri"/>
+                <a:ea typeface="游ゴシック"/>
+              </a:rPr>
+              <a:t>・却下: 自前 ETL + DB（単一開発者 + AI の運用では定常運用コストが見合わない）</a:t>
+            </a:r>
+          </a:p>
+          <a:p>
+            <a:pPr>
+              <a:lnSpc>
+                <a:spcPct val="125000"/>
+              </a:lnSpc>
+              <a:spcAft>
+                <a:spcPts val="1050"/>
+              </a:spcAft>
+            </a:pPr>
+            <a:r>
+              <a:rPr sz="1400">
+                <a:solidFill>
+                  <a:srgbClr val="1B2A3A"/>
+                </a:solidFill>
+                <a:latin typeface="Calibri"/>
+                <a:ea typeface="游ゴシック"/>
+              </a:rPr>
+              <a:t>・却下: お気に入りをサーバーに保存（端末間同期の利便性より DB レス原則を優先した）</a:t>
+            </a:r>
+          </a:p>
+          <a:p>
+            <a:pPr>
+              <a:lnSpc>
+                <a:spcPct val="125000"/>
+              </a:lnSpc>
+              <a:spcAft>
+                <a:spcPts val="1050"/>
+              </a:spcAft>
+            </a:pPr>
+            <a:r>
+              <a:rPr sz="1400">
+                <a:solidFill>
+                  <a:srgbClr val="1B2A3A"/>
+                </a:solidFill>
+                <a:latin typeface="Calibri"/>
+                <a:ea typeface="游ゴシック"/>
+              </a:rPr>
+              <a:t>・採用: 検索状態は URL に、ロケールはパスに置く</a:t>
+            </a:r>
+          </a:p>
+          <a:p>
+            <a:pPr>
+              <a:lnSpc>
+                <a:spcPct val="125000"/>
+              </a:lnSpc>
+              <a:spcAft>
+                <a:spcPts val="1050"/>
+              </a:spcAft>
+            </a:pPr>
+            <a:r>
+              <a:rPr sz="1400">
+                <a:solidFill>
+                  <a:srgbClr val="1B2A3A"/>
+                </a:solidFill>
+                <a:latin typeface="Calibri"/>
+                <a:ea typeface="游ゴシック"/>
+              </a:rPr>
+              <a:t>・採用: セッションは暗号化 httpOnly Cookie、お気に入りは localStorage に置く</a:t>
+            </a:r>
+          </a:p>
+          <a:p>
+            <a:pPr>
+              <a:lnSpc>
+                <a:spcPct val="125000"/>
+              </a:lnSpc>
+              <a:spcAft>
+                <a:spcPts val="1050"/>
+              </a:spcAft>
+            </a:pPr>
+            <a:r>
+              <a:rPr sz="1400">
+                <a:solidFill>
+                  <a:srgbClr val="1B2A3A"/>
+                </a:solidFill>
+                <a:latin typeface="Calibri"/>
+                <a:ea typeface="游ゴシック"/>
+              </a:rPr>
+              <a:t>・採用: Gem のデータも静的 JSON で、サーバー側に状態を持たない点は他と同じ</a:t>
+            </a:r>
+          </a:p>
+          <a:p>
+            <a:pPr>
+              <a:lnSpc>
+                <a:spcPct val="125000"/>
+              </a:lnSpc>
+              <a:spcAft>
+                <a:spcPts val="1050"/>
+              </a:spcAft>
+            </a:pPr>
+            <a:r>
+              <a:rPr sz="1400">
+                <a:solidFill>
+                  <a:srgbClr val="1B2A3A"/>
+                </a:solidFill>
+                <a:latin typeface="Calibri"/>
+                <a:ea typeface="游ゴシック"/>
+              </a:rPr>
+              <a:t>・唯一の例外が CachePort（アーキテクチャで触れた TTL 付きキャッシュ層のインターフェース）</a:t>
+            </a:r>
+          </a:p>
+          <a:p>
+            <a:pPr>
+              <a:lnSpc>
+                <a:spcPct val="125000"/>
+              </a:lnSpc>
+              <a:spcAft>
+                <a:spcPts val="1050"/>
+              </a:spcAft>
+            </a:pPr>
+            <a:r>
+              <a:rPr sz="1400">
+                <a:solidFill>
+                  <a:srgbClr val="1B2A3A"/>
+                </a:solidFill>
+                <a:latin typeface="Calibri"/>
+                <a:ea typeface="游ゴシック"/>
+              </a:rPr>
+              <a:t>・DB を持たないのでバックアップもマイグレーションも消えた。代わりに状態は端末に閉じる</a:t>
+            </a:r>
+          </a:p>
+        </p:txBody>
+      </p:sp>
+    </p:spTree>
+  </p:cSld>
+  <p:clrMapOvr>
+    <a:masterClrMapping/>
+  </p:clrMapOvr>
+</p:sld>
+</file>
+
+<file path=ppt/slides/slide21.xml><?xml version="1.0" encoding="utf-8"?>
+<p:sld xmlns:a="http://schemas.openxmlformats.org/drawingml/2006/main" xmlns:p="http://schemas.openxmlformats.org/presentationml/2006/main" xmlns:r="http://schemas.openxmlformats.org/officeDocument/2006/relationships">
+  <p:cSld>
+    <p:bg>
+      <p:bgPr>
+        <a:solidFill>
+          <a:srgbClr val="FAF6EC"/>
+        </a:solidFill>
+        <a:effectLst/>
+      </p:bgPr>
+    </p:bg>
+    <p:spTree>
+      <p:nvGrpSpPr>
+        <p:cNvPr id="1" name=""/>
+        <p:cNvGrpSpPr/>
+        <p:nvPr/>
+      </p:nvGrpSpPr>
+      <p:grpSpPr/>
+      <p:sp>
+        <p:nvSpPr>
+          <p:cNvPr id="2" name="Rectangle 1"/>
+          <p:cNvSpPr/>
+          <p:nvPr/>
+        </p:nvSpPr>
+        <p:spPr>
+          <a:xfrm>
+            <a:off x="0" y="0"/>
+            <a:ext cx="12132000" cy="1008000"/>
+          </a:xfrm>
+          <a:prstGeom prst="rect">
+            <a:avLst/>
+          </a:prstGeom>
+          <a:solidFill>
+            <a:srgbClr val="14364F"/>
+          </a:solidFill>
+          <a:ln>
+            <a:noFill/>
+          </a:ln>
+        </p:spPr>
+        <p:style>
+          <a:lnRef idx="1">
+            <a:schemeClr val="accent1"/>
+          </a:lnRef>
+          <a:fillRef idx="3">
+            <a:schemeClr val="accent1"/>
+          </a:fillRef>
+          <a:effectRef idx="2">
+            <a:schemeClr val="accent1"/>
+          </a:effectRef>
+          <a:fontRef idx="minor">
+            <a:schemeClr val="lt1"/>
+          </a:fontRef>
+        </p:style>
+        <p:txBody>
+          <a:bodyPr rtlCol="0" anchor="ctr" wrap="none"/>
+          <a:lstStyle/>
+          <a:p>
+            <a:pPr algn="l"/>
+            <a:r>
+              <a:rPr sz="1800" b="1">
+                <a:solidFill>
+                  <a:srgbClr val="FFFFFF"/>
+                </a:solidFill>
+                <a:latin typeface="Calibri"/>
+                <a:ea typeface="游ゴシック"/>
+              </a:rPr>
+              <a:t>持ち帰れる 4 つの考え方</a:t>
+            </a:r>
+          </a:p>
+        </p:txBody>
+      </p:sp>
+      <p:sp>
+        <p:nvSpPr>
+          <p:cNvPr id="3" name="Rectangle 2"/>
+          <p:cNvSpPr/>
+          <p:nvPr/>
+        </p:nvSpPr>
+        <p:spPr>
+          <a:xfrm>
+            <a:off x="612000" y="1368000"/>
+            <a:ext cx="10908000" cy="5292000"/>
+          </a:xfrm>
+          <a:prstGeom prst="rect">
+            <a:avLst/>
+          </a:prstGeom>
+          <a:solidFill>
+            <a:srgbClr val="FFFFFF"/>
+          </a:solidFill>
+          <a:ln w="6350">
+            <a:solidFill>
+              <a:srgbClr val="E2E8F0"/>
+            </a:solidFill>
+          </a:ln>
+          <a:effectLst>
+            <a:outerShdw blurRad="101600" dist="38100" dir="8100000">
+              <a:srgbClr val="000000">
+                <a:alpha val="10000"/>
+              </a:srgbClr>
+            </a:outerShdw>
+          </a:effectLst>
+        </p:spPr>
+        <p:style>
+          <a:lnRef idx="1">
+            <a:schemeClr val="accent1"/>
+          </a:lnRef>
+          <a:fillRef idx="3">
+            <a:schemeClr val="accent1"/>
+          </a:fillRef>
+          <a:effectRef idx="2">
+            <a:schemeClr val="accent1"/>
+          </a:effectRef>
+          <a:fontRef idx="minor">
+            <a:schemeClr val="lt1"/>
+          </a:fontRef>
+        </p:style>
+        <p:txBody>
+          <a:bodyPr rtlCol="0" anchor="ctr"/>
+          <a:lstStyle/>
+          <a:p>
+            <a:pPr algn="ctr"/>
+          </a:p>
+        </p:txBody>
+      </p:sp>
+      <p:sp>
+        <p:nvSpPr>
+          <p:cNvPr id="4" name="TextBox 3"/>
+          <p:cNvSpPr txBox="1"/>
+          <p:nvPr/>
+        </p:nvSpPr>
+        <p:spPr>
+          <a:xfrm>
+            <a:off x="900000" y="1656000"/>
+            <a:ext cx="10332000" cy="4716000"/>
+          </a:xfrm>
+          <a:prstGeom prst="rect">
+            <a:avLst/>
+          </a:prstGeom>
+          <a:noFill/>
+        </p:spPr>
+        <p:txBody>
+          <a:bodyPr wrap="square" anchor="ctr">
+            <a:spAutoFit/>
+          </a:bodyPr>
+          <a:lstStyle/>
+          <a:p>
+            <a:pPr>
+              <a:lnSpc>
+                <a:spcPct val="125000"/>
+              </a:lnSpc>
+              <a:spcAft>
+                <a:spcPts val="1200"/>
+              </a:spcAft>
+            </a:pPr>
+            <a:r>
+              <a:rPr sz="1600">
+                <a:solidFill>
+                  <a:srgbClr val="1B2A3A"/>
+                </a:solidFill>
+                <a:latin typeface="Calibri"/>
+                <a:ea typeface="游ゴシック"/>
+              </a:rPr>
+              <a:t>・注目度ではなく実利用を起点に測ると、同じ対象でも既存の順位づけとは違うものが見えてくる</a:t>
+            </a:r>
+          </a:p>
+          <a:p>
+            <a:pPr>
+              <a:lnSpc>
+                <a:spcPct val="125000"/>
+              </a:lnSpc>
+              <a:spcAft>
+                <a:spcPts val="1200"/>
+              </a:spcAft>
+            </a:pPr>
+            <a:r>
+              <a:rPr sz="1600">
+                <a:solidFill>
+                  <a:srgbClr val="1B2A3A"/>
+                </a:solidFill>
+                <a:latin typeface="Calibri"/>
+                <a:ea typeface="游ゴシック"/>
+              </a:rPr>
+              <a:t>・指標は絶対値ではなく順位の残差で作ると、数字を水増しされても構造的に崩れにくい</a:t>
+            </a:r>
+          </a:p>
+          <a:p>
+            <a:pPr>
+              <a:lnSpc>
+                <a:spcPct val="125000"/>
+              </a:lnSpc>
+              <a:spcAft>
+                <a:spcPts val="1200"/>
+              </a:spcAft>
+            </a:pPr>
+            <a:r>
+              <a:rPr sz="1600">
+                <a:solidFill>
+                  <a:srgbClr val="1B2A3A"/>
+                </a:solidFill>
+                <a:latin typeface="Calibri"/>
+                <a:ea typeface="游ゴシック"/>
+              </a:rPr>
+              <a:t>・層を足す前に「どの規律を守るためか」を 1 行で言えるかを問う。言えないなら足さない</a:t>
+            </a:r>
+          </a:p>
+          <a:p>
+            <a:pPr>
+              <a:lnSpc>
+                <a:spcPct val="125000"/>
+              </a:lnSpc>
+              <a:spcAft>
+                <a:spcPts val="1200"/>
+              </a:spcAft>
+            </a:pPr>
+            <a:r>
+              <a:rPr sz="1600">
+                <a:solidFill>
+                  <a:srgbClr val="1B2A3A"/>
+                </a:solidFill>
+                <a:latin typeface="Calibri"/>
+                <a:ea typeface="游ゴシック"/>
+              </a:rPr>
+              <a:t>・判断の根拠と却下案を残しておくと、前提が変わったときに測り直して、戻すこともできる</a:t>
+            </a:r>
+          </a:p>
+          <a:p>
+            <a:pPr>
+              <a:lnSpc>
+                <a:spcPct val="125000"/>
+              </a:lnSpc>
+              <a:spcAft>
+                <a:spcPts val="1200"/>
+              </a:spcAft>
+            </a:pPr>
+            <a:r>
+              <a:rPr sz="1600">
+                <a:solidFill>
+                  <a:srgbClr val="1B2A3A"/>
+                </a:solidFill>
+                <a:latin typeface="Calibri"/>
+                <a:ea typeface="游ゴシック"/>
+              </a:rPr>
+              <a:t>・どれも gem-hunter に固有ではなく、次に作るものにそのまま持ち込める</a:t>
             </a:r>
           </a:p>
         </p:txBody>
@@ -6437,7 +7027,7 @@
                 <a:latin typeface="Calibri"/>
                 <a:ea typeface="游ゴシック"/>
               </a:rPr>
-              <a:t>検索しなくても、その日の Gem が並ぶ</a:t>
+              <a:t>検索語をそのまま、Gem だけの一覧へ</a:t>
             </a:r>
           </a:p>
         </p:txBody>
@@ -6521,118 +7111,138 @@
                 <a:spcPct val="125000"/>
               </a:lnSpc>
               <a:spcAft>
-                <a:spcPts val="1125"/>
-              </a:spcAft>
-            </a:pPr>
-            <a:r>
-              <a:rPr sz="1500">
-                <a:solidFill>
-                  <a:srgbClr val="1B2A3A"/>
-                </a:solidFill>
-                <a:latin typeface="Calibri"/>
-                <a:ea typeface="游ゴシック"/>
-              </a:rPr>
-              <a:t>・トップページの「今日の Gem」は、キーワードを 1 文字も入れなくても 5 件並ぶ</a:t>
-            </a:r>
-          </a:p>
-          <a:p>
-            <a:pPr>
-              <a:lnSpc>
-                <a:spcPct val="125000"/>
-              </a:lnSpc>
-              <a:spcAft>
-                <a:spcPts val="1125"/>
-              </a:spcAft>
-            </a:pPr>
-            <a:r>
-              <a:rPr sz="1500">
-                <a:solidFill>
-                  <a:srgbClr val="1B2A3A"/>
-                </a:solidFill>
-                <a:latin typeface="Calibri"/>
-                <a:ea typeface="游ゴシック"/>
-              </a:rPr>
-              <a:t>・並びは日付をシードにした決定論的な選び方で、同じ日なら誰が見ても同じ顔ぶれになる</a:t>
-            </a:r>
-          </a:p>
-          <a:p>
-            <a:pPr>
-              <a:lnSpc>
-                <a:spcPct val="125000"/>
-              </a:lnSpc>
-              <a:spcAft>
-                <a:spcPts val="1125"/>
-              </a:spcAft>
-            </a:pPr>
-            <a:r>
-              <a:rPr sz="1500">
-                <a:solidFill>
-                  <a:srgbClr val="1B2A3A"/>
-                </a:solidFill>
-                <a:latin typeface="Calibri"/>
-                <a:ea typeface="游ゴシック"/>
-              </a:rPr>
-              <a:t>・?date=YYYYMMDD を付ければ過去日を再現でき、翌日を待たずに入れ替わりを確認できる</a:t>
-            </a:r>
-          </a:p>
-          <a:p>
-            <a:pPr>
-              <a:lnSpc>
-                <a:spcPct val="125000"/>
-              </a:lnSpc>
-              <a:spcAft>
-                <a:spcPts val="1125"/>
-              </a:spcAft>
-            </a:pPr>
-            <a:r>
-              <a:rPr sz="1500">
-                <a:solidFill>
-                  <a:srgbClr val="1B2A3A"/>
-                </a:solidFill>
-                <a:latin typeface="Calibri"/>
-                <a:ea typeface="游ゴシック"/>
-              </a:rPr>
-              <a:t>・利用パッケージ数と star 数を併記し、出典（Ecosyste.ms・CC BY-SA 4.0）と鮮度も出す</a:t>
-            </a:r>
-          </a:p>
-          <a:p>
-            <a:pPr>
-              <a:lnSpc>
-                <a:spcPct val="125000"/>
-              </a:lnSpc>
-              <a:spcAft>
-                <a:spcPts val="1125"/>
-              </a:spcAft>
-            </a:pPr>
-            <a:r>
-              <a:rPr sz="1500">
-                <a:solidFill>
-                  <a:srgbClr val="1B2A3A"/>
-                </a:solidFill>
-                <a:latin typeface="Calibri"/>
-                <a:ea typeface="游ゴシック"/>
-              </a:rPr>
-              <a:t>・この並びに使う指標が Gem Index（被依存数と star の順位差。定義は後半で扱う）</a:t>
-            </a:r>
-          </a:p>
-          <a:p>
-            <a:pPr>
-              <a:lnSpc>
-                <a:spcPct val="125000"/>
-              </a:lnSpc>
-              <a:spcAft>
-                <a:spcPts val="1125"/>
-              </a:spcAft>
-            </a:pPr>
-            <a:r>
-              <a:rPr sz="1500">
-                <a:solidFill>
-                  <a:srgbClr val="1B2A3A"/>
-                </a:solidFill>
-                <a:latin typeface="Calibri"/>
-                <a:ea typeface="游ゴシック"/>
-              </a:rPr>
-              <a:t>・Gem Index を使うのはこのダイジェストだけで、検索結果の並び順には効かない</a:t>
+                <a:spcPts val="1050"/>
+              </a:spcAft>
+            </a:pPr>
+            <a:r>
+              <a:rPr sz="1400">
+                <a:solidFill>
+                  <a:srgbClr val="1B2A3A"/>
+                </a:solidFill>
+                <a:latin typeface="Calibri"/>
+                <a:ea typeface="游ゴシック"/>
+              </a:rPr>
+              <a:t>・検索結果のカードには、Gem Index（被依存数と star の順位差。定義は後半で扱う）が高い候補に「Gem」の印が付く</a:t>
+            </a:r>
+          </a:p>
+          <a:p>
+            <a:pPr>
+              <a:lnSpc>
+                <a:spcPct val="125000"/>
+              </a:lnSpc>
+              <a:spcAft>
+                <a:spcPts val="1050"/>
+              </a:spcAft>
+            </a:pPr>
+            <a:r>
+              <a:rPr sz="1400">
+                <a:solidFill>
+                  <a:srgbClr val="1B2A3A"/>
+                </a:solidFill>
+                <a:latin typeface="Calibri"/>
+                <a:ea typeface="游ゴシック"/>
+              </a:rPr>
+              <a:t>・印が付いた候補だけを見たくなったら、検索結果の上の導線から Gem 一覧へ移れる</a:t>
+            </a:r>
+          </a:p>
+          <a:p>
+            <a:pPr>
+              <a:lnSpc>
+                <a:spcPct val="125000"/>
+              </a:lnSpc>
+              <a:spcAft>
+                <a:spcPts val="1050"/>
+              </a:spcAft>
+            </a:pPr>
+            <a:r>
+              <a:rPr sz="1400">
+                <a:solidFill>
+                  <a:srgbClr val="1B2A3A"/>
+                </a:solidFill>
+                <a:latin typeface="Calibri"/>
+                <a:ea typeface="游ゴシック"/>
+              </a:rPr>
+              <a:t>・一覧は検索語をそのまま引き継ぎ、過小評価の度合いが高い順に 20 件ずつ並ぶ</a:t>
+            </a:r>
+          </a:p>
+          <a:p>
+            <a:pPr>
+              <a:lnSpc>
+                <a:spcPct val="125000"/>
+              </a:lnSpc>
+              <a:spcAft>
+                <a:spcPts val="1050"/>
+              </a:spcAft>
+            </a:pPr>
+            <a:r>
+              <a:rPr sz="1400">
+                <a:solidFill>
+                  <a:srgbClr val="1B2A3A"/>
+                </a:solidFill>
+                <a:latin typeface="Calibri"/>
+                <a:ea typeface="游ゴシック"/>
+              </a:rPr>
+              <a:t>・検索結果そのものの並び順は変えない。順位づけをするのはこの一覧の中だけ</a:t>
+            </a:r>
+          </a:p>
+          <a:p>
+            <a:pPr>
+              <a:lnSpc>
+                <a:spcPct val="125000"/>
+              </a:lnSpc>
+              <a:spcAft>
+                <a:spcPts val="1050"/>
+              </a:spcAft>
+            </a:pPr>
+            <a:r>
+              <a:rPr sz="1400">
+                <a:solidFill>
+                  <a:srgbClr val="1B2A3A"/>
+                </a:solidFill>
+                <a:latin typeface="Calibri"/>
+                <a:ea typeface="游ゴシック"/>
+              </a:rPr>
+              <a:t>・絞り込みはリポジトリ名とパッケージ名を語の区切りで照合し、0 件のときだけ 1 語に緩める</a:t>
+            </a:r>
+          </a:p>
+          <a:p>
+            <a:pPr>
+              <a:lnSpc>
+                <a:spcPct val="125000"/>
+              </a:lnSpc>
+              <a:spcAft>
+                <a:spcPts val="1050"/>
+              </a:spcAft>
+            </a:pPr>
+            <a:r>
+              <a:rPr sz="1400">
+                <a:solidFill>
+                  <a:srgbClr val="1B2A3A"/>
+                </a:solidFill>
+                <a:latin typeface="Calibri"/>
+                <a:ea typeface="游ゴシック"/>
+              </a:rPr>
+              <a:t>・検索結果で印が付いた候補は一覧側へそのまま引き渡すので、印と一覧で判定基準がずれない</a:t>
+            </a:r>
+          </a:p>
+          <a:p>
+            <a:pPr>
+              <a:lnSpc>
+                <a:spcPct val="125000"/>
+              </a:lnSpc>
+              <a:spcAft>
+                <a:spcPts val="1050"/>
+              </a:spcAft>
+            </a:pPr>
+            <a:r>
+              <a:rPr sz="1400">
+                <a:solidFill>
+                  <a:srgbClr val="1B2A3A"/>
+                </a:solidFill>
+                <a:latin typeface="Calibri"/>
+                <a:ea typeface="游ゴシック"/>
+              </a:rPr>
+              <a:t>・印が付かないことは評価が低いことを意味しない、と画面にも明記している</a:t>
             </a:r>
           </a:p>
         </p:txBody>
@@ -6711,7 +7321,7 @@
                 <a:latin typeface="Calibri"/>
                 <a:ea typeface="游ゴシック"/>
               </a:rPr>
-              <a:t>star の多さは、使われている証拠ではない</a:t>
+              <a:t>検索しなくても、その日の Gem が並ぶ</a:t>
             </a:r>
           </a:p>
         </p:txBody>
@@ -6795,118 +7405,98 @@
                 <a:spcPct val="125000"/>
               </a:lnSpc>
               <a:spcAft>
-                <a:spcPts val="1125"/>
-              </a:spcAft>
-            </a:pPr>
-            <a:r>
-              <a:rPr sz="1500">
-                <a:solidFill>
-                  <a:srgbClr val="1B2A3A"/>
-                </a:solidFill>
-                <a:latin typeface="Calibri"/>
-                <a:ea typeface="游ゴシック"/>
-              </a:rPr>
-              <a:t>・出発点は「自分が使うライブラリを選ぶとき、star 以外に判断材料がない」という不便だった</a:t>
-            </a:r>
-          </a:p>
-          <a:p>
-            <a:pPr>
-              <a:lnSpc>
-                <a:spcPct val="125000"/>
-              </a:lnSpc>
-              <a:spcAft>
-                <a:spcPts val="1125"/>
-              </a:spcAft>
-            </a:pPr>
-            <a:r>
-              <a:rPr sz="1500">
-                <a:solidFill>
-                  <a:srgbClr val="1B2A3A"/>
-                </a:solidFill>
-                <a:latin typeface="Calibri"/>
-                <a:ea typeface="游ゴシック"/>
-              </a:rPr>
-              <a:t>・star は「後で読む」ブックマーク代わりにも押されるので、利用実績とは意味が違う</a:t>
-            </a:r>
-          </a:p>
-          <a:p>
-            <a:pPr>
-              <a:lnSpc>
-                <a:spcPct val="125000"/>
-              </a:lnSpc>
-              <a:spcAft>
-                <a:spcPts val="1125"/>
-              </a:spcAft>
-            </a:pPr>
-            <a:r>
-              <a:rPr sz="1500">
-                <a:solidFill>
-                  <a:srgbClr val="1B2A3A"/>
-                </a:solidFill>
-                <a:latin typeface="Calibri"/>
-                <a:ea typeface="游ゴシック"/>
-              </a:rPr>
-              <a:t>・約 600 万個の偽 star が観測されている（He et al., ICSE 2026）</a:t>
-            </a:r>
-          </a:p>
-          <a:p>
-            <a:pPr>
-              <a:lnSpc>
-                <a:spcPct val="125000"/>
-              </a:lnSpc>
-              <a:spcAft>
-                <a:spcPts val="1125"/>
-              </a:spcAft>
-            </a:pPr>
-            <a:r>
-              <a:rPr sz="1500">
-                <a:solidFill>
-                  <a:srgbClr val="1B2A3A"/>
-                </a:solidFill>
-                <a:latin typeface="Calibri"/>
-                <a:ea typeface="游ゴシック"/>
-              </a:rPr>
-              <a:t>・debug_inspector は 25 star で 111,000 以上のプロジェクトから依存されている</a:t>
-            </a:r>
-          </a:p>
-          <a:p>
-            <a:pPr>
-              <a:lnSpc>
-                <a:spcPct val="125000"/>
-              </a:lnSpc>
-              <a:spcAft>
-                <a:spcPts val="1125"/>
-              </a:spcAft>
-            </a:pPr>
-            <a:r>
-              <a:rPr sz="1500">
-                <a:solidFill>
-                  <a:srgbClr val="1B2A3A"/>
-                </a:solidFill>
-                <a:latin typeface="Calibri"/>
-                <a:ea typeface="游ゴシック"/>
-              </a:rPr>
-              <a:t>・被依存数なら実際に組み込まれた回数を近似できるが、それだけで並べると有名どころが上位を占める</a:t>
-            </a:r>
-          </a:p>
-          <a:p>
-            <a:pPr>
-              <a:lnSpc>
-                <a:spcPct val="125000"/>
-              </a:lnSpc>
-              <a:spcAft>
-                <a:spcPts val="1125"/>
-              </a:spcAft>
-            </a:pPr>
-            <a:r>
-              <a:rPr sz="1500">
-                <a:solidFill>
-                  <a:srgbClr val="1B2A3A"/>
-                </a:solidFill>
-                <a:latin typeface="Calibri"/>
-                <a:ea typeface="游ゴシック"/>
-              </a:rPr>
-              <a:t>・だから「実利用のわりに注目されていないもの」を測る指標が要る、というのが最初の仮説</a:t>
+                <a:spcPts val="1200"/>
+              </a:spcAft>
+            </a:pPr>
+            <a:r>
+              <a:rPr sz="1600">
+                <a:solidFill>
+                  <a:srgbClr val="1B2A3A"/>
+                </a:solidFill>
+                <a:latin typeface="Calibri"/>
+                <a:ea typeface="游ゴシック"/>
+              </a:rPr>
+              <a:t>・トップページの「今日の Gem」は、キーワードを 1 文字も入れなくても 5 件並ぶ</a:t>
+            </a:r>
+          </a:p>
+          <a:p>
+            <a:pPr>
+              <a:lnSpc>
+                <a:spcPct val="125000"/>
+              </a:lnSpc>
+              <a:spcAft>
+                <a:spcPts val="1200"/>
+              </a:spcAft>
+            </a:pPr>
+            <a:r>
+              <a:rPr sz="1600">
+                <a:solidFill>
+                  <a:srgbClr val="1B2A3A"/>
+                </a:solidFill>
+                <a:latin typeface="Calibri"/>
+                <a:ea typeface="游ゴシック"/>
+              </a:rPr>
+              <a:t>・並びは日付をシードにした決定論的な選び方で、同じ日なら誰が見ても同じ顔ぶれになる</a:t>
+            </a:r>
+          </a:p>
+          <a:p>
+            <a:pPr>
+              <a:lnSpc>
+                <a:spcPct val="125000"/>
+              </a:lnSpc>
+              <a:spcAft>
+                <a:spcPts val="1200"/>
+              </a:spcAft>
+            </a:pPr>
+            <a:r>
+              <a:rPr sz="1600">
+                <a:solidFill>
+                  <a:srgbClr val="1B2A3A"/>
+                </a:solidFill>
+                <a:latin typeface="Calibri"/>
+                <a:ea typeface="游ゴシック"/>
+              </a:rPr>
+              <a:t>・?date=YYYYMMDD を付ければ過去日を再現でき、翌日を待たずに入れ替わりを確認できる</a:t>
+            </a:r>
+          </a:p>
+          <a:p>
+            <a:pPr>
+              <a:lnSpc>
+                <a:spcPct val="125000"/>
+              </a:lnSpc>
+              <a:spcAft>
+                <a:spcPts val="1200"/>
+              </a:spcAft>
+            </a:pPr>
+            <a:r>
+              <a:rPr sz="1600">
+                <a:solidFill>
+                  <a:srgbClr val="1B2A3A"/>
+                </a:solidFill>
+                <a:latin typeface="Calibri"/>
+                <a:ea typeface="游ゴシック"/>
+              </a:rPr>
+              <a:t>・利用パッケージ数と star 数を併記し、出典（Ecosyste.ms・CC BY-SA 4.0）と鮮度も出す</a:t>
+            </a:r>
+          </a:p>
+          <a:p>
+            <a:pPr>
+              <a:lnSpc>
+                <a:spcPct val="125000"/>
+              </a:lnSpc>
+              <a:spcAft>
+                <a:spcPts val="1200"/>
+              </a:spcAft>
+            </a:pPr>
+            <a:r>
+              <a:rPr sz="1600">
+                <a:solidFill>
+                  <a:srgbClr val="1B2A3A"/>
+                </a:solidFill>
+                <a:latin typeface="Calibri"/>
+                <a:ea typeface="游ゴシック"/>
+              </a:rPr>
+              <a:t>・この並びにも、前の画面で印を付けたのと同じ Gem Index を使っている</a:t>
             </a:r>
           </a:p>
         </p:txBody>
@@ -6985,7 +7575,7 @@
                 <a:latin typeface="Calibri"/>
                 <a:ea typeface="游ゴシック"/>
               </a:rPr>
-              <a:t>構想を、辿れるドキュメントに分解した</a:t>
+              <a:t>star の多さは、使われている証拠ではない</a:t>
             </a:r>
           </a:p>
         </p:txBody>
@@ -7080,7 +7670,7 @@
                 <a:latin typeface="Calibri"/>
                 <a:ea typeface="游ゴシック"/>
               </a:rPr>
-              <a:t>・初期コンセプト（IndieGems 構想）が先にあり、外部から与えられた要件でスコープを絞り直した</a:t>
+              <a:t>・出発点は「自分が使うライブラリを選ぶとき、star 以外に判断材料がない」という不便だった</a:t>
             </a:r>
           </a:p>
           <a:p>
@@ -7100,7 +7690,7 @@
                 <a:latin typeface="Calibri"/>
                 <a:ea typeface="游ゴシック"/>
               </a:rPr>
-              <a:t>・コンセプト → 要件 → 設計 → 開発の順に積み上げ、要件の正本は prd.md 1 本に決めた</a:t>
+              <a:t>・star は「後で読む」ブックマーク代わりにも押されるので、利用実績とは意味が違う</a:t>
             </a:r>
           </a:p>
           <a:p>
@@ -7120,7 +7710,7 @@
                 <a:latin typeface="Calibri"/>
                 <a:ea typeface="游ゴシック"/>
               </a:rPr>
-              <a:t>・「何を作るか」は PRD、「なぜその技術か」は ADR（Architecture Decision Record）と役割を分けた</a:t>
+              <a:t>・約 600 万個の偽 star が観測されている（He et al., ICSE 2026）</a:t>
             </a:r>
           </a:p>
           <a:p>
@@ -7140,7 +7730,7 @@
                 <a:latin typeface="Calibri"/>
                 <a:ea typeface="游ゴシック"/>
               </a:rPr>
-              <a:t>・決めきれない論点は open-questions.md に D-n 番号で残し、決まった分だけ PRD に反映する</a:t>
+              <a:t>・debug_inspector は 25 star で 111,000 以上のプロジェクトから依存されている</a:t>
             </a:r>
           </a:p>
           <a:p>
@@ -7160,7 +7750,7 @@
                 <a:latin typeface="Calibri"/>
                 <a:ea typeface="游ゴシック"/>
               </a:rPr>
-              <a:t>・先に書いたおかげで、実装中に「これは決めたはず」と辿れる状態になった</a:t>
+              <a:t>・被依存数なら実際に組み込まれた回数を近似できるが、それだけで並べると有名どころが上位を占める</a:t>
             </a:r>
           </a:p>
           <a:p>
@@ -7180,7 +7770,7 @@
                 <a:latin typeface="Calibri"/>
                 <a:ea typeface="游ゴシック"/>
               </a:rPr>
-              <a:t>・各ドキュメントは 16:9 のインフォグラフィック 1 枚に要約してあり、この発表でもそれを使っている</a:t>
+              <a:t>・だから「実利用のわりに注目されていないもの」を測る指標が要る、というのが最初の仮説</a:t>
             </a:r>
           </a:p>
         </p:txBody>
@@ -7259,7 +7849,7 @@
                 <a:latin typeface="Calibri"/>
                 <a:ea typeface="游ゴシック"/>
               </a:rPr>
-              <a:t>依存は内側へ。中心のドメインは何も知らない</a:t>
+              <a:t>構想を、辿れるドキュメントに分解した</a:t>
             </a:r>
           </a:p>
         </p:txBody>
@@ -7354,7 +7944,7 @@
                 <a:latin typeface="Calibri"/>
                 <a:ea typeface="游ゴシック"/>
               </a:rPr>
-              <a:t>・7 層構成: domain / usecases / infrastructure / ui / composition / app（Next.js）/ shared</a:t>
+              <a:t>・初期コンセプト（IndieGems 構想）が先にあり、外部から与えられた要件でスコープを絞り直した</a:t>
             </a:r>
           </a:p>
           <a:p>
@@ -7374,7 +7964,7 @@
                 <a:latin typeface="Calibri"/>
                 <a:ea typeface="游ゴシック"/>
               </a:rPr>
-              <a:t>・唯一絶対の規則は「内側は外側を知らない」。src/domain/ は next も react も zod も import しない</a:t>
+              <a:t>・コンセプト → 要件 → 設計 → 開発の順に積み上げ、要件の正本は prd.md 1 本に決めた</a:t>
             </a:r>
           </a:p>
           <a:p>
@@ -7394,7 +7984,7 @@
                 <a:latin typeface="Calibri"/>
                 <a:ea typeface="游ゴシック"/>
               </a:rPr>
-              <a:t>・ユースケースは実装を import せず、ドメインが定義したポートを引数で受け取る（依存性逆転）</a:t>
+              <a:t>・「何を作るか」は PRD、「なぜその技術か」は ADR（Architecture Decision Record）と役割を分けた</a:t>
             </a:r>
           </a:p>
           <a:p>
@@ -7414,7 +8004,7 @@
                 <a:latin typeface="Calibri"/>
                 <a:ea typeface="游ゴシック"/>
               </a:rPr>
-              <a:t>・app/ と ui/ から infrastructure/ への直 import は禁止。実装を束ねてよいのは composition/ だけ</a:t>
+              <a:t>・決めきれない論点は open-questions.md に D-n 番号で残し、決まった分だけ PRD に反映する</a:t>
             </a:r>
           </a:p>
           <a:p>
@@ -7434,7 +8024,7 @@
                 <a:latin typeface="Calibri"/>
                 <a:ea typeface="游ゴシック"/>
               </a:rPr>
-              <a:t>・GitHub API と認証情報は infrastructure/github/、事業者固有 API は infrastructure/platform/ の中だけ</a:t>
+              <a:t>・先に書いたおかげで、実装中に「これは決めたはず」と辿れる状態になった</a:t>
             </a:r>
           </a:p>
           <a:p>
@@ -7454,7 +8044,7 @@
                 <a:latin typeface="Calibri"/>
                 <a:ea typeface="游ゴシック"/>
               </a:rPr>
-              <a:t>・ポートは 5 つ（検索・キャッシュ・レート制限・時刻・認証）。表にないポートは実装しない</a:t>
+              <a:t>・各ドキュメントは 16:9 のインフォグラフィック 1 枚に要約してあり、この発表でもそれを使っている</a:t>
             </a:r>
           </a:p>
         </p:txBody>
@@ -7533,7 +8123,7 @@
                 <a:latin typeface="Calibri"/>
                 <a:ea typeface="游ゴシック"/>
               </a:rPr>
-              <a:t>層を足す条件を、3 つに決めてある</a:t>
+              <a:t>依存は内側へ。中心のドメインは何も知らない</a:t>
             </a:r>
           </a:p>
         </p:txBody>
@@ -7617,118 +8207,138 @@
                 <a:spcPct val="125000"/>
               </a:lnSpc>
               <a:spcAft>
-                <a:spcPts val="1125"/>
-              </a:spcAft>
-            </a:pPr>
-            <a:r>
-              <a:rPr sz="1500">
-                <a:solidFill>
-                  <a:srgbClr val="1B2A3A"/>
-                </a:solidFill>
-                <a:latin typeface="Calibri"/>
-                <a:ea typeface="游ゴシック"/>
-              </a:rPr>
-              <a:t>・W-1 データ源を差し替えられる（被依存数・健全性の取得先が変わっても UI を書き換えない）</a:t>
-            </a:r>
-          </a:p>
-          <a:p>
-            <a:pPr>
-              <a:lnSpc>
-                <a:spcPct val="125000"/>
-              </a:lnSpc>
-              <a:spcAft>
-                <a:spcPts val="1125"/>
-              </a:spcAft>
-            </a:pPr>
-            <a:r>
-              <a:rPr sz="1500">
-                <a:solidFill>
-                  <a:srgbClr val="1B2A3A"/>
-                </a:solidFill>
-                <a:latin typeface="Calibri"/>
-                <a:ea typeface="游ゴシック"/>
-              </a:rPr>
-              <a:t>・W-2 事業者を差し替えられる（Cloudflare 固有の API をアプリ全体に染み出させない）</a:t>
-            </a:r>
-          </a:p>
-          <a:p>
-            <a:pPr>
-              <a:lnSpc>
-                <a:spcPct val="125000"/>
-              </a:lnSpc>
-              <a:spcAft>
-                <a:spcPts val="1125"/>
-              </a:spcAft>
-            </a:pPr>
-            <a:r>
-              <a:rPr sz="1500">
-                <a:solidFill>
-                  <a:srgbClr val="1B2A3A"/>
-                </a:solidFill>
-                <a:latin typeface="Calibri"/>
-                <a:ea typeface="游ゴシック"/>
-              </a:rPr>
-              <a:t>・W-3 速く確実にテストできる（中核ロジックがネットワークもフレームワークも要らずに動く）</a:t>
-            </a:r>
-          </a:p>
-          <a:p>
-            <a:pPr>
-              <a:lnSpc>
-                <a:spcPct val="125000"/>
-              </a:lnSpc>
-              <a:spcAft>
-                <a:spcPts val="1125"/>
-              </a:spcAft>
-            </a:pPr>
-            <a:r>
-              <a:rPr sz="1500">
-                <a:solidFill>
-                  <a:srgbClr val="1B2A3A"/>
-                </a:solidFill>
-                <a:latin typeface="Calibri"/>
-                <a:ea typeface="游ゴシック"/>
-              </a:rPr>
-              <a:t>・「クリーンアーキテクチャだから」は層を足す理由にならない。W-n のどれを守るか 1 行で言えることが条件</a:t>
-            </a:r>
-          </a:p>
-          <a:p>
-            <a:pPr>
-              <a:lnSpc>
-                <a:spcPct val="125000"/>
-              </a:lnSpc>
-              <a:spcAft>
-                <a:spcPts val="1125"/>
-              </a:spcAft>
-            </a:pPr>
-            <a:r>
-              <a:rPr sz="1500">
-                <a:solidFill>
-                  <a:srgbClr val="1B2A3A"/>
-                </a:solidFill>
-                <a:latin typeface="Calibri"/>
-                <a:ea typeface="游ゴシック"/>
-              </a:rPr>
-              <a:t>・唯一の意図的な例外がキャッシュ層。面積を get / set / invalidate + TTL に限る歯止めつきで認めた</a:t>
-            </a:r>
-          </a:p>
-          <a:p>
-            <a:pPr>
-              <a:lnSpc>
-                <a:spcPct val="125000"/>
-              </a:lnSpc>
-              <a:spcAft>
-                <a:spcPts val="1125"/>
-              </a:spcAft>
-            </a:pPr>
-            <a:r>
-              <a:rPr sz="1500">
-                <a:solidFill>
-                  <a:srgbClr val="1B2A3A"/>
-                </a:solidFill>
-                <a:latin typeface="Calibri"/>
-                <a:ea typeface="游ゴシック"/>
-              </a:rPr>
-              <a:t>・ARCH-1〜ARCH-7 は専用スクリプトが機械検査する。ARCH-4・ARCH-5 は抑止コメントも効かない</a:t>
+                <a:spcPts val="1050"/>
+              </a:spcAft>
+            </a:pPr>
+            <a:r>
+              <a:rPr sz="1400">
+                <a:solidFill>
+                  <a:srgbClr val="1B2A3A"/>
+                </a:solidFill>
+                <a:latin typeface="Calibri"/>
+                <a:ea typeface="游ゴシック"/>
+              </a:rPr>
+              <a:t>・7 層構成: domain / usecases / infrastructure / ui / composition / app（Next.js）/ shared</a:t>
+            </a:r>
+          </a:p>
+          <a:p>
+            <a:pPr>
+              <a:lnSpc>
+                <a:spcPct val="125000"/>
+              </a:lnSpc>
+              <a:spcAft>
+                <a:spcPts val="1050"/>
+              </a:spcAft>
+            </a:pPr>
+            <a:r>
+              <a:rPr sz="1400">
+                <a:solidFill>
+                  <a:srgbClr val="1B2A3A"/>
+                </a:solidFill>
+                <a:latin typeface="Calibri"/>
+                <a:ea typeface="游ゴシック"/>
+              </a:rPr>
+              <a:t>・唯一絶対の規則は「内側は外側を知らない」。src/domain/ は next も react も zod も import しない</a:t>
+            </a:r>
+          </a:p>
+          <a:p>
+            <a:pPr>
+              <a:lnSpc>
+                <a:spcPct val="125000"/>
+              </a:lnSpc>
+              <a:spcAft>
+                <a:spcPts val="1050"/>
+              </a:spcAft>
+            </a:pPr>
+            <a:r>
+              <a:rPr sz="1400">
+                <a:solidFill>
+                  <a:srgbClr val="1B2A3A"/>
+                </a:solidFill>
+                <a:latin typeface="Calibri"/>
+                <a:ea typeface="游ゴシック"/>
+              </a:rPr>
+              <a:t>・ユースケースは実装を import せず、ドメインが定義したポートを引数で受け取る（依存性逆転）</a:t>
+            </a:r>
+          </a:p>
+          <a:p>
+            <a:pPr>
+              <a:lnSpc>
+                <a:spcPct val="125000"/>
+              </a:lnSpc>
+              <a:spcAft>
+                <a:spcPts val="1050"/>
+              </a:spcAft>
+            </a:pPr>
+            <a:r>
+              <a:rPr sz="1400">
+                <a:solidFill>
+                  <a:srgbClr val="1B2A3A"/>
+                </a:solidFill>
+                <a:latin typeface="Calibri"/>
+                <a:ea typeface="游ゴシック"/>
+              </a:rPr>
+              <a:t>・app/ と ui/ から infrastructure/ への直 import は禁止。実装を束ねてよいのは composition/ だけ</a:t>
+            </a:r>
+          </a:p>
+          <a:p>
+            <a:pPr>
+              <a:lnSpc>
+                <a:spcPct val="125000"/>
+              </a:lnSpc>
+              <a:spcAft>
+                <a:spcPts val="1050"/>
+              </a:spcAft>
+            </a:pPr>
+            <a:r>
+              <a:rPr sz="1400">
+                <a:solidFill>
+                  <a:srgbClr val="1B2A3A"/>
+                </a:solidFill>
+                <a:latin typeface="Calibri"/>
+                <a:ea typeface="游ゴシック"/>
+              </a:rPr>
+              <a:t>・GitHub API と認証情報は infrastructure/github/、事業者固有 API は infrastructure/platform/ の中だけ</a:t>
+            </a:r>
+          </a:p>
+          <a:p>
+            <a:pPr>
+              <a:lnSpc>
+                <a:spcPct val="125000"/>
+              </a:lnSpc>
+              <a:spcAft>
+                <a:spcPts val="1050"/>
+              </a:spcAft>
+            </a:pPr>
+            <a:r>
+              <a:rPr sz="1400">
+                <a:solidFill>
+                  <a:srgbClr val="1B2A3A"/>
+                </a:solidFill>
+                <a:latin typeface="Calibri"/>
+                <a:ea typeface="游ゴシック"/>
+              </a:rPr>
+              <a:t>・ポートは 7 つ（検索・キャッシュ・レート制限・時刻・認証・Gem 索引・Gem ダイジェスト）</a:t>
+            </a:r>
+          </a:p>
+          <a:p>
+            <a:pPr>
+              <a:lnSpc>
+                <a:spcPct val="125000"/>
+              </a:lnSpc>
+              <a:spcAft>
+                <a:spcPts val="1050"/>
+              </a:spcAft>
+            </a:pPr>
+            <a:r>
+              <a:rPr sz="1400">
+                <a:solidFill>
+                  <a:srgbClr val="1B2A3A"/>
+                </a:solidFill>
+                <a:latin typeface="Calibri"/>
+                <a:ea typeface="游ゴシック"/>
+              </a:rPr>
+              <a:t>・Gem を足したときも層は増やさず、ポートを 2 つ足して中心の外側に閉じ込めた</a:t>
             </a:r>
           </a:p>
         </p:txBody>
@@ -7807,7 +8417,7 @@
                 <a:latin typeface="Calibri"/>
                 <a:ea typeface="游ゴシック"/>
               </a:rPr>
-              <a:t>Next.js 16 を Workers の上で動かす</a:t>
+              <a:t>層を足す条件を、3 つに決めてある</a:t>
             </a:r>
           </a:p>
         </p:txBody>
@@ -7902,7 +8512,7 @@
                 <a:latin typeface="Calibri"/>
                 <a:ea typeface="游ゴシック"/>
               </a:rPr>
-              <a:t>・Next.js 16（App Router・React Server Components）で、クライアント JS を最小限に保つ</a:t>
+              <a:t>・W-1 データ源を差し替えられる（被依存数・健全性の取得先が変わっても UI を書き換えない）</a:t>
             </a:r>
           </a:p>
           <a:p>
@@ -7922,7 +8532,7 @@
                 <a:latin typeface="Calibri"/>
                 <a:ea typeface="游ゴシック"/>
               </a:rPr>
-              <a:t>・UI は Tailwind CSS v4 + shadcn/ui（Radix UI）。デザイントークンを 1 か所に集約する</a:t>
+              <a:t>・W-2 事業者を差し替えられる（Cloudflare 固有の API をアプリ全体に染み出させない）</a:t>
             </a:r>
           </a:p>
           <a:p>
@@ -7942,7 +8552,7 @@
                 <a:latin typeface="Calibri"/>
                 <a:ea typeface="游ゴシック"/>
               </a:rPr>
-              <a:t>・実行環境は Cloudflare Workers。コールドスタートがほぼなく、無料枠で実用に足りる</a:t>
+              <a:t>・W-3 速く確実にテストできる（中核ロジックがネットワークもフレームワークも要らずに動く）</a:t>
             </a:r>
           </a:p>
           <a:p>
@@ -7962,7 +8572,7 @@
                 <a:latin typeface="Calibri"/>
                 <a:ea typeface="游ゴシック"/>
               </a:rPr>
-              <a:t>・Next.js を Workers に載せているのは OpenNext（@opennextjs/cloudflare）というアダプタ</a:t>
+              <a:t>・「クリーンアーキテクチャだから」は層を足す理由にならない。W-n のどれを守るか 1 行で言えることが条件</a:t>
             </a:r>
           </a:p>
           <a:p>
@@ -7982,7 +8592,7 @@
                 <a:latin typeface="Calibri"/>
                 <a:ea typeface="游ゴシック"/>
               </a:rPr>
-              <a:t>・テストは Vitest 4 + Testing Library + MSW 2（単体・結合）と Playwright + axe（E2E）</a:t>
+              <a:t>・唯一の意図的な例外がキャッシュ層。面積を get / set / invalidate + TTL に限る歯止めつきで認めた</a:t>
             </a:r>
           </a:p>
           <a:p>
@@ -8002,7 +8612,7 @@
                 <a:latin typeface="Calibri"/>
                 <a:ea typeface="游ゴシック"/>
               </a:rPr>
-              <a:t>・この組み合わせは「事業者固有の API をアプリコードへ持ち込まない」という制約から選んでいる</a:t>
+              <a:t>・ARCH-1〜ARCH-7 は専用スクリプトが機械検査する。ARCH-4・ARCH-5 は抑止コメントも効かない</a:t>
             </a:r>
           </a:p>
         </p:txBody>
@@ -8081,7 +8691,7 @@
                 <a:latin typeface="Calibri"/>
                 <a:ea typeface="游ゴシック"/>
               </a:rPr>
-              <a:t>同じコードでも、プレビューでだけ壊れる</a:t>
+              <a:t>Next.js 16 を Workers の上で動かす</a:t>
             </a:r>
           </a:p>
         </p:txBody>
@@ -8176,7 +8786,7 @@
                 <a:latin typeface="Calibri"/>
                 <a:ea typeface="游ゴシック"/>
               </a:rPr>
-              <a:t>・redirects の destination に :path を書くと、プレビューでだけ 500 になる</a:t>
+              <a:t>・Next.js 16（App Router・React Server Components）で、クライアント JS を最小限に保つ</a:t>
             </a:r>
           </a:p>
           <a:p>
@@ -8196,7 +8806,7 @@
                 <a:latin typeface="Calibri"/>
                 <a:ea typeface="游ゴシック"/>
               </a:rPr>
-              <a:t>・原因は OpenNext が path-to-regexp を validate: true で呼ぶこと（Next.js 本体は false）</a:t>
+              <a:t>・UI は Tailwind CSS v4 + shadcn/ui（Radix UI）。デザイントークンを 1 か所に集約する</a:t>
             </a:r>
           </a:p>
           <a:p>
@@ -8216,7 +8826,7 @@
                 <a:latin typeface="Calibri"/>
                 <a:ea typeface="游ゴシック"/>
               </a:rPr>
-              <a:t>・拡張子付きパスは /repos/angular/angular.js が 404、/ja を付けると 200 になる</a:t>
+              <a:t>・実行環境は Cloudflare Workers。コールドスタートがほぼなく、無料枠で実用に足りる</a:t>
             </a:r>
           </a:p>
           <a:p>
@@ -8236,7 +8846,7 @@
                 <a:latin typeface="Calibri"/>
                 <a:ea typeface="游ゴシック"/>
               </a:rPr>
-              <a:t>・wrangler deploy がブロックされることがある（実測 5 回失敗・2 回成功の非決定的挙動）</a:t>
+              <a:t>・Next.js を Workers に載せているのは OpenNext（@opennextjs/cloudflare）というアダプタ</a:t>
             </a:r>
           </a:p>
           <a:p>
@@ -8256,7 +8866,7 @@
                 <a:latin typeface="Calibri"/>
                 <a:ea typeface="游ゴシック"/>
               </a:rPr>
-              <a:t>・どれもローカルの next start では再現せず、プレビューに上げて初めて壊れた</a:t>
+              <a:t>・テストは Vitest 4 + Testing Library + MSW 2（単体・結合）と Playwright + axe（E2E）</a:t>
             </a:r>
           </a:p>
           <a:p>
@@ -8276,7 +8886,7 @@
                 <a:latin typeface="Calibri"/>
                 <a:ea typeface="游ゴシック"/>
               </a:rPr>
-              <a:t>・以後「動いた」ではなく「どの環境で動いたか」で記録するようにした</a:t>
+              <a:t>・この組み合わせは「事業者固有の API をアプリコードへ持ち込まない」という制約から選んでいる</a:t>
             </a:r>
           </a:p>
         </p:txBody>

--- a/content/slides/project-explanation-20260822/output/gem-hunter_text.pptx
+++ b/content/slides/project-explanation-20260822/output/gem-hunter_text.pptx
@@ -4251,11 +4251,11 @@
                 <a:spcPct val="125000"/>
               </a:lnSpc>
               <a:spcAft>
-                <a:spcPts val="1125"/>
-              </a:spcAft>
-            </a:pPr>
-            <a:r>
-              <a:rPr sz="1500">
+                <a:spcPts val="1050"/>
+              </a:spcAft>
+            </a:pPr>
+            <a:r>
+              <a:rPr sz="1400">
                 <a:solidFill>
                   <a:srgbClr val="1B2A3A"/>
                 </a:solidFill>
@@ -4271,11 +4271,11 @@
                 <a:spcPct val="125000"/>
               </a:lnSpc>
               <a:spcAft>
-                <a:spcPts val="1125"/>
-              </a:spcAft>
-            </a:pPr>
-            <a:r>
-              <a:rPr sz="1500">
+                <a:spcPts val="1050"/>
+              </a:spcAft>
+            </a:pPr>
+            <a:r>
+              <a:rPr sz="1400">
                 <a:solidFill>
                   <a:srgbClr val="1B2A3A"/>
                 </a:solidFill>
@@ -4291,31 +4291,51 @@
                 <a:spcPct val="125000"/>
               </a:lnSpc>
               <a:spcAft>
-                <a:spcPts val="1125"/>
-              </a:spcAft>
-            </a:pPr>
-            <a:r>
-              <a:rPr sz="1500">
-                <a:solidFill>
-                  <a:srgbClr val="1B2A3A"/>
-                </a:solidFill>
-                <a:latin typeface="Calibri"/>
-                <a:ea typeface="游ゴシック"/>
-              </a:rPr>
-              <a:t>・検査は 38 項目。lint・型・テスト・E2E・Lighthouse に、依存規則などの静的検査と運用ツール自身の self-test を重ねてある</a:t>
-            </a:r>
-          </a:p>
-          <a:p>
-            <a:pPr>
-              <a:lnSpc>
-                <a:spcPct val="125000"/>
-              </a:lnSpc>
-              <a:spcAft>
-                <a:spcPts val="1125"/>
-              </a:spcAft>
-            </a:pPr>
-            <a:r>
-              <a:rPr sz="1500">
+                <a:spcPts val="1050"/>
+              </a:spcAft>
+            </a:pPr>
+            <a:r>
+              <a:rPr sz="1400">
+                <a:solidFill>
+                  <a:srgbClr val="1B2A3A"/>
+                </a:solidFill>
+                <a:latin typeface="Calibri"/>
+                <a:ea typeface="游ゴシック"/>
+              </a:rPr>
+              <a:t>・検査は 38 項目。lint・型・テスト・E2E・Lighthouse の 5 点に、静的検査 15 点を重ねる</a:t>
+            </a:r>
+          </a:p>
+          <a:p>
+            <a:pPr>
+              <a:lnSpc>
+                <a:spcPct val="125000"/>
+              </a:lnSpc>
+              <a:spcAft>
+                <a:spcPts val="1050"/>
+              </a:spcAft>
+            </a:pPr>
+            <a:r>
+              <a:rPr sz="1400">
+                <a:solidFill>
+                  <a:srgbClr val="1B2A3A"/>
+                </a:solidFill>
+                <a:latin typeface="Calibri"/>
+                <a:ea typeface="游ゴシック"/>
+              </a:rPr>
+              <a:t>・残る 18 点は運用ツール自身の self-test で、判定ロジックが壊れたことに機械で気づける</a:t>
+            </a:r>
+          </a:p>
+          <a:p>
+            <a:pPr>
+              <a:lnSpc>
+                <a:spcPct val="125000"/>
+              </a:lnSpc>
+              <a:spcAft>
+                <a:spcPts val="1050"/>
+              </a:spcAft>
+            </a:pPr>
+            <a:r>
+              <a:rPr sz="1400">
                 <a:solidFill>
                   <a:srgbClr val="1B2A3A"/>
                 </a:solidFill>
@@ -4331,11 +4351,11 @@
                 <a:spcPct val="125000"/>
               </a:lnSpc>
               <a:spcAft>
-                <a:spcPts val="1125"/>
-              </a:spcAft>
-            </a:pPr>
-            <a:r>
-              <a:rPr sz="1500">
+                <a:spcPts val="1050"/>
+              </a:spcAft>
+            </a:pPr>
+            <a:r>
+              <a:rPr sz="1400">
                 <a:solidFill>
                   <a:srgbClr val="1B2A3A"/>
                 </a:solidFill>
@@ -4351,11 +4371,11 @@
                 <a:spcPct val="125000"/>
               </a:lnSpc>
               <a:spcAft>
-                <a:spcPts val="1125"/>
-              </a:spcAft>
-            </a:pPr>
-            <a:r>
-              <a:rPr sz="1500">
+                <a:spcPts val="1050"/>
+              </a:spcAft>
+            </a:pPr>
+            <a:r>
+              <a:rPr sz="1400">
                 <a:solidFill>
                   <a:srgbClr val="1B2A3A"/>
                 </a:solidFill>
@@ -6654,7 +6674,7 @@
                 <a:latin typeface="Calibri"/>
                 <a:ea typeface="游ゴシック"/>
               </a:rPr>
-              <a:t>・採用: Gem のデータも静的 JSON で、サーバー側に状態を持たない点は他と同じ</a:t>
+              <a:t>・採用: Gem のデータも日次バッチが作る静的 JSON で、サーバー側に状態を持たない点は他と同じ</a:t>
             </a:r>
           </a:p>
           <a:p>
@@ -7122,7 +7142,7 @@
                 <a:latin typeface="Calibri"/>
                 <a:ea typeface="游ゴシック"/>
               </a:rPr>
-              <a:t>・検索結果のカードには、Gem Index（被依存数と star の順位差。定義は後半で扱う）が高い候補に「Gem」の印が付く</a:t>
+              <a:t>・検索結果のカードには、star 数のわりに多くのパッケージから使われている候補に「Gem」の印が付く</a:t>
             </a:r>
           </a:p>
           <a:p>
@@ -7162,7 +7182,7 @@
                 <a:latin typeface="Calibri"/>
                 <a:ea typeface="游ゴシック"/>
               </a:rPr>
-              <a:t>・一覧は検索語をそのまま引き継ぎ、過小評価の度合いが高い順に 20 件ずつ並ぶ</a:t>
+              <a:t>・一覧は検索語を引き継ぎ、過小評価の度合い（Gem Index。定義は後半で扱う）が高い順に 20 件ずつ並ぶ</a:t>
             </a:r>
           </a:p>
           <a:p>

--- a/content/slides/project-explanation-20260822/output/gem-hunter_text.pptx
+++ b/content/slides/project-explanation-20260822/output/gem-hunter_text.pptx
@@ -5029,7 +5029,7 @@
                 <a:latin typeface="Calibri"/>
                 <a:ea typeface="游ゴシック"/>
               </a:rPr>
-              <a:t>Gem Index ＝ 被依存数と star の残差</a:t>
+              <a:t>Gem Index は順位の残差で作る</a:t>
             </a:r>
           </a:p>
         </p:txBody>

--- a/content/slides/project-explanation-20260822/output/gem-hunter_text.pptx
+++ b/content/slides/project-explanation-20260822/output/gem-hunter_text.pptx
@@ -4028,7 +4028,7 @@
                 <a:latin typeface="Calibri"/>
                 <a:ea typeface="游ゴシック"/>
               </a:rPr>
-              <a:t>・いまの規模は単体・結合が 779 ケース、E2E が 106 ケース（2026-08-23 時点）</a:t>
+              <a:t>・いまの規模はテストが 954 ケース、E2E が 107 ケース（2026-08-23 時点の実行結果）</a:t>
             </a:r>
           </a:p>
           <a:p>
@@ -5832,7 +5832,7 @@
                 <a:latin typeface="Calibri"/>
                 <a:ea typeface="游ゴシック"/>
               </a:rPr>
-              <a:t>・それでも sort=gem-index は戻さない。100 件中 68 件に値が無く、主ソートには使えない</a:t>
+              <a:t>・それでも sort=gem-index は戻さない。上位 100 件の 3 分の 2 前後に値が無く、主ソートにできない</a:t>
             </a:r>
           </a:p>
           <a:p>
@@ -7182,7 +7182,7 @@
                 <a:latin typeface="Calibri"/>
                 <a:ea typeface="游ゴシック"/>
               </a:rPr>
-              <a:t>・一覧は検索語を引き継ぎ、過小評価の度合い（Gem Index。定義は後半で扱う）が高い順に 20 件ずつ並ぶ</a:t>
+              <a:t>・一覧は検索語を引き継ぎ、過小評価が強い順（Gem Index が小さい順）に 20 件ずつ並ぶ</a:t>
             </a:r>
           </a:p>
           <a:p>

--- a/content/slides/project-explanation-20260822/output/gem-hunter_text.pptx
+++ b/content/slides/project-explanation-20260822/output/gem-hunter_text.pptx
@@ -24,6 +24,8 @@
     <p:sldId id="272" r:id="rId23"/>
     <p:sldId id="273" r:id="rId24"/>
     <p:sldId id="274" r:id="rId25"/>
+    <p:sldId id="275" r:id="rId26"/>
+    <p:sldId id="276" r:id="rId27"/>
   </p:sldIdLst>
   <p:sldSz cx="12132000" cy="6840000" type="screen4x3"/>
   <p:notesSz cx="6858000" cy="9144000"/>
@@ -3224,7 +3226,7 @@
                 <a:latin typeface="Calibri"/>
                 <a:ea typeface="游ゴシック"/>
               </a:rPr>
-              <a:t>star では埋もれる「実際に使われている OSS」を見つける / 開発者向け解説 / 2026-08-22</a:t>
+              <a:t>star では埋もれる「実際に使われている OSS」を見つける / 開発者向け解説 / 2026-08-23</a:t>
             </a:r>
           </a:p>
         </p:txBody>
@@ -3303,7 +3305,7 @@
                 <a:latin typeface="Calibri"/>
                 <a:ea typeface="游ゴシック"/>
               </a:rPr>
-              <a:t>1 セッションを 1 スプリントとして回す</a:t>
+              <a:t>同じコードでも、プレビューでだけ壊れる</a:t>
             </a:r>
           </a:p>
         </p:txBody>
@@ -3387,118 +3389,138 @@
                 <a:spcPct val="125000"/>
               </a:lnSpc>
               <a:spcAft>
-                <a:spcPts val="1125"/>
-              </a:spcAft>
-            </a:pPr>
-            <a:r>
-              <a:rPr sz="1500">
-                <a:solidFill>
-                  <a:srgbClr val="1B2A3A"/>
-                </a:solidFill>
-                <a:latin typeface="Calibri"/>
-                <a:ea typeface="游ゴシック"/>
-              </a:rPr>
-              <a:t>・着手したらまず Issue を status:in-progress にして論理ロックを取る</a:t>
-            </a:r>
-          </a:p>
-          <a:p>
-            <a:pPr>
-              <a:lnSpc>
-                <a:spcPct val="125000"/>
-              </a:lnSpc>
-              <a:spcAft>
-                <a:spcPts val="1125"/>
-              </a:spcAft>
-            </a:pPr>
-            <a:r>
-              <a:rPr sz="1500">
-                <a:solidFill>
-                  <a:srgbClr val="1B2A3A"/>
-                </a:solidFill>
-                <a:latin typeface="Calibri"/>
-                <a:ea typeface="游ゴシック"/>
-              </a:rPr>
-              <a:t>・スプリントゴールと編成（どの役割を何人置くか）を Issue に記録してから実装に入る</a:t>
-            </a:r>
-          </a:p>
-          <a:p>
-            <a:pPr>
-              <a:lnSpc>
-                <a:spcPct val="125000"/>
-              </a:lnSpc>
-              <a:spcAft>
-                <a:spcPts val="1125"/>
-              </a:spcAft>
-            </a:pPr>
-            <a:r>
-              <a:rPr sz="1500">
-                <a:solidFill>
-                  <a:srgbClr val="1B2A3A"/>
-                </a:solidFill>
-                <a:latin typeface="Calibri"/>
-                <a:ea typeface="游ゴシック"/>
-              </a:rPr>
-              <a:t>・確認を求めてよいのは A-1〜A-6（main への直接 push・課金設定など不可逆な操作）だけ</a:t>
-            </a:r>
-          </a:p>
-          <a:p>
-            <a:pPr>
-              <a:lnSpc>
-                <a:spcPct val="125000"/>
-              </a:lnSpc>
-              <a:spcAft>
-                <a:spcPts val="1125"/>
-              </a:spcAft>
-            </a:pPr>
-            <a:r>
-              <a:rPr sz="1500">
-                <a:solidFill>
-                  <a:srgbClr val="1B2A3A"/>
-                </a:solidFill>
-                <a:latin typeface="Calibri"/>
-                <a:ea typeface="游ゴシック"/>
-              </a:rPr>
-              <a:t>・もう 1 つの例外は、仕様解釈が 2 通り以上あって選択で成果物が変わるとき</a:t>
-            </a:r>
-          </a:p>
-          <a:p>
-            <a:pPr>
-              <a:lnSpc>
-                <a:spcPct val="125000"/>
-              </a:lnSpc>
-              <a:spcAft>
-                <a:spcPts val="1125"/>
-              </a:spcAft>
-            </a:pPr>
-            <a:r>
-              <a:rPr sz="1500">
-                <a:solidFill>
-                  <a:srgbClr val="1B2A3A"/>
-                </a:solidFill>
-                <a:latin typeface="Calibri"/>
-                <a:ea typeface="游ゴシック"/>
-              </a:rPr>
-              <a:t>・最初は各段階で確認を挟んでいたが、待ち時間がボトルネックになったので線引きを絞った</a:t>
-            </a:r>
-          </a:p>
-          <a:p>
-            <a:pPr>
-              <a:lnSpc>
-                <a:spcPct val="125000"/>
-              </a:lnSpc>
-              <a:spcAft>
-                <a:spcPts val="1125"/>
-              </a:spcAft>
-            </a:pPr>
-            <a:r>
-              <a:rPr sz="1500">
-                <a:solidFill>
-                  <a:srgbClr val="1B2A3A"/>
-                </a:solidFill>
-                <a:latin typeface="Calibri"/>
-                <a:ea typeface="游ゴシック"/>
-              </a:rPr>
-              <a:t>・セッションが途中で切れても、Issue のラベルと記録から次のセッションが再開できる</a:t>
+                <a:spcPts val="1050"/>
+              </a:spcAft>
+            </a:pPr>
+            <a:r>
+              <a:rPr sz="1400">
+                <a:solidFill>
+                  <a:srgbClr val="1B2A3A"/>
+                </a:solidFill>
+                <a:latin typeface="Calibri"/>
+                <a:ea typeface="游ゴシック"/>
+              </a:rPr>
+              <a:t>・redirects の destination に :path を書くと、プレビューでだけ 500 になる</a:t>
+            </a:r>
+          </a:p>
+          <a:p>
+            <a:pPr>
+              <a:lnSpc>
+                <a:spcPct val="125000"/>
+              </a:lnSpc>
+              <a:spcAft>
+                <a:spcPts val="1050"/>
+              </a:spcAft>
+            </a:pPr>
+            <a:r>
+              <a:rPr sz="1400">
+                <a:solidFill>
+                  <a:srgbClr val="1B2A3A"/>
+                </a:solidFill>
+                <a:latin typeface="Calibri"/>
+                <a:ea typeface="游ゴシック"/>
+              </a:rPr>
+              <a:t>・原因は OpenNext が path-to-regexp を validate: true で呼ぶこと（Next.js 本体は false）</a:t>
+            </a:r>
+          </a:p>
+          <a:p>
+            <a:pPr>
+              <a:lnSpc>
+                <a:spcPct val="125000"/>
+              </a:lnSpc>
+              <a:spcAft>
+                <a:spcPts val="1050"/>
+              </a:spcAft>
+            </a:pPr>
+            <a:r>
+              <a:rPr sz="1400">
+                <a:solidFill>
+                  <a:srgbClr val="1B2A3A"/>
+                </a:solidFill>
+                <a:latin typeface="Calibri"/>
+                <a:ea typeface="游ゴシック"/>
+              </a:rPr>
+              <a:t>・拡張子付きパスは /repos/angular/angular.js が 404、/ja を付けると 200 になる</a:t>
+            </a:r>
+          </a:p>
+          <a:p>
+            <a:pPr>
+              <a:lnSpc>
+                <a:spcPct val="125000"/>
+              </a:lnSpc>
+              <a:spcAft>
+                <a:spcPts val="1050"/>
+              </a:spcAft>
+            </a:pPr>
+            <a:r>
+              <a:rPr sz="1400">
+                <a:solidFill>
+                  <a:srgbClr val="1B2A3A"/>
+                </a:solidFill>
+                <a:latin typeface="Calibri"/>
+                <a:ea typeface="游ゴシック"/>
+              </a:rPr>
+              <a:t>・本番ビルドの npm は依存の install スクリプトを既定で止めるので、そこでだけ落ちた</a:t>
+            </a:r>
+          </a:p>
+          <a:p>
+            <a:pPr>
+              <a:lnSpc>
+                <a:spcPct val="125000"/>
+              </a:lnSpc>
+              <a:spcAft>
+                <a:spcPts val="1050"/>
+              </a:spcAft>
+            </a:pPr>
+            <a:r>
+              <a:rPr sz="1400">
+                <a:solidFill>
+                  <a:srgbClr val="1B2A3A"/>
+                </a:solidFill>
+                <a:latin typeface="Calibri"/>
+                <a:ea typeface="游ゴシック"/>
+              </a:rPr>
+              <a:t>・wrangler deploy がブロックされることがある（実測 5 回失敗・2 回成功の非決定的挙動）</a:t>
+            </a:r>
+          </a:p>
+          <a:p>
+            <a:pPr>
+              <a:lnSpc>
+                <a:spcPct val="125000"/>
+              </a:lnSpc>
+              <a:spcAft>
+                <a:spcPts val="1050"/>
+              </a:spcAft>
+            </a:pPr>
+            <a:r>
+              <a:rPr sz="1400">
+                <a:solidFill>
+                  <a:srgbClr val="1B2A3A"/>
+                </a:solidFill>
+                <a:latin typeface="Calibri"/>
+                <a:ea typeface="游ゴシック"/>
+              </a:rPr>
+              <a:t>・どれもローカルの next start では再現せず、上げて初めて壊れた</a:t>
+            </a:r>
+          </a:p>
+          <a:p>
+            <a:pPr>
+              <a:lnSpc>
+                <a:spcPct val="125000"/>
+              </a:lnSpc>
+              <a:spcAft>
+                <a:spcPts val="1050"/>
+              </a:spcAft>
+            </a:pPr>
+            <a:r>
+              <a:rPr sz="1400">
+                <a:solidFill>
+                  <a:srgbClr val="1B2A3A"/>
+                </a:solidFill>
+                <a:latin typeface="Calibri"/>
+                <a:ea typeface="游ゴシック"/>
+              </a:rPr>
+              <a:t>・以後「動いた」ではなく「どの環境で、どこまで見たか」で記録するようにした</a:t>
             </a:r>
           </a:p>
         </p:txBody>
@@ -3577,7 +3599,7 @@
                 <a:latin typeface="Calibri"/>
                 <a:ea typeface="游ゴシック"/>
               </a:rPr>
-              <a:t>テストを先に書き、緑でなければ進めない</a:t>
+              <a:t>1 セッションを 1 スプリントとして回す</a:t>
             </a:r>
           </a:p>
         </p:txBody>
@@ -3672,7 +3694,7 @@
                 <a:latin typeface="Calibri"/>
                 <a:ea typeface="游ゴシック"/>
               </a:rPr>
-              <a:t>・Red → Green → Refactor の順を崩さない。テストを後から足す順序を取らない</a:t>
+              <a:t>・着手したらまず Issue を status:in-progress にして論理ロックを取る</a:t>
             </a:r>
           </a:p>
           <a:p>
@@ -3692,7 +3714,7 @@
                 <a:latin typeface="Calibri"/>
                 <a:ea typeface="游ゴシック"/>
               </a:rPr>
-              <a:t>・単体・結合は Vitest + MSW でネットワークに触らず、E2E は Playwright + axe で実ブラウザを動かす</a:t>
+              <a:t>・スプリントゴールと編成（どの役割を何人置くか）を Issue に記録してから実装に入る</a:t>
             </a:r>
           </a:p>
           <a:p>
@@ -3712,7 +3734,7 @@
                 <a:latin typeface="Calibri"/>
                 <a:ea typeface="游ゴシック"/>
               </a:rPr>
-              <a:t>・操作レビューの手順をそのまま E2E に写すので、手で確かめたことが以後は自動で守られる</a:t>
+              <a:t>・確認を求めてよいのは A-1〜A-6（main への直接 push・課金設定など不可逆な操作）だけ</a:t>
             </a:r>
           </a:p>
           <a:p>
@@ -3732,7 +3754,7 @@
                 <a:latin typeface="Calibri"/>
                 <a:ea typeface="游ゴシック"/>
               </a:rPr>
-              <a:t>・テストのスキップ・無効化で緑にしない。落ちたまま次のタスクに進まない</a:t>
+              <a:t>・もう 1 つの例外は、仕様解釈が 2 通り以上あって選択で成果物が変わるとき</a:t>
             </a:r>
           </a:p>
           <a:p>
@@ -3752,7 +3774,7 @@
                 <a:latin typeface="Calibri"/>
                 <a:ea typeface="游ゴシック"/>
               </a:rPr>
-              <a:t>・外部 API はすべてモック化してあり、環境変数を 1 つも設定しなくてもテストが完走する</a:t>
+              <a:t>・最初は各段階で確認を挟んでいたが、待ち時間がボトルネックになったので線引きを絞った</a:t>
             </a:r>
           </a:p>
           <a:p>
@@ -3772,7 +3794,7 @@
                 <a:latin typeface="Calibri"/>
                 <a:ea typeface="游ゴシック"/>
               </a:rPr>
-              <a:t>・テストを後回しにした回は、動くものは早くできても後から直すコストの方が高くついた</a:t>
+              <a:t>・セッションが途中で切れても、Issue のラベルと記録から次のセッションが再開できる</a:t>
             </a:r>
           </a:p>
         </p:txBody>
@@ -3851,7 +3873,7 @@
                 <a:latin typeface="Calibri"/>
                 <a:ea typeface="游ゴシック"/>
               </a:rPr>
-              <a:t>機械検証を通さないと PR を出せない</a:t>
+              <a:t>テストを先に書き、緑でなければ進めない</a:t>
             </a:r>
           </a:p>
         </p:txBody>
@@ -3935,118 +3957,138 @@
                 <a:spcPct val="125000"/>
               </a:lnSpc>
               <a:spcAft>
-                <a:spcPts val="1125"/>
-              </a:spcAft>
-            </a:pPr>
-            <a:r>
-              <a:rPr sz="1500">
-                <a:solidFill>
-                  <a:srgbClr val="1B2A3A"/>
-                </a:solidFill>
-                <a:latin typeface="Calibri"/>
-                <a:ea typeface="游ゴシック"/>
-              </a:rPr>
-              <a:t>・GitHub Actions は使わない判断をし、CI の代わりにセッション自身が npm run check を実行する</a:t>
-            </a:r>
-          </a:p>
-          <a:p>
-            <a:pPr>
-              <a:lnSpc>
-                <a:spcPct val="125000"/>
-              </a:lnSpc>
-              <a:spcAft>
-                <a:spcPts val="1125"/>
-              </a:spcAft>
-            </a:pPr>
-            <a:r>
-              <a:rPr sz="1500">
-                <a:solidFill>
-                  <a:srgbClr val="1B2A3A"/>
-                </a:solidFill>
-                <a:latin typeface="Calibri"/>
-                <a:ea typeface="游ゴシック"/>
-              </a:rPr>
-              <a:t>・内訳は lint・型・単体/結合・E2E・Lighthouse の基本 5 点と、静的検査 6 点（依存規則・UI 寸法・コントラスト・Prose・ADR 記載・副作用 GET）</a:t>
-            </a:r>
-          </a:p>
-          <a:p>
-            <a:pPr>
-              <a:lnSpc>
-                <a:spcPct val="125000"/>
-              </a:lnSpc>
-              <a:spcAft>
-                <a:spcPts val="1125"/>
-              </a:spcAft>
-            </a:pPr>
-            <a:r>
-              <a:rPr sz="1500">
-                <a:solidFill>
-                  <a:srgbClr val="1B2A3A"/>
-                </a:solidFill>
-                <a:latin typeface="Calibri"/>
-                <a:ea typeface="游ゴシック"/>
-              </a:rPr>
-              <a:t>・残りは運用ツールの self-test（退役・デプロイゲート・Workers Builds・ダイジェスト鮮度・本番乖離・WIP 抑止）</a:t>
-            </a:r>
-          </a:p>
-          <a:p>
-            <a:pPr>
-              <a:lnSpc>
-                <a:spcPct val="125000"/>
-              </a:lnSpc>
-              <a:spcAft>
-                <a:spcPts val="1125"/>
-              </a:spcAft>
-            </a:pPr>
-            <a:r>
-              <a:rPr sz="1500">
-                <a:solidFill>
-                  <a:srgbClr val="1B2A3A"/>
-                </a:solidFill>
-                <a:latin typeface="Calibri"/>
-                <a:ea typeface="游ゴシック"/>
-              </a:rPr>
-              <a:t>・結果の Markdown 表を PR 本文に貼るのが必須。貼っていないとフックが PR 作成をブロックする</a:t>
-            </a:r>
-          </a:p>
-          <a:p>
-            <a:pPr>
-              <a:lnSpc>
-                <a:spcPct val="125000"/>
-              </a:lnSpc>
-              <a:spcAft>
-                <a:spcPts val="1125"/>
-              </a:spcAft>
-            </a:pPr>
-            <a:r>
-              <a:rPr sz="1500">
-                <a:solidFill>
-                  <a:srgbClr val="1B2A3A"/>
-                </a:solidFill>
-                <a:latin typeface="Calibri"/>
-                <a:ea typeface="游ゴシック"/>
-              </a:rPr>
-              <a:t>・機械で落とせる項目は人が見ないので、レビューは設計判断に集中できる</a:t>
-            </a:r>
-          </a:p>
-          <a:p>
-            <a:pPr>
-              <a:lnSpc>
-                <a:spcPct val="125000"/>
-              </a:lnSpc>
-              <a:spcAft>
-                <a:spcPts val="1125"/>
-              </a:spcAft>
-            </a:pPr>
-            <a:r>
-              <a:rPr sz="1500">
-                <a:solidFill>
-                  <a:srgbClr val="1B2A3A"/>
-                </a:solidFill>
-                <a:latin typeface="Calibri"/>
-                <a:ea typeface="游ゴシック"/>
-              </a:rPr>
-              <a:t>・アーキテクチャの依存規則もここで落ちる。規律が文書だけで終わらない仕組みにしている</a:t>
+                <a:spcPts val="1050"/>
+              </a:spcAft>
+            </a:pPr>
+            <a:r>
+              <a:rPr sz="1400">
+                <a:solidFill>
+                  <a:srgbClr val="1B2A3A"/>
+                </a:solidFill>
+                <a:latin typeface="Calibri"/>
+                <a:ea typeface="游ゴシック"/>
+              </a:rPr>
+              <a:t>・Red → Green → Refactor の順を崩さない。テストを後から足す順序を取らない</a:t>
+            </a:r>
+          </a:p>
+          <a:p>
+            <a:pPr>
+              <a:lnSpc>
+                <a:spcPct val="125000"/>
+              </a:lnSpc>
+              <a:spcAft>
+                <a:spcPts val="1050"/>
+              </a:spcAft>
+            </a:pPr>
+            <a:r>
+              <a:rPr sz="1400">
+                <a:solidFill>
+                  <a:srgbClr val="1B2A3A"/>
+                </a:solidFill>
+                <a:latin typeface="Calibri"/>
+                <a:ea typeface="游ゴシック"/>
+              </a:rPr>
+              <a:t>・単体・結合は Vitest + MSW でネットワークに触らず、E2E は Playwright + axe で実ブラウザを動かす</a:t>
+            </a:r>
+          </a:p>
+          <a:p>
+            <a:pPr>
+              <a:lnSpc>
+                <a:spcPct val="125000"/>
+              </a:lnSpc>
+              <a:spcAft>
+                <a:spcPts val="1050"/>
+              </a:spcAft>
+            </a:pPr>
+            <a:r>
+              <a:rPr sz="1400">
+                <a:solidFill>
+                  <a:srgbClr val="1B2A3A"/>
+                </a:solidFill>
+                <a:latin typeface="Calibri"/>
+                <a:ea typeface="游ゴシック"/>
+              </a:rPr>
+              <a:t>・操作レビューの手順をそのまま E2E に写すので、手で確かめたことが以後は自動で守られる</a:t>
+            </a:r>
+          </a:p>
+          <a:p>
+            <a:pPr>
+              <a:lnSpc>
+                <a:spcPct val="125000"/>
+              </a:lnSpc>
+              <a:spcAft>
+                <a:spcPts val="1050"/>
+              </a:spcAft>
+            </a:pPr>
+            <a:r>
+              <a:rPr sz="1400">
+                <a:solidFill>
+                  <a:srgbClr val="1B2A3A"/>
+                </a:solidFill>
+                <a:latin typeface="Calibri"/>
+                <a:ea typeface="游ゴシック"/>
+              </a:rPr>
+              <a:t>・いまの規模はテストが 954 ケース、E2E が 107 ケース（2026-08-23 時点の実行結果）</a:t>
+            </a:r>
+          </a:p>
+          <a:p>
+            <a:pPr>
+              <a:lnSpc>
+                <a:spcPct val="125000"/>
+              </a:lnSpc>
+              <a:spcAft>
+                <a:spcPts val="1050"/>
+              </a:spcAft>
+            </a:pPr>
+            <a:r>
+              <a:rPr sz="1400">
+                <a:solidFill>
+                  <a:srgbClr val="1B2A3A"/>
+                </a:solidFill>
+                <a:latin typeface="Calibri"/>
+                <a:ea typeface="游ゴシック"/>
+              </a:rPr>
+              <a:t>・テストのスキップ・無効化で緑にしない。落ちたまま次のタスクに進まない</a:t>
+            </a:r>
+          </a:p>
+          <a:p>
+            <a:pPr>
+              <a:lnSpc>
+                <a:spcPct val="125000"/>
+              </a:lnSpc>
+              <a:spcAft>
+                <a:spcPts val="1050"/>
+              </a:spcAft>
+            </a:pPr>
+            <a:r>
+              <a:rPr sz="1400">
+                <a:solidFill>
+                  <a:srgbClr val="1B2A3A"/>
+                </a:solidFill>
+                <a:latin typeface="Calibri"/>
+                <a:ea typeface="游ゴシック"/>
+              </a:rPr>
+              <a:t>・外部 API はすべてモック化してあり、環境変数を 1 つも設定しなくてもテストが完走する</a:t>
+            </a:r>
+          </a:p>
+          <a:p>
+            <a:pPr>
+              <a:lnSpc>
+                <a:spcPct val="125000"/>
+              </a:lnSpc>
+              <a:spcAft>
+                <a:spcPts val="1050"/>
+              </a:spcAft>
+            </a:pPr>
+            <a:r>
+              <a:rPr sz="1400">
+                <a:solidFill>
+                  <a:srgbClr val="1B2A3A"/>
+                </a:solidFill>
+                <a:latin typeface="Calibri"/>
+                <a:ea typeface="游ゴシック"/>
+              </a:rPr>
+              <a:t>・テストを後回しにした回は、動くものは早くできても後から直すコストの方が高くついた</a:t>
             </a:r>
           </a:p>
         </p:txBody>
@@ -4125,7 +4167,7 @@
                 <a:latin typeface="Calibri"/>
                 <a:ea typeface="游ゴシック"/>
               </a:rPr>
-              <a:t>レビューは、他人の PR として読み直す</a:t>
+              <a:t>機械検証を通さないと PR を出せない</a:t>
             </a:r>
           </a:p>
         </p:txBody>
@@ -4209,118 +4251,138 @@
                 <a:spcPct val="125000"/>
               </a:lnSpc>
               <a:spcAft>
-                <a:spcPts val="1125"/>
-              </a:spcAft>
-            </a:pPr>
-            <a:r>
-              <a:rPr sz="1500">
-                <a:solidFill>
-                  <a:srgbClr val="1B2A3A"/>
-                </a:solidFill>
-                <a:latin typeface="Calibri"/>
-                <a:ea typeface="游ゴシック"/>
-              </a:rPr>
-              <a:t>・外部 AI レビュアー（Copilot・Gemini）は廃止。レビューは自前の /code-review で完結させる</a:t>
-            </a:r>
-          </a:p>
-          <a:p>
-            <a:pPr>
-              <a:lnSpc>
-                <a:spcPct val="125000"/>
-              </a:lnSpc>
-              <a:spcAft>
-                <a:spcPts val="1125"/>
-              </a:spcAft>
-            </a:pPr>
-            <a:r>
-              <a:rPr sz="1500">
-                <a:solidFill>
-                  <a:srgbClr val="1B2A3A"/>
-                </a:solidFill>
-                <a:latin typeface="Calibri"/>
-                <a:ea typeface="游ゴシック"/>
-              </a:rPr>
-              <a:t>・第 1 段: 観点別に 5〜7 体のサブエージェントを並列起動し、事前文脈なしで差分を読ませる</a:t>
-            </a:r>
-          </a:p>
-          <a:p>
-            <a:pPr>
-              <a:lnSpc>
-                <a:spcPct val="125000"/>
-              </a:lnSpc>
-              <a:spcAft>
-                <a:spcPts val="1125"/>
-              </a:spcAft>
-            </a:pPr>
-            <a:r>
-              <a:rPr sz="1500">
-                <a:solidFill>
-                  <a:srgbClr val="1B2A3A"/>
-                </a:solidFill>
-                <a:latin typeface="Calibri"/>
-                <a:ea typeface="游ゴシック"/>
-              </a:rPr>
-              <a:t>・自分が書いたコードを自分で読むと盲点が残るため、あえて文脈を持たない読み手を立てる</a:t>
-            </a:r>
-          </a:p>
-          <a:p>
-            <a:pPr>
-              <a:lnSpc>
-                <a:spcPct val="125000"/>
-              </a:lnSpc>
-              <a:spcAft>
-                <a:spcPts val="1125"/>
-              </a:spcAft>
-            </a:pPr>
-            <a:r>
-              <a:rPr sz="1500">
-                <a:solidFill>
-                  <a:srgbClr val="1B2A3A"/>
-                </a:solidFill>
-                <a:latin typeface="Calibri"/>
-                <a:ea typeface="游ゴシック"/>
-              </a:rPr>
-              <a:t>・第 2 段: 指摘ごとに反証担当を立て、反証に耐えたものを CONFIRMED、疑いが残るものを PLAUSIBLE と明記する</a:t>
-            </a:r>
-          </a:p>
-          <a:p>
-            <a:pPr>
-              <a:lnSpc>
-                <a:spcPct val="125000"/>
-              </a:lnSpc>
-              <a:spcAft>
-                <a:spcPts val="1125"/>
-              </a:spcAft>
-            </a:pPr>
-            <a:r>
-              <a:rPr sz="1500">
-                <a:solidFill>
-                  <a:srgbClr val="1B2A3A"/>
-                </a:solidFill>
-                <a:latin typeface="Calibri"/>
-                <a:ea typeface="游ゴシック"/>
-              </a:rPr>
-              <a:t>・第 3 段: 確度を問わず全件を行単位のインラインコメントに残す。指摘ゼロでもレビューを 1 件投稿する</a:t>
-            </a:r>
-          </a:p>
-          <a:p>
-            <a:pPr>
-              <a:lnSpc>
-                <a:spcPct val="125000"/>
-              </a:lnSpc>
-              <a:spcAft>
-                <a:spcPts val="1125"/>
-              </a:spcAft>
-            </a:pPr>
-            <a:r>
-              <a:rPr sz="1500">
-                <a:solidFill>
-                  <a:srgbClr val="1B2A3A"/>
-                </a:solidFill>
-                <a:latin typeface="Calibri"/>
-                <a:ea typeface="游ゴシック"/>
-              </a:rPr>
-              <a:t>・対応しないと決めた指摘も、理由を返信してから Resolve する。黙って閉じない</a:t>
+                <a:spcPts val="1050"/>
+              </a:spcAft>
+            </a:pPr>
+            <a:r>
+              <a:rPr sz="1400">
+                <a:solidFill>
+                  <a:srgbClr val="1B2A3A"/>
+                </a:solidFill>
+                <a:latin typeface="Calibri"/>
+                <a:ea typeface="游ゴシック"/>
+              </a:rPr>
+              <a:t>・品質ゲートと本番デプロイに GitHub Actions は使わず、セッション自身が npm run check を走らせる</a:t>
+            </a:r>
+          </a:p>
+          <a:p>
+            <a:pPr>
+              <a:lnSpc>
+                <a:spcPct val="125000"/>
+              </a:lnSpc>
+              <a:spcAft>
+                <a:spcPts val="1050"/>
+              </a:spcAft>
+            </a:pPr>
+            <a:r>
+              <a:rPr sz="1400">
+                <a:solidFill>
+                  <a:srgbClr val="1B2A3A"/>
+                </a:solidFill>
+                <a:latin typeface="Calibri"/>
+                <a:ea typeface="游ゴシック"/>
+              </a:rPr>
+              <a:t>・Actions の唯一の用途は Gem 候補プールの日次生成で、PR を作るところまでしかやらせない</a:t>
+            </a:r>
+          </a:p>
+          <a:p>
+            <a:pPr>
+              <a:lnSpc>
+                <a:spcPct val="125000"/>
+              </a:lnSpc>
+              <a:spcAft>
+                <a:spcPts val="1050"/>
+              </a:spcAft>
+            </a:pPr>
+            <a:r>
+              <a:rPr sz="1400">
+                <a:solidFill>
+                  <a:srgbClr val="1B2A3A"/>
+                </a:solidFill>
+                <a:latin typeface="Calibri"/>
+                <a:ea typeface="游ゴシック"/>
+              </a:rPr>
+              <a:t>・検査は 38 項目。lint・型・テスト・E2E・Lighthouse の 5 点に、静的検査 15 点を重ねる</a:t>
+            </a:r>
+          </a:p>
+          <a:p>
+            <a:pPr>
+              <a:lnSpc>
+                <a:spcPct val="125000"/>
+              </a:lnSpc>
+              <a:spcAft>
+                <a:spcPts val="1050"/>
+              </a:spcAft>
+            </a:pPr>
+            <a:r>
+              <a:rPr sz="1400">
+                <a:solidFill>
+                  <a:srgbClr val="1B2A3A"/>
+                </a:solidFill>
+                <a:latin typeface="Calibri"/>
+                <a:ea typeface="游ゴシック"/>
+              </a:rPr>
+              <a:t>・残る 18 点は運用ツール自身の self-test で、判定ロジックが壊れたことに機械で気づける</a:t>
+            </a:r>
+          </a:p>
+          <a:p>
+            <a:pPr>
+              <a:lnSpc>
+                <a:spcPct val="125000"/>
+              </a:lnSpc>
+              <a:spcAft>
+                <a:spcPts val="1050"/>
+              </a:spcAft>
+            </a:pPr>
+            <a:r>
+              <a:rPr sz="1400">
+                <a:solidFill>
+                  <a:srgbClr val="1B2A3A"/>
+                </a:solidFill>
+                <a:latin typeface="Calibri"/>
+                <a:ea typeface="游ゴシック"/>
+              </a:rPr>
+              <a:t>・結果の Markdown 表を PR 本文に貼るのが必須。貼っていないとフックが PR 作成をブロックする</a:t>
+            </a:r>
+          </a:p>
+          <a:p>
+            <a:pPr>
+              <a:lnSpc>
+                <a:spcPct val="125000"/>
+              </a:lnSpc>
+              <a:spcAft>
+                <a:spcPts val="1050"/>
+              </a:spcAft>
+            </a:pPr>
+            <a:r>
+              <a:rPr sz="1400">
+                <a:solidFill>
+                  <a:srgbClr val="1B2A3A"/>
+                </a:solidFill>
+                <a:latin typeface="Calibri"/>
+                <a:ea typeface="游ゴシック"/>
+              </a:rPr>
+              <a:t>・アーキテクチャの依存規則もここで落ちるので、規律が文書だけで終わらない</a:t>
+            </a:r>
+          </a:p>
+          <a:p>
+            <a:pPr>
+              <a:lnSpc>
+                <a:spcPct val="125000"/>
+              </a:lnSpc>
+              <a:spcAft>
+                <a:spcPts val="1050"/>
+              </a:spcAft>
+            </a:pPr>
+            <a:r>
+              <a:rPr sz="1400">
+                <a:solidFill>
+                  <a:srgbClr val="1B2A3A"/>
+                </a:solidFill>
+                <a:latin typeface="Calibri"/>
+                <a:ea typeface="游ゴシック"/>
+              </a:rPr>
+              <a:t>・機械で落とせるものは人が見ない。レビューは設計判断に集中できる</a:t>
             </a:r>
           </a:p>
         </p:txBody>
@@ -4399,7 +4461,7 @@
                 <a:latin typeface="Calibri"/>
                 <a:ea typeface="游ゴシック"/>
               </a:rPr>
-              <a:t>実装からマージまで、確認なしで走り切る</a:t>
+              <a:t>レビューは、他人の PR として読み直す</a:t>
             </a:r>
           </a:p>
         </p:txBody>
@@ -4483,138 +4545,118 @@
                 <a:spcPct val="125000"/>
               </a:lnSpc>
               <a:spcAft>
-                <a:spcPts val="1050"/>
-              </a:spcAft>
-            </a:pPr>
-            <a:r>
-              <a:rPr sz="1400">
-                <a:solidFill>
-                  <a:srgbClr val="1B2A3A"/>
-                </a:solidFill>
-                <a:latin typeface="Calibri"/>
-                <a:ea typeface="游ゴシック"/>
-              </a:rPr>
-              <a:t>・実装 → セルフレビュー → PR 作成 → 機械ゲート + セルフレビュー → 指摘対応 → squash マージまで一続きで進む</a:t>
-            </a:r>
-          </a:p>
-          <a:p>
-            <a:pPr>
-              <a:lnSpc>
-                <a:spcPct val="125000"/>
-              </a:lnSpc>
-              <a:spcAft>
-                <a:spcPts val="1050"/>
-              </a:spcAft>
-            </a:pPr>
-            <a:r>
-              <a:rPr sz="1400">
-                <a:solidFill>
-                  <a:srgbClr val="1B2A3A"/>
-                </a:solidFill>
-                <a:latin typeface="Calibri"/>
-                <a:ea typeface="游ゴシック"/>
-              </a:rPr>
-              <a:t>・PR 本文には Sprint Goal・sp（見積もり）・Session-Id・Team（編成）を必ず書く</a:t>
-            </a:r>
-          </a:p>
-          <a:p>
-            <a:pPr>
-              <a:lnSpc>
-                <a:spcPct val="125000"/>
-              </a:lnSpc>
-              <a:spcAft>
-                <a:spcPts val="1050"/>
-              </a:spcAft>
-            </a:pPr>
-            <a:r>
-              <a:rPr sz="1400">
-                <a:solidFill>
-                  <a:srgbClr val="1B2A3A"/>
-                </a:solidFill>
-                <a:latin typeface="Calibri"/>
-                <a:ea typeface="游ゴシック"/>
-              </a:rPr>
-              <a:t>・Session-Id があるので、セッションが切れても「自分が出した PR」を後から決定論的に回収できる</a:t>
-            </a:r>
-          </a:p>
-          <a:p>
-            <a:pPr>
-              <a:lnSpc>
-                <a:spcPct val="125000"/>
-              </a:lnSpc>
-              <a:spcAft>
-                <a:spcPts val="1050"/>
-              </a:spcAft>
-            </a:pPr>
-            <a:r>
-              <a:rPr sz="1400">
-                <a:solidFill>
-                  <a:srgbClr val="1B2A3A"/>
-                </a:solidFill>
-                <a:latin typeface="Calibri"/>
-                <a:ea typeface="游ゴシック"/>
-              </a:rPr>
-              <a:t>・同じ箇所の修正サイクルが 2 回を超えたらサーキットブレーカーで止め、根本原因を分析して報告する</a:t>
-            </a:r>
-          </a:p>
-          <a:p>
-            <a:pPr>
-              <a:lnSpc>
-                <a:spcPct val="125000"/>
-              </a:lnSpc>
-              <a:spcAft>
-                <a:spcPts val="1050"/>
-              </a:spcAft>
-            </a:pPr>
-            <a:r>
-              <a:rPr sz="1400">
-                <a:solidFill>
-                  <a:srgbClr val="1B2A3A"/>
-                </a:solidFill>
-                <a:latin typeface="Calibri"/>
-                <a:ea typeface="游ゴシック"/>
-              </a:rPr>
-              <a:t>・止める条件を先に決めておくことが、確認を挟まずに走らせるための前提になっている</a:t>
-            </a:r>
-          </a:p>
-          <a:p>
-            <a:pPr>
-              <a:lnSpc>
-                <a:spcPct val="125000"/>
-              </a:lnSpc>
-              <a:spcAft>
-                <a:spcPts val="1050"/>
-              </a:spcAft>
-            </a:pPr>
-            <a:r>
-              <a:rPr sz="1400">
-                <a:solidFill>
-                  <a:srgbClr val="1B2A3A"/>
-                </a:solidFill>
-                <a:latin typeface="Calibri"/>
-                <a:ea typeface="游ゴシック"/>
-              </a:rPr>
-              <a:t>・この運用でマージ済みの PR は 90 件（2026-08-22 時点・GitHub 検索の実測）</a:t>
-            </a:r>
-          </a:p>
-          <a:p>
-            <a:pPr>
-              <a:lnSpc>
-                <a:spcPct val="125000"/>
-              </a:lnSpc>
-              <a:spcAft>
-                <a:spcPts val="1050"/>
-              </a:spcAft>
-            </a:pPr>
-            <a:r>
-              <a:rPr sz="1400">
-                <a:solidFill>
-                  <a:srgbClr val="1B2A3A"/>
-                </a:solidFill>
-                <a:latin typeface="Calibri"/>
-                <a:ea typeface="游ゴシック"/>
-              </a:rPr>
-              <a:t>・速度の効果は測っていないので語らない。言えるのは「この手順で回っている」ことだけ</a:t>
+                <a:spcPts val="1125"/>
+              </a:spcAft>
+            </a:pPr>
+            <a:r>
+              <a:rPr sz="1500">
+                <a:solidFill>
+                  <a:srgbClr val="1B2A3A"/>
+                </a:solidFill>
+                <a:latin typeface="Calibri"/>
+                <a:ea typeface="游ゴシック"/>
+              </a:rPr>
+              <a:t>・外部 AI レビュアー（Copilot・Gemini）は廃止。レビューは自前の /code-review で完結させる</a:t>
+            </a:r>
+          </a:p>
+          <a:p>
+            <a:pPr>
+              <a:lnSpc>
+                <a:spcPct val="125000"/>
+              </a:lnSpc>
+              <a:spcAft>
+                <a:spcPts val="1125"/>
+              </a:spcAft>
+            </a:pPr>
+            <a:r>
+              <a:rPr sz="1500">
+                <a:solidFill>
+                  <a:srgbClr val="1B2A3A"/>
+                </a:solidFill>
+                <a:latin typeface="Calibri"/>
+                <a:ea typeface="游ゴシック"/>
+              </a:rPr>
+              <a:t>・第 1 段: 観点別に 5〜7 体のサブエージェントを並列起動し、事前文脈なしで差分を読ませる</a:t>
+            </a:r>
+          </a:p>
+          <a:p>
+            <a:pPr>
+              <a:lnSpc>
+                <a:spcPct val="125000"/>
+              </a:lnSpc>
+              <a:spcAft>
+                <a:spcPts val="1125"/>
+              </a:spcAft>
+            </a:pPr>
+            <a:r>
+              <a:rPr sz="1500">
+                <a:solidFill>
+                  <a:srgbClr val="1B2A3A"/>
+                </a:solidFill>
+                <a:latin typeface="Calibri"/>
+                <a:ea typeface="游ゴシック"/>
+              </a:rPr>
+              <a:t>・自分が書いたコードを自分で読むと盲点が残るため、あえて文脈を持たない読み手を立てる</a:t>
+            </a:r>
+          </a:p>
+          <a:p>
+            <a:pPr>
+              <a:lnSpc>
+                <a:spcPct val="125000"/>
+              </a:lnSpc>
+              <a:spcAft>
+                <a:spcPts val="1125"/>
+              </a:spcAft>
+            </a:pPr>
+            <a:r>
+              <a:rPr sz="1500">
+                <a:solidFill>
+                  <a:srgbClr val="1B2A3A"/>
+                </a:solidFill>
+                <a:latin typeface="Calibri"/>
+                <a:ea typeface="游ゴシック"/>
+              </a:rPr>
+              <a:t>・第 2 段: 指摘ごとに反証担当を立て、反証に耐えたものを CONFIRMED、疑いが残るものを PLAUSIBLE と明記する</a:t>
+            </a:r>
+          </a:p>
+          <a:p>
+            <a:pPr>
+              <a:lnSpc>
+                <a:spcPct val="125000"/>
+              </a:lnSpc>
+              <a:spcAft>
+                <a:spcPts val="1125"/>
+              </a:spcAft>
+            </a:pPr>
+            <a:r>
+              <a:rPr sz="1500">
+                <a:solidFill>
+                  <a:srgbClr val="1B2A3A"/>
+                </a:solidFill>
+                <a:latin typeface="Calibri"/>
+                <a:ea typeface="游ゴシック"/>
+              </a:rPr>
+              <a:t>・第 3 段: 確度を問わず全件を行単位のインラインコメントに残す。指摘ゼロでもレビューを 1 件投稿する</a:t>
+            </a:r>
+          </a:p>
+          <a:p>
+            <a:pPr>
+              <a:lnSpc>
+                <a:spcPct val="125000"/>
+              </a:lnSpc>
+              <a:spcAft>
+                <a:spcPts val="1125"/>
+              </a:spcAft>
+            </a:pPr>
+            <a:r>
+              <a:rPr sz="1500">
+                <a:solidFill>
+                  <a:srgbClr val="1B2A3A"/>
+                </a:solidFill>
+                <a:latin typeface="Calibri"/>
+                <a:ea typeface="游ゴシック"/>
+              </a:rPr>
+              <a:t>・対応しないと決めた指摘も、理由を返信してから Resolve する。黙って閉じない</a:t>
             </a:r>
           </a:p>
         </p:txBody>
@@ -4693,7 +4735,7 @@
                 <a:latin typeface="Calibri"/>
                 <a:ea typeface="游ゴシック"/>
               </a:rPr>
-              <a:t>Gem Index ＝ 被依存数と star の残差</a:t>
+              <a:t>実装からマージまで、確認なしで走り切る</a:t>
             </a:r>
           </a:p>
         </p:txBody>
@@ -4788,7 +4830,7 @@
                 <a:latin typeface="Calibri"/>
                 <a:ea typeface="游ゴシック"/>
               </a:rPr>
-              <a:t>・エコシステム内での「被依存数のパーセンタイル順位」から「star のパーセンタイル順位」を引く</a:t>
+              <a:t>・実装 → セルフレビュー → PR 作成 → 機械ゲート + セルフレビュー → 指摘対応 → squash マージまで一続きで進む</a:t>
             </a:r>
           </a:p>
           <a:p>
@@ -4808,7 +4850,7 @@
                 <a:latin typeface="Calibri"/>
                 <a:ea typeface="游ゴシック"/>
               </a:rPr>
-              <a:t>・パーセンタイル順位で比べるので、言語やエコシステムの規模が違っても同じ尺度に乗る</a:t>
+              <a:t>・PR 本文には Sprint Goal・sp（見積もり）・Session-Id・Team（編成）を必ず書く</a:t>
             </a:r>
           </a:p>
           <a:p>
@@ -4828,7 +4870,7 @@
                 <a:latin typeface="Calibri"/>
                 <a:ea typeface="游ゴシック"/>
               </a:rPr>
-              <a:t>・star を水増しすると値は下がる。偽 star に構造的に強い</a:t>
+              <a:t>・Session-Id があるので、セッションが切れても「自分が出した PR」を後から決定論的に回収できる</a:t>
             </a:r>
           </a:p>
           <a:p>
@@ -4848,7 +4890,7 @@
                 <a:latin typeface="Calibri"/>
                 <a:ea typeface="游ゴシック"/>
               </a:rPr>
-              <a:t>・健全性は criticality_score（OpenSSF の既存指標）をそのまま使い、自作しない</a:t>
+              <a:t>・同じ箇所の修正サイクルが 2 回を超えたらサーキットブレーカーで止め、根本原因を分析して報告する</a:t>
             </a:r>
           </a:p>
           <a:p>
@@ -4868,7 +4910,7 @@
                 <a:latin typeface="Calibri"/>
                 <a:ea typeface="游ゴシック"/>
               </a:rPr>
-              <a:t>・健全性は合算せず足切りにだけ使う。合算すると「健全だが有名」が上位に戻る</a:t>
+              <a:t>・止める条件を先に決めておくことが、確認を挟まずに走らせるための前提になっている</a:t>
             </a:r>
           </a:p>
           <a:p>
@@ -4888,7 +4930,7 @@
                 <a:latin typeface="Calibri"/>
                 <a:ea typeface="游ゴシック"/>
               </a:rPr>
-              <a:t>・被依存数は Ecosyste.ms の npm レジストリ API、star は GitHub API から取る</a:t>
+              <a:t>・この運用でマージ済みの PR は 120 件（2026-08-23 時点・GitHub API の実測）</a:t>
             </a:r>
           </a:p>
           <a:p>
@@ -4908,7 +4950,7 @@
                 <a:latin typeface="Calibri"/>
                 <a:ea typeface="游ゴシック"/>
               </a:rPr>
-              <a:t>・Ecosyste.ms のデータは CC BY-SA 4.0。画面に出典・ライセンス・生成時刻を明記している</a:t>
+              <a:t>・速度の効果は測っていないので語らない。言えるのは「この手順で回っている」ことだけ</a:t>
             </a:r>
           </a:p>
         </p:txBody>
@@ -4987,7 +5029,7 @@
                 <a:latin typeface="Calibri"/>
                 <a:ea typeface="游ゴシック"/>
               </a:rPr>
-              <a:t>作った差別化機能を、実測で撤去した</a:t>
+              <a:t>Gem Index は順位の残差で作る</a:t>
             </a:r>
           </a:p>
         </p:txBody>
@@ -5082,7 +5124,7 @@
                 <a:latin typeface="Calibri"/>
                 <a:ea typeface="游ゴシック"/>
               </a:rPr>
-              <a:t>・作る前は「被依存数で並べれば埋もれた良いものが出る」と考えていた</a:t>
+              <a:t>・エコシステム内での「被依存数のパーセンタイル順位」から「star のパーセンタイル順位」を引く</a:t>
             </a:r>
           </a:p>
           <a:p>
@@ -5102,7 +5144,7 @@
                 <a:latin typeface="Calibri"/>
                 <a:ea typeface="游ゴシック"/>
               </a:rPr>
-              <a:t>・候補プールは Ecosyste.ms の npm レジストリを被依存数の降順に上位 294 件、事前バッチで取ったもの</a:t>
+              <a:t>・パーセンタイル順位で比べるので、言語やエコシステムの規模が違っても同じ尺度に乗る</a:t>
             </a:r>
           </a:p>
           <a:p>
@@ -5122,7 +5164,7 @@
                 <a:latin typeface="Calibri"/>
                 <a:ea typeface="游ゴシック"/>
               </a:rPr>
-              <a:t>・同じリポジトリが複数パッケージを出すため、ユニークなリポジトリは 227 件まで減る</a:t>
+              <a:t>・star を水増しすると値は下がる。偽 star に構造的に強い</a:t>
             </a:r>
           </a:p>
           <a:p>
@@ -5142,7 +5184,7 @@
                 <a:latin typeface="Calibri"/>
                 <a:ea typeface="游ゴシック"/>
               </a:rPr>
-              <a:t>・却下: この 227 件では検索上位 100 件との一致が一般語でほぼ 0 件で、並べ替える対象がなかった</a:t>
+              <a:t>・健全性は criticality_score（OpenSSF の既存指標）をそのまま使い、自作しないと決めてある</a:t>
             </a:r>
           </a:p>
           <a:p>
@@ -5162,7 +5204,7 @@
                 <a:latin typeface="Calibri"/>
                 <a:ea typeface="游ゴシック"/>
               </a:rPr>
-              <a:t>・却下: 候補を広げる案も、バンドル 3 MB 上限に当たるうえ、npm 限定では非 JS 系に当たらない</a:t>
+              <a:t>・ただし今効いている足切りは star 下限 5 の汚染フィルタで、健全性の指標はまだ入れていない</a:t>
             </a:r>
           </a:p>
           <a:p>
@@ -5182,7 +5224,7 @@
                 <a:latin typeface="Calibri"/>
                 <a:ea typeface="游ゴシック"/>
               </a:rPr>
-              <a:t>・採用: sort=gem-index を検索結果から撤去した（Gem Index の定義そのものは撤回しない）</a:t>
+              <a:t>・被依存数は Ecosyste.ms の 12 レジストリ、star は GitHub API から取る</a:t>
             </a:r>
           </a:p>
           <a:p>
@@ -5202,47 +5244,7 @@
                 <a:latin typeface="Calibri"/>
                 <a:ea typeface="游ゴシック"/>
               </a:rPr>
-              <a:t>・採用: 1 検索あたり最大 10 リクエスト（体感 3〜8 秒）が、常に 1 回（0.5〜1 秒）になった</a:t>
-            </a:r>
-          </a:p>
-          <a:p>
-            <a:pPr>
-              <a:lnSpc>
-                <a:spcPct val="125000"/>
-              </a:lnSpc>
-              <a:spcAft>
-                <a:spcPts val="1050"/>
-              </a:spcAft>
-            </a:pPr>
-            <a:r>
-              <a:rPr sz="1400">
-                <a:solidFill>
-                  <a:srgbClr val="1B2A3A"/>
-                </a:solidFill>
-                <a:latin typeface="Calibri"/>
-                <a:ea typeface="游ゴシック"/>
-              </a:rPr>
-              <a:t>・採用: Gem Index は「今日の Gem」ダイジェストで使い続ける</a:t>
-            </a:r>
-          </a:p>
-          <a:p>
-            <a:pPr>
-              <a:lnSpc>
-                <a:spcPct val="125000"/>
-              </a:lnSpc>
-              <a:spcAft>
-                <a:spcPts val="1050"/>
-              </a:spcAft>
-            </a:pPr>
-            <a:r>
-              <a:rPr sz="1400">
-                <a:solidFill>
-                  <a:srgbClr val="1B2A3A"/>
-                </a:solidFill>
-                <a:latin typeface="Calibri"/>
-                <a:ea typeface="游ゴシック"/>
-              </a:rPr>
-              <a:t>・差別化の見せ場を自分で外す決定だったが、実測の数字の前では迷う余地がなかった</a:t>
+              <a:t>・Ecosyste.ms のデータは CC BY-SA 4.0。画面に出典・ライセンス・生成時刻を明記している</a:t>
             </a:r>
           </a:p>
         </p:txBody>
@@ -5321,7 +5323,7 @@
                 <a:latin typeface="Calibri"/>
                 <a:ea typeface="游ゴシック"/>
               </a:rPr>
-              <a:t>認証方式は 6 つの軸で選ぶ</a:t>
+              <a:t>作った差別化機能を、実測で撤去した</a:t>
             </a:r>
           </a:p>
         </p:txBody>
@@ -5416,7 +5418,7 @@
                 <a:latin typeface="Calibri"/>
                 <a:ea typeface="游ゴシック"/>
               </a:rPr>
-              <a:t>・最初は Fine-grained PAT で十分だと思っていた</a:t>
+              <a:t>・作る前は「被依存数で並べれば埋もれた良いものが出る」と考えていた</a:t>
             </a:r>
           </a:p>
           <a:p>
@@ -5436,7 +5438,7 @@
                 <a:latin typeface="Calibri"/>
                 <a:ea typeface="游ゴシック"/>
               </a:rPr>
-              <a:t>・却下: PAT は有効期限の更新が人手に残る（定常運用ゼロという要件と噛み合わない）</a:t>
+              <a:t>・当時の候補プールは npm だけの上位 294 件で、リポジトリ単位ではユニーク 227 件しかなかった</a:t>
             </a:r>
           </a:p>
           <a:p>
@@ -5456,7 +5458,7 @@
                 <a:latin typeface="Calibri"/>
                 <a:ea typeface="游ゴシック"/>
               </a:rPr>
-              <a:t>・却下: 未認証のまま叩く（レート枠が狭く、利用者が増えるほど体感が落ちる）</a:t>
+              <a:t>・却下: この 227 件では検索上位 100 件との一致が一般語でほぼ 0 件で、並べ替える対象がなかった</a:t>
             </a:r>
           </a:p>
           <a:p>
@@ -5476,7 +5478,7 @@
                 <a:latin typeface="Calibri"/>
                 <a:ea typeface="游ゴシック"/>
               </a:rPr>
-              <a:t>・採用: GitHub App の installation token（JWT 署名 → token 取得 → 失効前まで再利用）</a:t>
+              <a:t>・却下: 候補を広げる案も、バンドル 3 MB 上限に当たるうえ、npm 限定では非 JS 系に当たらない</a:t>
             </a:r>
           </a:p>
           <a:p>
@@ -5496,7 +5498,7 @@
                 <a:latin typeface="Calibri"/>
                 <a:ea typeface="游ゴシック"/>
               </a:rPr>
-              <a:t>・軸 2「取得の往復コストを払えるか」と軸 4「実装コストを払えるか」が拒否権を持つ</a:t>
+              <a:t>・採用: 検索結果を Gem Index 順に並べる sort=gem-index を用意していたが、これを撤去した</a:t>
             </a:r>
           </a:p>
           <a:p>
@@ -5516,7 +5518,7 @@
                 <a:latin typeface="Calibri"/>
                 <a:ea typeface="游ゴシック"/>
               </a:rPr>
-              <a:t>・決め手は軸 3（有効期限の更新を人手でやらない）。レート枠の拡大は付随して得られた利点</a:t>
+              <a:t>・採用: 1 検索あたり最大 10 リクエスト（体感 3〜8 秒）が、常に 1 回（0.5〜1 秒）になった</a:t>
             </a:r>
           </a:p>
           <a:p>
@@ -5536,7 +5538,27 @@
                 <a:latin typeface="Calibri"/>
                 <a:ea typeface="游ゴシック"/>
               </a:rPr>
-              <a:t>・軸は「どれが効いたか」ではなく「どれが拒否権を持つか」で並べてある</a:t>
+              <a:t>・差別化の見せ場を自分で外す決定だったが、実測の数字の前では迷う余地がなかった</a:t>
+            </a:r>
+          </a:p>
+          <a:p>
+            <a:pPr>
+              <a:lnSpc>
+                <a:spcPct val="125000"/>
+              </a:lnSpc>
+              <a:spcAft>
+                <a:spcPts val="1050"/>
+              </a:spcAft>
+            </a:pPr>
+            <a:r>
+              <a:rPr sz="1400">
+                <a:solidFill>
+                  <a:srgbClr val="1B2A3A"/>
+                </a:solidFill>
+                <a:latin typeface="Calibri"/>
+                <a:ea typeface="游ゴシック"/>
+              </a:rPr>
+              <a:t>・ただしこの 2 つの却下理由は、このあと前提ごと崩れることになる</a:t>
             </a:r>
           </a:p>
         </p:txBody>
@@ -5615,7 +5637,7 @@
                 <a:latin typeface="Calibri"/>
                 <a:ea typeface="游ゴシック"/>
               </a:rPr>
-              <a:t>Web アプリだが、DB を 1 つも持たない</a:t>
+              <a:t>母集団を広げたら、撤去の根拠が消えた</a:t>
             </a:r>
           </a:p>
         </p:txBody>
@@ -5710,7 +5732,7 @@
                 <a:latin typeface="Calibri"/>
                 <a:ea typeface="游ゴシック"/>
               </a:rPr>
-              <a:t>・却下: 自前 ETL + DB（単一開発者 + AI の運用では定常運用コストが見合わない）</a:t>
+              <a:t>・当時は「npm 限定だから広げても非 JS 系には効かない」と構造的な限界だと書いた。そこが間違っていた</a:t>
             </a:r>
           </a:p>
           <a:p>
@@ -5730,7 +5752,7 @@
                 <a:latin typeface="Calibri"/>
                 <a:ea typeface="游ゴシック"/>
               </a:rPr>
-              <a:t>・却下: お気に入りをサーバーに保存（端末間同期の利便性より DB レス原則を優先した）</a:t>
+              <a:t>・集める先を 12 レジストリへ広げ、被依存数の多い順に最大 15,000 件ずつ集め直した</a:t>
             </a:r>
           </a:p>
           <a:p>
@@ -5750,7 +5772,7 @@
                 <a:latin typeface="Calibri"/>
                 <a:ea typeface="游ゴシック"/>
               </a:rPr>
-              <a:t>・採用: 検索状態は URL に、ロケールはパスに置く</a:t>
+              <a:t>・汚染と重複を落として残ったのはユニーク 62,483 リポジトリ。最大の npm でも 15.5% にとどまる</a:t>
             </a:r>
           </a:p>
           <a:p>
@@ -5770,7 +5792,7 @@
                 <a:latin typeface="Calibri"/>
                 <a:ea typeface="游ゴシック"/>
               </a:rPr>
-              <a:t>・採用: セッションは暗号化 httpOnly Cookie、お気に入りは localStorage に置く</a:t>
+              <a:t>・一般語 24 語で測り直すと、検索上位 100 件の平均 34.5% に Gem Index が付いた</a:t>
             </a:r>
           </a:p>
           <a:p>
@@ -5790,7 +5812,7 @@
                 <a:latin typeface="Calibri"/>
                 <a:ea typeface="游ゴシック"/>
               </a:rPr>
-              <a:t>・唯一の例外が CachePort（アーキテクチャで触れた TTL 付きキャッシュ層のインターフェース）</a:t>
+              <a:t>・3 MB のバンドル上限も、静的アセットとして配る方式に変えたことで当たらなくなった</a:t>
             </a:r>
           </a:p>
           <a:p>
@@ -5810,7 +5832,7 @@
                 <a:latin typeface="Calibri"/>
                 <a:ea typeface="游ゴシック"/>
               </a:rPr>
-              <a:t>・DB を持たないので、バックアップもマイグレーションも運用から消えた</a:t>
+              <a:t>・それでも sort=gem-index は戻さない。上位 100 件の 3 分の 2 前後に値が無く、主ソートにできない</a:t>
             </a:r>
           </a:p>
           <a:p>
@@ -5830,7 +5852,7 @@
                 <a:latin typeface="Calibri"/>
                 <a:ea typeface="游ゴシック"/>
               </a:rPr>
-              <a:t>・代わりに利用者ごとの状態は端末に閉じ、端末間で共有できない（受け入れた代償）</a:t>
+              <a:t>・実測で殺した判断を、自分の実測でひっくり返す作業だった。記録が残っていたから測り直せた</a:t>
             </a:r>
           </a:p>
         </p:txBody>
@@ -5909,7 +5931,7 @@
                 <a:latin typeface="Calibri"/>
                 <a:ea typeface="游ゴシック"/>
               </a:rPr>
-              <a:t>持ち帰れる 4 つの考え方</a:t>
+              <a:t>認証方式は 6 つの軸で選ぶ</a:t>
             </a:r>
           </a:p>
         </p:txBody>
@@ -5993,98 +6015,138 @@
                 <a:spcPct val="125000"/>
               </a:lnSpc>
               <a:spcAft>
-                <a:spcPts val="1200"/>
-              </a:spcAft>
-            </a:pPr>
-            <a:r>
-              <a:rPr sz="1600">
-                <a:solidFill>
-                  <a:srgbClr val="1B2A3A"/>
-                </a:solidFill>
-                <a:latin typeface="Calibri"/>
-                <a:ea typeface="游ゴシック"/>
-              </a:rPr>
-              <a:t>・注目度ではなく実利用を起点に測ると、既存の順位づけとは別のものが見えてくる</a:t>
-            </a:r>
-          </a:p>
-          <a:p>
-            <a:pPr>
-              <a:lnSpc>
-                <a:spcPct val="125000"/>
-              </a:lnSpc>
-              <a:spcAft>
-                <a:spcPts val="1200"/>
-              </a:spcAft>
-            </a:pPr>
-            <a:r>
-              <a:rPr sz="1600">
-                <a:solidFill>
-                  <a:srgbClr val="1B2A3A"/>
-                </a:solidFill>
-                <a:latin typeface="Calibri"/>
-                <a:ea typeface="游ゴシック"/>
-              </a:rPr>
-              <a:t>・指標は絶対値ではなく残差で作ると、数字の水増しに構造的に強くなる</a:t>
-            </a:r>
-          </a:p>
-          <a:p>
-            <a:pPr>
-              <a:lnSpc>
-                <a:spcPct val="125000"/>
-              </a:lnSpc>
-              <a:spcAft>
-                <a:spcPts val="1200"/>
-              </a:spcAft>
-            </a:pPr>
-            <a:r>
-              <a:rPr sz="1600">
-                <a:solidFill>
-                  <a:srgbClr val="1B2A3A"/>
-                </a:solidFill>
-                <a:latin typeface="Calibri"/>
-                <a:ea typeface="游ゴシック"/>
-              </a:rPr>
-              <a:t>・層を足す前に「どの規律を守るためか」を 1 行で言えるかを問う。言えないなら足さない</a:t>
-            </a:r>
-          </a:p>
-          <a:p>
-            <a:pPr>
-              <a:lnSpc>
-                <a:spcPct val="125000"/>
-              </a:lnSpc>
-              <a:spcAft>
-                <a:spcPts val="1200"/>
-              </a:spcAft>
-            </a:pPr>
-            <a:r>
-              <a:rPr sz="1600">
-                <a:solidFill>
-                  <a:srgbClr val="1B2A3A"/>
-                </a:solidFill>
-                <a:latin typeface="Calibri"/>
-                <a:ea typeface="游ゴシック"/>
-              </a:rPr>
-              <a:t>・作った機能を実測で殺せるように、判断の根拠と却下案を記録に残しておく</a:t>
-            </a:r>
-          </a:p>
-          <a:p>
-            <a:pPr>
-              <a:lnSpc>
-                <a:spcPct val="125000"/>
-              </a:lnSpc>
-              <a:spcAft>
-                <a:spcPts val="1200"/>
-              </a:spcAft>
-            </a:pPr>
-            <a:r>
-              <a:rPr sz="1600">
-                <a:solidFill>
-                  <a:srgbClr val="1B2A3A"/>
-                </a:solidFill>
-                <a:latin typeface="Calibri"/>
-                <a:ea typeface="游ゴシック"/>
-              </a:rPr>
-              <a:t>・どれも gem-hunter に固有ではなく、次に作るものにそのまま持ち込める</a:t>
+                <a:spcPts val="1050"/>
+              </a:spcAft>
+            </a:pPr>
+            <a:r>
+              <a:rPr sz="1400">
+                <a:solidFill>
+                  <a:srgbClr val="1B2A3A"/>
+                </a:solidFill>
+                <a:latin typeface="Calibri"/>
+                <a:ea typeface="游ゴシック"/>
+              </a:rPr>
+              <a:t>・最初は Fine-grained PAT で十分だと思っていた</a:t>
+            </a:r>
+          </a:p>
+          <a:p>
+            <a:pPr>
+              <a:lnSpc>
+                <a:spcPct val="125000"/>
+              </a:lnSpc>
+              <a:spcAft>
+                <a:spcPts val="1050"/>
+              </a:spcAft>
+            </a:pPr>
+            <a:r>
+              <a:rPr sz="1400">
+                <a:solidFill>
+                  <a:srgbClr val="1B2A3A"/>
+                </a:solidFill>
+                <a:latin typeface="Calibri"/>
+                <a:ea typeface="游ゴシック"/>
+              </a:rPr>
+              <a:t>・却下: PAT は有効期限の更新が人手に残る（定常運用ゼロという要件と噛み合わない）</a:t>
+            </a:r>
+          </a:p>
+          <a:p>
+            <a:pPr>
+              <a:lnSpc>
+                <a:spcPct val="125000"/>
+              </a:lnSpc>
+              <a:spcAft>
+                <a:spcPts val="1050"/>
+              </a:spcAft>
+            </a:pPr>
+            <a:r>
+              <a:rPr sz="1400">
+                <a:solidFill>
+                  <a:srgbClr val="1B2A3A"/>
+                </a:solidFill>
+                <a:latin typeface="Calibri"/>
+                <a:ea typeface="游ゴシック"/>
+              </a:rPr>
+              <a:t>・却下: 未認証のまま叩く（レート枠が狭く、利用者が増えるほど体感が落ちる）</a:t>
+            </a:r>
+          </a:p>
+          <a:p>
+            <a:pPr>
+              <a:lnSpc>
+                <a:spcPct val="125000"/>
+              </a:lnSpc>
+              <a:spcAft>
+                <a:spcPts val="1050"/>
+              </a:spcAft>
+            </a:pPr>
+            <a:r>
+              <a:rPr sz="1400">
+                <a:solidFill>
+                  <a:srgbClr val="1B2A3A"/>
+                </a:solidFill>
+                <a:latin typeface="Calibri"/>
+                <a:ea typeface="游ゴシック"/>
+              </a:rPr>
+              <a:t>・採用: GitHub App の installation token（JWT 署名 → token 取得 → 失効前まで再利用）</a:t>
+            </a:r>
+          </a:p>
+          <a:p>
+            <a:pPr>
+              <a:lnSpc>
+                <a:spcPct val="125000"/>
+              </a:lnSpc>
+              <a:spcAft>
+                <a:spcPts val="1050"/>
+              </a:spcAft>
+            </a:pPr>
+            <a:r>
+              <a:rPr sz="1400">
+                <a:solidFill>
+                  <a:srgbClr val="1B2A3A"/>
+                </a:solidFill>
+                <a:latin typeface="Calibri"/>
+                <a:ea typeface="游ゴシック"/>
+              </a:rPr>
+              <a:t>・軸 2「取得の往復コストを払えるか」と軸 4「実装コストを払えるか」が拒否権を持つ</a:t>
+            </a:r>
+          </a:p>
+          <a:p>
+            <a:pPr>
+              <a:lnSpc>
+                <a:spcPct val="125000"/>
+              </a:lnSpc>
+              <a:spcAft>
+                <a:spcPts val="1050"/>
+              </a:spcAft>
+            </a:pPr>
+            <a:r>
+              <a:rPr sz="1400">
+                <a:solidFill>
+                  <a:srgbClr val="1B2A3A"/>
+                </a:solidFill>
+                <a:latin typeface="Calibri"/>
+                <a:ea typeface="游ゴシック"/>
+              </a:rPr>
+              <a:t>・決め手は軸 3（有効期限の更新を人手でやらない）。レート枠の拡大は付随して得られた利点</a:t>
+            </a:r>
+          </a:p>
+          <a:p>
+            <a:pPr>
+              <a:lnSpc>
+                <a:spcPct val="125000"/>
+              </a:lnSpc>
+              <a:spcAft>
+                <a:spcPts val="1050"/>
+              </a:spcAft>
+            </a:pPr>
+            <a:r>
+              <a:rPr sz="1400">
+                <a:solidFill>
+                  <a:srgbClr val="1B2A3A"/>
+                </a:solidFill>
+                <a:latin typeface="Calibri"/>
+                <a:ea typeface="游ゴシック"/>
+              </a:rPr>
+              <a:t>・軸は「どれが効いたか」ではなく「どれが拒否権を持つか」で並べてある</a:t>
             </a:r>
           </a:p>
         </p:txBody>
@@ -6358,7 +6420,555 @@
                 <a:latin typeface="Calibri"/>
                 <a:ea typeface="游ゴシック"/>
               </a:rPr>
-              <a:t>・この画面がこの発表のゴール。ここに至るまでの判断をこれから話す</a:t>
+              <a:t>・カードに付く「Gem」の印と一覧への導線は次で扱う。この画面がこの発表のゴール</a:t>
+            </a:r>
+          </a:p>
+        </p:txBody>
+      </p:sp>
+    </p:spTree>
+  </p:cSld>
+  <p:clrMapOvr>
+    <a:masterClrMapping/>
+  </p:clrMapOvr>
+</p:sld>
+</file>
+
+<file path=ppt/slides/slide20.xml><?xml version="1.0" encoding="utf-8"?>
+<p:sld xmlns:a="http://schemas.openxmlformats.org/drawingml/2006/main" xmlns:p="http://schemas.openxmlformats.org/presentationml/2006/main" xmlns:r="http://schemas.openxmlformats.org/officeDocument/2006/relationships">
+  <p:cSld>
+    <p:bg>
+      <p:bgPr>
+        <a:solidFill>
+          <a:srgbClr val="FAF6EC"/>
+        </a:solidFill>
+        <a:effectLst/>
+      </p:bgPr>
+    </p:bg>
+    <p:spTree>
+      <p:nvGrpSpPr>
+        <p:cNvPr id="1" name=""/>
+        <p:cNvGrpSpPr/>
+        <p:nvPr/>
+      </p:nvGrpSpPr>
+      <p:grpSpPr/>
+      <p:sp>
+        <p:nvSpPr>
+          <p:cNvPr id="2" name="Rectangle 1"/>
+          <p:cNvSpPr/>
+          <p:nvPr/>
+        </p:nvSpPr>
+        <p:spPr>
+          <a:xfrm>
+            <a:off x="0" y="0"/>
+            <a:ext cx="12132000" cy="1008000"/>
+          </a:xfrm>
+          <a:prstGeom prst="rect">
+            <a:avLst/>
+          </a:prstGeom>
+          <a:solidFill>
+            <a:srgbClr val="14364F"/>
+          </a:solidFill>
+          <a:ln>
+            <a:noFill/>
+          </a:ln>
+        </p:spPr>
+        <p:style>
+          <a:lnRef idx="1">
+            <a:schemeClr val="accent1"/>
+          </a:lnRef>
+          <a:fillRef idx="3">
+            <a:schemeClr val="accent1"/>
+          </a:fillRef>
+          <a:effectRef idx="2">
+            <a:schemeClr val="accent1"/>
+          </a:effectRef>
+          <a:fontRef idx="minor">
+            <a:schemeClr val="lt1"/>
+          </a:fontRef>
+        </p:style>
+        <p:txBody>
+          <a:bodyPr rtlCol="0" anchor="ctr" wrap="none"/>
+          <a:lstStyle/>
+          <a:p>
+            <a:pPr algn="l"/>
+            <a:r>
+              <a:rPr sz="1800" b="1">
+                <a:solidFill>
+                  <a:srgbClr val="FFFFFF"/>
+                </a:solidFill>
+                <a:latin typeface="Calibri"/>
+                <a:ea typeface="游ゴシック"/>
+              </a:rPr>
+              <a:t>Web アプリだが、DB を 1 つも持たない</a:t>
+            </a:r>
+          </a:p>
+        </p:txBody>
+      </p:sp>
+      <p:sp>
+        <p:nvSpPr>
+          <p:cNvPr id="3" name="Rectangle 2"/>
+          <p:cNvSpPr/>
+          <p:nvPr/>
+        </p:nvSpPr>
+        <p:spPr>
+          <a:xfrm>
+            <a:off x="612000" y="1368000"/>
+            <a:ext cx="10908000" cy="5292000"/>
+          </a:xfrm>
+          <a:prstGeom prst="rect">
+            <a:avLst/>
+          </a:prstGeom>
+          <a:solidFill>
+            <a:srgbClr val="FFFFFF"/>
+          </a:solidFill>
+          <a:ln w="6350">
+            <a:solidFill>
+              <a:srgbClr val="E2E8F0"/>
+            </a:solidFill>
+          </a:ln>
+          <a:effectLst>
+            <a:outerShdw blurRad="101600" dist="38100" dir="8100000">
+              <a:srgbClr val="000000">
+                <a:alpha val="10000"/>
+              </a:srgbClr>
+            </a:outerShdw>
+          </a:effectLst>
+        </p:spPr>
+        <p:style>
+          <a:lnRef idx="1">
+            <a:schemeClr val="accent1"/>
+          </a:lnRef>
+          <a:fillRef idx="3">
+            <a:schemeClr val="accent1"/>
+          </a:fillRef>
+          <a:effectRef idx="2">
+            <a:schemeClr val="accent1"/>
+          </a:effectRef>
+          <a:fontRef idx="minor">
+            <a:schemeClr val="lt1"/>
+          </a:fontRef>
+        </p:style>
+        <p:txBody>
+          <a:bodyPr rtlCol="0" anchor="ctr"/>
+          <a:lstStyle/>
+          <a:p>
+            <a:pPr algn="ctr"/>
+          </a:p>
+        </p:txBody>
+      </p:sp>
+      <p:sp>
+        <p:nvSpPr>
+          <p:cNvPr id="4" name="TextBox 3"/>
+          <p:cNvSpPr txBox="1"/>
+          <p:nvPr/>
+        </p:nvSpPr>
+        <p:spPr>
+          <a:xfrm>
+            <a:off x="900000" y="1656000"/>
+            <a:ext cx="10332000" cy="4716000"/>
+          </a:xfrm>
+          <a:prstGeom prst="rect">
+            <a:avLst/>
+          </a:prstGeom>
+          <a:noFill/>
+        </p:spPr>
+        <p:txBody>
+          <a:bodyPr wrap="square" anchor="ctr">
+            <a:spAutoFit/>
+          </a:bodyPr>
+          <a:lstStyle/>
+          <a:p>
+            <a:pPr>
+              <a:lnSpc>
+                <a:spcPct val="125000"/>
+              </a:lnSpc>
+              <a:spcAft>
+                <a:spcPts val="1050"/>
+              </a:spcAft>
+            </a:pPr>
+            <a:r>
+              <a:rPr sz="1400">
+                <a:solidFill>
+                  <a:srgbClr val="1B2A3A"/>
+                </a:solidFill>
+                <a:latin typeface="Calibri"/>
+                <a:ea typeface="游ゴシック"/>
+              </a:rPr>
+              <a:t>・却下: 自前 ETL + DB（単一開発者 + AI の運用では定常運用コストが見合わない）</a:t>
+            </a:r>
+          </a:p>
+          <a:p>
+            <a:pPr>
+              <a:lnSpc>
+                <a:spcPct val="125000"/>
+              </a:lnSpc>
+              <a:spcAft>
+                <a:spcPts val="1050"/>
+              </a:spcAft>
+            </a:pPr>
+            <a:r>
+              <a:rPr sz="1400">
+                <a:solidFill>
+                  <a:srgbClr val="1B2A3A"/>
+                </a:solidFill>
+                <a:latin typeface="Calibri"/>
+                <a:ea typeface="游ゴシック"/>
+              </a:rPr>
+              <a:t>・却下: お気に入りをサーバーに保存（端末間同期の利便性より DB レス原則を優先した）</a:t>
+            </a:r>
+          </a:p>
+          <a:p>
+            <a:pPr>
+              <a:lnSpc>
+                <a:spcPct val="125000"/>
+              </a:lnSpc>
+              <a:spcAft>
+                <a:spcPts val="1050"/>
+              </a:spcAft>
+            </a:pPr>
+            <a:r>
+              <a:rPr sz="1400">
+                <a:solidFill>
+                  <a:srgbClr val="1B2A3A"/>
+                </a:solidFill>
+                <a:latin typeface="Calibri"/>
+                <a:ea typeface="游ゴシック"/>
+              </a:rPr>
+              <a:t>・採用: 検索状態は URL に、ロケールはパスに置く</a:t>
+            </a:r>
+          </a:p>
+          <a:p>
+            <a:pPr>
+              <a:lnSpc>
+                <a:spcPct val="125000"/>
+              </a:lnSpc>
+              <a:spcAft>
+                <a:spcPts val="1050"/>
+              </a:spcAft>
+            </a:pPr>
+            <a:r>
+              <a:rPr sz="1400">
+                <a:solidFill>
+                  <a:srgbClr val="1B2A3A"/>
+                </a:solidFill>
+                <a:latin typeface="Calibri"/>
+                <a:ea typeface="游ゴシック"/>
+              </a:rPr>
+              <a:t>・採用: セッションは暗号化 httpOnly Cookie、お気に入りは localStorage に置く</a:t>
+            </a:r>
+          </a:p>
+          <a:p>
+            <a:pPr>
+              <a:lnSpc>
+                <a:spcPct val="125000"/>
+              </a:lnSpc>
+              <a:spcAft>
+                <a:spcPts val="1050"/>
+              </a:spcAft>
+            </a:pPr>
+            <a:r>
+              <a:rPr sz="1400">
+                <a:solidFill>
+                  <a:srgbClr val="1B2A3A"/>
+                </a:solidFill>
+                <a:latin typeface="Calibri"/>
+                <a:ea typeface="游ゴシック"/>
+              </a:rPr>
+              <a:t>・採用: Gem のデータも日次バッチが作る静的 JSON で、サーバー側に状態を持たない点は他と同じ</a:t>
+            </a:r>
+          </a:p>
+          <a:p>
+            <a:pPr>
+              <a:lnSpc>
+                <a:spcPct val="125000"/>
+              </a:lnSpc>
+              <a:spcAft>
+                <a:spcPts val="1050"/>
+              </a:spcAft>
+            </a:pPr>
+            <a:r>
+              <a:rPr sz="1400">
+                <a:solidFill>
+                  <a:srgbClr val="1B2A3A"/>
+                </a:solidFill>
+                <a:latin typeface="Calibri"/>
+                <a:ea typeface="游ゴシック"/>
+              </a:rPr>
+              <a:t>・唯一の例外が CachePort（アーキテクチャで触れた TTL 付きキャッシュ層のインターフェース）</a:t>
+            </a:r>
+          </a:p>
+          <a:p>
+            <a:pPr>
+              <a:lnSpc>
+                <a:spcPct val="125000"/>
+              </a:lnSpc>
+              <a:spcAft>
+                <a:spcPts val="1050"/>
+              </a:spcAft>
+            </a:pPr>
+            <a:r>
+              <a:rPr sz="1400">
+                <a:solidFill>
+                  <a:srgbClr val="1B2A3A"/>
+                </a:solidFill>
+                <a:latin typeface="Calibri"/>
+                <a:ea typeface="游ゴシック"/>
+              </a:rPr>
+              <a:t>・DB を持たないのでバックアップもマイグレーションも消えた。代わりに状態は端末に閉じる</a:t>
+            </a:r>
+          </a:p>
+        </p:txBody>
+      </p:sp>
+    </p:spTree>
+  </p:cSld>
+  <p:clrMapOvr>
+    <a:masterClrMapping/>
+  </p:clrMapOvr>
+</p:sld>
+</file>
+
+<file path=ppt/slides/slide21.xml><?xml version="1.0" encoding="utf-8"?>
+<p:sld xmlns:a="http://schemas.openxmlformats.org/drawingml/2006/main" xmlns:p="http://schemas.openxmlformats.org/presentationml/2006/main" xmlns:r="http://schemas.openxmlformats.org/officeDocument/2006/relationships">
+  <p:cSld>
+    <p:bg>
+      <p:bgPr>
+        <a:solidFill>
+          <a:srgbClr val="FAF6EC"/>
+        </a:solidFill>
+        <a:effectLst/>
+      </p:bgPr>
+    </p:bg>
+    <p:spTree>
+      <p:nvGrpSpPr>
+        <p:cNvPr id="1" name=""/>
+        <p:cNvGrpSpPr/>
+        <p:nvPr/>
+      </p:nvGrpSpPr>
+      <p:grpSpPr/>
+      <p:sp>
+        <p:nvSpPr>
+          <p:cNvPr id="2" name="Rectangle 1"/>
+          <p:cNvSpPr/>
+          <p:nvPr/>
+        </p:nvSpPr>
+        <p:spPr>
+          <a:xfrm>
+            <a:off x="0" y="0"/>
+            <a:ext cx="12132000" cy="1008000"/>
+          </a:xfrm>
+          <a:prstGeom prst="rect">
+            <a:avLst/>
+          </a:prstGeom>
+          <a:solidFill>
+            <a:srgbClr val="14364F"/>
+          </a:solidFill>
+          <a:ln>
+            <a:noFill/>
+          </a:ln>
+        </p:spPr>
+        <p:style>
+          <a:lnRef idx="1">
+            <a:schemeClr val="accent1"/>
+          </a:lnRef>
+          <a:fillRef idx="3">
+            <a:schemeClr val="accent1"/>
+          </a:fillRef>
+          <a:effectRef idx="2">
+            <a:schemeClr val="accent1"/>
+          </a:effectRef>
+          <a:fontRef idx="minor">
+            <a:schemeClr val="lt1"/>
+          </a:fontRef>
+        </p:style>
+        <p:txBody>
+          <a:bodyPr rtlCol="0" anchor="ctr" wrap="none"/>
+          <a:lstStyle/>
+          <a:p>
+            <a:pPr algn="l"/>
+            <a:r>
+              <a:rPr sz="1800" b="1">
+                <a:solidFill>
+                  <a:srgbClr val="FFFFFF"/>
+                </a:solidFill>
+                <a:latin typeface="Calibri"/>
+                <a:ea typeface="游ゴシック"/>
+              </a:rPr>
+              <a:t>持ち帰れる 4 つの考え方</a:t>
+            </a:r>
+          </a:p>
+        </p:txBody>
+      </p:sp>
+      <p:sp>
+        <p:nvSpPr>
+          <p:cNvPr id="3" name="Rectangle 2"/>
+          <p:cNvSpPr/>
+          <p:nvPr/>
+        </p:nvSpPr>
+        <p:spPr>
+          <a:xfrm>
+            <a:off x="612000" y="1368000"/>
+            <a:ext cx="10908000" cy="5292000"/>
+          </a:xfrm>
+          <a:prstGeom prst="rect">
+            <a:avLst/>
+          </a:prstGeom>
+          <a:solidFill>
+            <a:srgbClr val="FFFFFF"/>
+          </a:solidFill>
+          <a:ln w="6350">
+            <a:solidFill>
+              <a:srgbClr val="E2E8F0"/>
+            </a:solidFill>
+          </a:ln>
+          <a:effectLst>
+            <a:outerShdw blurRad="101600" dist="38100" dir="8100000">
+              <a:srgbClr val="000000">
+                <a:alpha val="10000"/>
+              </a:srgbClr>
+            </a:outerShdw>
+          </a:effectLst>
+        </p:spPr>
+        <p:style>
+          <a:lnRef idx="1">
+            <a:schemeClr val="accent1"/>
+          </a:lnRef>
+          <a:fillRef idx="3">
+            <a:schemeClr val="accent1"/>
+          </a:fillRef>
+          <a:effectRef idx="2">
+            <a:schemeClr val="accent1"/>
+          </a:effectRef>
+          <a:fontRef idx="minor">
+            <a:schemeClr val="lt1"/>
+          </a:fontRef>
+        </p:style>
+        <p:txBody>
+          <a:bodyPr rtlCol="0" anchor="ctr"/>
+          <a:lstStyle/>
+          <a:p>
+            <a:pPr algn="ctr"/>
+          </a:p>
+        </p:txBody>
+      </p:sp>
+      <p:sp>
+        <p:nvSpPr>
+          <p:cNvPr id="4" name="TextBox 3"/>
+          <p:cNvSpPr txBox="1"/>
+          <p:nvPr/>
+        </p:nvSpPr>
+        <p:spPr>
+          <a:xfrm>
+            <a:off x="900000" y="1656000"/>
+            <a:ext cx="10332000" cy="4716000"/>
+          </a:xfrm>
+          <a:prstGeom prst="rect">
+            <a:avLst/>
+          </a:prstGeom>
+          <a:noFill/>
+        </p:spPr>
+        <p:txBody>
+          <a:bodyPr wrap="square" anchor="ctr">
+            <a:spAutoFit/>
+          </a:bodyPr>
+          <a:lstStyle/>
+          <a:p>
+            <a:pPr>
+              <a:lnSpc>
+                <a:spcPct val="125000"/>
+              </a:lnSpc>
+              <a:spcAft>
+                <a:spcPts val="1200"/>
+              </a:spcAft>
+            </a:pPr>
+            <a:r>
+              <a:rPr sz="1600">
+                <a:solidFill>
+                  <a:srgbClr val="1B2A3A"/>
+                </a:solidFill>
+                <a:latin typeface="Calibri"/>
+                <a:ea typeface="游ゴシック"/>
+              </a:rPr>
+              <a:t>・注目度ではなく実利用を起点に測ると、同じ対象でも既存の順位づけとは違うものが見えてくる</a:t>
+            </a:r>
+          </a:p>
+          <a:p>
+            <a:pPr>
+              <a:lnSpc>
+                <a:spcPct val="125000"/>
+              </a:lnSpc>
+              <a:spcAft>
+                <a:spcPts val="1200"/>
+              </a:spcAft>
+            </a:pPr>
+            <a:r>
+              <a:rPr sz="1600">
+                <a:solidFill>
+                  <a:srgbClr val="1B2A3A"/>
+                </a:solidFill>
+                <a:latin typeface="Calibri"/>
+                <a:ea typeface="游ゴシック"/>
+              </a:rPr>
+              <a:t>・指標は絶対値ではなく順位の残差で作ると、数字を水増しされても構造的に崩れにくい</a:t>
+            </a:r>
+          </a:p>
+          <a:p>
+            <a:pPr>
+              <a:lnSpc>
+                <a:spcPct val="125000"/>
+              </a:lnSpc>
+              <a:spcAft>
+                <a:spcPts val="1200"/>
+              </a:spcAft>
+            </a:pPr>
+            <a:r>
+              <a:rPr sz="1600">
+                <a:solidFill>
+                  <a:srgbClr val="1B2A3A"/>
+                </a:solidFill>
+                <a:latin typeface="Calibri"/>
+                <a:ea typeface="游ゴシック"/>
+              </a:rPr>
+              <a:t>・層を足す前に「どの規律を守るためか」を 1 行で言えるかを問う。言えないなら足さない</a:t>
+            </a:r>
+          </a:p>
+          <a:p>
+            <a:pPr>
+              <a:lnSpc>
+                <a:spcPct val="125000"/>
+              </a:lnSpc>
+              <a:spcAft>
+                <a:spcPts val="1200"/>
+              </a:spcAft>
+            </a:pPr>
+            <a:r>
+              <a:rPr sz="1600">
+                <a:solidFill>
+                  <a:srgbClr val="1B2A3A"/>
+                </a:solidFill>
+                <a:latin typeface="Calibri"/>
+                <a:ea typeface="游ゴシック"/>
+              </a:rPr>
+              <a:t>・判断の根拠と却下案を残しておくと、前提が変わったときに測り直して、戻すこともできる</a:t>
+            </a:r>
+          </a:p>
+          <a:p>
+            <a:pPr>
+              <a:lnSpc>
+                <a:spcPct val="125000"/>
+              </a:lnSpc>
+              <a:spcAft>
+                <a:spcPts val="1200"/>
+              </a:spcAft>
+            </a:pPr>
+            <a:r>
+              <a:rPr sz="1600">
+                <a:solidFill>
+                  <a:srgbClr val="1B2A3A"/>
+                </a:solidFill>
+                <a:latin typeface="Calibri"/>
+                <a:ea typeface="游ゴシック"/>
+              </a:rPr>
+              <a:t>・どれも gem-hunter に固有ではなく、次に作るものにそのまま持ち込める</a:t>
             </a:r>
           </a:p>
         </p:txBody>
@@ -6437,7 +7047,7 @@
                 <a:latin typeface="Calibri"/>
                 <a:ea typeface="游ゴシック"/>
               </a:rPr>
-              <a:t>検索しなくても、その日の Gem が並ぶ</a:t>
+              <a:t>検索語をそのまま、Gem だけの一覧へ</a:t>
             </a:r>
           </a:p>
         </p:txBody>
@@ -6521,118 +7131,138 @@
                 <a:spcPct val="125000"/>
               </a:lnSpc>
               <a:spcAft>
-                <a:spcPts val="1125"/>
-              </a:spcAft>
-            </a:pPr>
-            <a:r>
-              <a:rPr sz="1500">
-                <a:solidFill>
-                  <a:srgbClr val="1B2A3A"/>
-                </a:solidFill>
-                <a:latin typeface="Calibri"/>
-                <a:ea typeface="游ゴシック"/>
-              </a:rPr>
-              <a:t>・トップページの「今日の Gem」は、キーワードを 1 文字も入れなくても 5 件並ぶ</a:t>
-            </a:r>
-          </a:p>
-          <a:p>
-            <a:pPr>
-              <a:lnSpc>
-                <a:spcPct val="125000"/>
-              </a:lnSpc>
-              <a:spcAft>
-                <a:spcPts val="1125"/>
-              </a:spcAft>
-            </a:pPr>
-            <a:r>
-              <a:rPr sz="1500">
-                <a:solidFill>
-                  <a:srgbClr val="1B2A3A"/>
-                </a:solidFill>
-                <a:latin typeface="Calibri"/>
-                <a:ea typeface="游ゴシック"/>
-              </a:rPr>
-              <a:t>・並びは日付をシードにした決定論的な選び方で、同じ日なら誰が見ても同じ顔ぶれになる</a:t>
-            </a:r>
-          </a:p>
-          <a:p>
-            <a:pPr>
-              <a:lnSpc>
-                <a:spcPct val="125000"/>
-              </a:lnSpc>
-              <a:spcAft>
-                <a:spcPts val="1125"/>
-              </a:spcAft>
-            </a:pPr>
-            <a:r>
-              <a:rPr sz="1500">
-                <a:solidFill>
-                  <a:srgbClr val="1B2A3A"/>
-                </a:solidFill>
-                <a:latin typeface="Calibri"/>
-                <a:ea typeface="游ゴシック"/>
-              </a:rPr>
-              <a:t>・?date=YYYYMMDD を付ければ過去日を再現でき、翌日を待たずに入れ替わりを確認できる</a:t>
-            </a:r>
-          </a:p>
-          <a:p>
-            <a:pPr>
-              <a:lnSpc>
-                <a:spcPct val="125000"/>
-              </a:lnSpc>
-              <a:spcAft>
-                <a:spcPts val="1125"/>
-              </a:spcAft>
-            </a:pPr>
-            <a:r>
-              <a:rPr sz="1500">
-                <a:solidFill>
-                  <a:srgbClr val="1B2A3A"/>
-                </a:solidFill>
-                <a:latin typeface="Calibri"/>
-                <a:ea typeface="游ゴシック"/>
-              </a:rPr>
-              <a:t>・利用パッケージ数と star 数を併記し、出典（Ecosyste.ms・CC BY-SA 4.0）と鮮度も出す</a:t>
-            </a:r>
-          </a:p>
-          <a:p>
-            <a:pPr>
-              <a:lnSpc>
-                <a:spcPct val="125000"/>
-              </a:lnSpc>
-              <a:spcAft>
-                <a:spcPts val="1125"/>
-              </a:spcAft>
-            </a:pPr>
-            <a:r>
-              <a:rPr sz="1500">
-                <a:solidFill>
-                  <a:srgbClr val="1B2A3A"/>
-                </a:solidFill>
-                <a:latin typeface="Calibri"/>
-                <a:ea typeface="游ゴシック"/>
-              </a:rPr>
-              <a:t>・この並びに使う指標が Gem Index（被依存数と star の順位差。定義は後半で扱う）</a:t>
-            </a:r>
-          </a:p>
-          <a:p>
-            <a:pPr>
-              <a:lnSpc>
-                <a:spcPct val="125000"/>
-              </a:lnSpc>
-              <a:spcAft>
-                <a:spcPts val="1125"/>
-              </a:spcAft>
-            </a:pPr>
-            <a:r>
-              <a:rPr sz="1500">
-                <a:solidFill>
-                  <a:srgbClr val="1B2A3A"/>
-                </a:solidFill>
-                <a:latin typeface="Calibri"/>
-                <a:ea typeface="游ゴシック"/>
-              </a:rPr>
-              <a:t>・Gem Index を使うのはこのダイジェストだけで、検索結果の並び順には効かない</a:t>
+                <a:spcPts val="1050"/>
+              </a:spcAft>
+            </a:pPr>
+            <a:r>
+              <a:rPr sz="1400">
+                <a:solidFill>
+                  <a:srgbClr val="1B2A3A"/>
+                </a:solidFill>
+                <a:latin typeface="Calibri"/>
+                <a:ea typeface="游ゴシック"/>
+              </a:rPr>
+              <a:t>・検索結果のカードには、star 数のわりに多くのパッケージから使われている候補に「Gem」の印が付く</a:t>
+            </a:r>
+          </a:p>
+          <a:p>
+            <a:pPr>
+              <a:lnSpc>
+                <a:spcPct val="125000"/>
+              </a:lnSpc>
+              <a:spcAft>
+                <a:spcPts val="1050"/>
+              </a:spcAft>
+            </a:pPr>
+            <a:r>
+              <a:rPr sz="1400">
+                <a:solidFill>
+                  <a:srgbClr val="1B2A3A"/>
+                </a:solidFill>
+                <a:latin typeface="Calibri"/>
+                <a:ea typeface="游ゴシック"/>
+              </a:rPr>
+              <a:t>・印が付いた候補だけを見たくなったら、検索結果の上の導線から Gem 一覧へ移れる</a:t>
+            </a:r>
+          </a:p>
+          <a:p>
+            <a:pPr>
+              <a:lnSpc>
+                <a:spcPct val="125000"/>
+              </a:lnSpc>
+              <a:spcAft>
+                <a:spcPts val="1050"/>
+              </a:spcAft>
+            </a:pPr>
+            <a:r>
+              <a:rPr sz="1400">
+                <a:solidFill>
+                  <a:srgbClr val="1B2A3A"/>
+                </a:solidFill>
+                <a:latin typeface="Calibri"/>
+                <a:ea typeface="游ゴシック"/>
+              </a:rPr>
+              <a:t>・一覧は検索語を引き継ぎ、過小評価が強い順（Gem Index が小さい順）に 20 件ずつ並ぶ</a:t>
+            </a:r>
+          </a:p>
+          <a:p>
+            <a:pPr>
+              <a:lnSpc>
+                <a:spcPct val="125000"/>
+              </a:lnSpc>
+              <a:spcAft>
+                <a:spcPts val="1050"/>
+              </a:spcAft>
+            </a:pPr>
+            <a:r>
+              <a:rPr sz="1400">
+                <a:solidFill>
+                  <a:srgbClr val="1B2A3A"/>
+                </a:solidFill>
+                <a:latin typeface="Calibri"/>
+                <a:ea typeface="游ゴシック"/>
+              </a:rPr>
+              <a:t>・検索結果そのものの並び順は変えない。順位づけをするのはこの一覧の中だけ</a:t>
+            </a:r>
+          </a:p>
+          <a:p>
+            <a:pPr>
+              <a:lnSpc>
+                <a:spcPct val="125000"/>
+              </a:lnSpc>
+              <a:spcAft>
+                <a:spcPts val="1050"/>
+              </a:spcAft>
+            </a:pPr>
+            <a:r>
+              <a:rPr sz="1400">
+                <a:solidFill>
+                  <a:srgbClr val="1B2A3A"/>
+                </a:solidFill>
+                <a:latin typeface="Calibri"/>
+                <a:ea typeface="游ゴシック"/>
+              </a:rPr>
+              <a:t>・絞り込みはリポジトリ名とパッケージ名を語の区切りで照合し、0 件のときだけ 1 語に緩める</a:t>
+            </a:r>
+          </a:p>
+          <a:p>
+            <a:pPr>
+              <a:lnSpc>
+                <a:spcPct val="125000"/>
+              </a:lnSpc>
+              <a:spcAft>
+                <a:spcPts val="1050"/>
+              </a:spcAft>
+            </a:pPr>
+            <a:r>
+              <a:rPr sz="1400">
+                <a:solidFill>
+                  <a:srgbClr val="1B2A3A"/>
+                </a:solidFill>
+                <a:latin typeface="Calibri"/>
+                <a:ea typeface="游ゴシック"/>
+              </a:rPr>
+              <a:t>・検索結果で印が付いた候補は一覧側へそのまま引き渡すので、印と一覧で判定基準がずれない</a:t>
+            </a:r>
+          </a:p>
+          <a:p>
+            <a:pPr>
+              <a:lnSpc>
+                <a:spcPct val="125000"/>
+              </a:lnSpc>
+              <a:spcAft>
+                <a:spcPts val="1050"/>
+              </a:spcAft>
+            </a:pPr>
+            <a:r>
+              <a:rPr sz="1400">
+                <a:solidFill>
+                  <a:srgbClr val="1B2A3A"/>
+                </a:solidFill>
+                <a:latin typeface="Calibri"/>
+                <a:ea typeface="游ゴシック"/>
+              </a:rPr>
+              <a:t>・印が付かないことは評価が低いことを意味しない、と画面にも明記している</a:t>
             </a:r>
           </a:p>
         </p:txBody>
@@ -6711,7 +7341,7 @@
                 <a:latin typeface="Calibri"/>
                 <a:ea typeface="游ゴシック"/>
               </a:rPr>
-              <a:t>star の多さは、使われている証拠ではない</a:t>
+              <a:t>検索しなくても、その日の Gem が並ぶ</a:t>
             </a:r>
           </a:p>
         </p:txBody>
@@ -6795,118 +7425,98 @@
                 <a:spcPct val="125000"/>
               </a:lnSpc>
               <a:spcAft>
-                <a:spcPts val="1125"/>
-              </a:spcAft>
-            </a:pPr>
-            <a:r>
-              <a:rPr sz="1500">
-                <a:solidFill>
-                  <a:srgbClr val="1B2A3A"/>
-                </a:solidFill>
-                <a:latin typeface="Calibri"/>
-                <a:ea typeface="游ゴシック"/>
-              </a:rPr>
-              <a:t>・出発点は「自分が使うライブラリを選ぶとき、star 以外に判断材料がない」という不便だった</a:t>
-            </a:r>
-          </a:p>
-          <a:p>
-            <a:pPr>
-              <a:lnSpc>
-                <a:spcPct val="125000"/>
-              </a:lnSpc>
-              <a:spcAft>
-                <a:spcPts val="1125"/>
-              </a:spcAft>
-            </a:pPr>
-            <a:r>
-              <a:rPr sz="1500">
-                <a:solidFill>
-                  <a:srgbClr val="1B2A3A"/>
-                </a:solidFill>
-                <a:latin typeface="Calibri"/>
-                <a:ea typeface="游ゴシック"/>
-              </a:rPr>
-              <a:t>・star は「後で読む」ブックマーク代わりにも押されるので、利用実績とは意味が違う</a:t>
-            </a:r>
-          </a:p>
-          <a:p>
-            <a:pPr>
-              <a:lnSpc>
-                <a:spcPct val="125000"/>
-              </a:lnSpc>
-              <a:spcAft>
-                <a:spcPts val="1125"/>
-              </a:spcAft>
-            </a:pPr>
-            <a:r>
-              <a:rPr sz="1500">
-                <a:solidFill>
-                  <a:srgbClr val="1B2A3A"/>
-                </a:solidFill>
-                <a:latin typeface="Calibri"/>
-                <a:ea typeface="游ゴシック"/>
-              </a:rPr>
-              <a:t>・約 600 万個の偽 star が観測されている（He et al., ICSE 2026）</a:t>
-            </a:r>
-          </a:p>
-          <a:p>
-            <a:pPr>
-              <a:lnSpc>
-                <a:spcPct val="125000"/>
-              </a:lnSpc>
-              <a:spcAft>
-                <a:spcPts val="1125"/>
-              </a:spcAft>
-            </a:pPr>
-            <a:r>
-              <a:rPr sz="1500">
-                <a:solidFill>
-                  <a:srgbClr val="1B2A3A"/>
-                </a:solidFill>
-                <a:latin typeface="Calibri"/>
-                <a:ea typeface="游ゴシック"/>
-              </a:rPr>
-              <a:t>・debug_inspector は 25 star で 111,000 以上のプロジェクトから依存されている</a:t>
-            </a:r>
-          </a:p>
-          <a:p>
-            <a:pPr>
-              <a:lnSpc>
-                <a:spcPct val="125000"/>
-              </a:lnSpc>
-              <a:spcAft>
-                <a:spcPts val="1125"/>
-              </a:spcAft>
-            </a:pPr>
-            <a:r>
-              <a:rPr sz="1500">
-                <a:solidFill>
-                  <a:srgbClr val="1B2A3A"/>
-                </a:solidFill>
-                <a:latin typeface="Calibri"/>
-                <a:ea typeface="游ゴシック"/>
-              </a:rPr>
-              <a:t>・被依存数なら実際に組み込まれた回数を近似できるが、それだけで並べると有名どころが上位を占める</a:t>
-            </a:r>
-          </a:p>
-          <a:p>
-            <a:pPr>
-              <a:lnSpc>
-                <a:spcPct val="125000"/>
-              </a:lnSpc>
-              <a:spcAft>
-                <a:spcPts val="1125"/>
-              </a:spcAft>
-            </a:pPr>
-            <a:r>
-              <a:rPr sz="1500">
-                <a:solidFill>
-                  <a:srgbClr val="1B2A3A"/>
-                </a:solidFill>
-                <a:latin typeface="Calibri"/>
-                <a:ea typeface="游ゴシック"/>
-              </a:rPr>
-              <a:t>・だから「実利用のわりに注目されていないもの」を測る指標が要る、というのが最初の仮説</a:t>
+                <a:spcPts val="1200"/>
+              </a:spcAft>
+            </a:pPr>
+            <a:r>
+              <a:rPr sz="1600">
+                <a:solidFill>
+                  <a:srgbClr val="1B2A3A"/>
+                </a:solidFill>
+                <a:latin typeface="Calibri"/>
+                <a:ea typeface="游ゴシック"/>
+              </a:rPr>
+              <a:t>・トップページの「今日の Gem」は、キーワードを 1 文字も入れなくても 5 件並ぶ</a:t>
+            </a:r>
+          </a:p>
+          <a:p>
+            <a:pPr>
+              <a:lnSpc>
+                <a:spcPct val="125000"/>
+              </a:lnSpc>
+              <a:spcAft>
+                <a:spcPts val="1200"/>
+              </a:spcAft>
+            </a:pPr>
+            <a:r>
+              <a:rPr sz="1600">
+                <a:solidFill>
+                  <a:srgbClr val="1B2A3A"/>
+                </a:solidFill>
+                <a:latin typeface="Calibri"/>
+                <a:ea typeface="游ゴシック"/>
+              </a:rPr>
+              <a:t>・並びは日付をシードにした決定論的な選び方で、同じ日なら誰が見ても同じ顔ぶれになる</a:t>
+            </a:r>
+          </a:p>
+          <a:p>
+            <a:pPr>
+              <a:lnSpc>
+                <a:spcPct val="125000"/>
+              </a:lnSpc>
+              <a:spcAft>
+                <a:spcPts val="1200"/>
+              </a:spcAft>
+            </a:pPr>
+            <a:r>
+              <a:rPr sz="1600">
+                <a:solidFill>
+                  <a:srgbClr val="1B2A3A"/>
+                </a:solidFill>
+                <a:latin typeface="Calibri"/>
+                <a:ea typeface="游ゴシック"/>
+              </a:rPr>
+              <a:t>・?date=YYYYMMDD を付ければ過去日を再現でき、翌日を待たずに入れ替わりを確認できる</a:t>
+            </a:r>
+          </a:p>
+          <a:p>
+            <a:pPr>
+              <a:lnSpc>
+                <a:spcPct val="125000"/>
+              </a:lnSpc>
+              <a:spcAft>
+                <a:spcPts val="1200"/>
+              </a:spcAft>
+            </a:pPr>
+            <a:r>
+              <a:rPr sz="1600">
+                <a:solidFill>
+                  <a:srgbClr val="1B2A3A"/>
+                </a:solidFill>
+                <a:latin typeface="Calibri"/>
+                <a:ea typeface="游ゴシック"/>
+              </a:rPr>
+              <a:t>・利用パッケージ数と star 数を併記し、出典（Ecosyste.ms・CC BY-SA 4.0）と鮮度も出す</a:t>
+            </a:r>
+          </a:p>
+          <a:p>
+            <a:pPr>
+              <a:lnSpc>
+                <a:spcPct val="125000"/>
+              </a:lnSpc>
+              <a:spcAft>
+                <a:spcPts val="1200"/>
+              </a:spcAft>
+            </a:pPr>
+            <a:r>
+              <a:rPr sz="1600">
+                <a:solidFill>
+                  <a:srgbClr val="1B2A3A"/>
+                </a:solidFill>
+                <a:latin typeface="Calibri"/>
+                <a:ea typeface="游ゴシック"/>
+              </a:rPr>
+              <a:t>・この並びにも、前の画面で印を付けたのと同じ Gem Index を使っている</a:t>
             </a:r>
           </a:p>
         </p:txBody>
@@ -6985,7 +7595,7 @@
                 <a:latin typeface="Calibri"/>
                 <a:ea typeface="游ゴシック"/>
               </a:rPr>
-              <a:t>構想を、辿れるドキュメントに分解した</a:t>
+              <a:t>star の多さは、使われている証拠ではない</a:t>
             </a:r>
           </a:p>
         </p:txBody>
@@ -7080,7 +7690,7 @@
                 <a:latin typeface="Calibri"/>
                 <a:ea typeface="游ゴシック"/>
               </a:rPr>
-              <a:t>・初期コンセプト（IndieGems 構想）が先にあり、外部から与えられた要件でスコープを絞り直した</a:t>
+              <a:t>・出発点は「自分が使うライブラリを選ぶとき、star 以外に判断材料がない」という不便だった</a:t>
             </a:r>
           </a:p>
           <a:p>
@@ -7100,7 +7710,7 @@
                 <a:latin typeface="Calibri"/>
                 <a:ea typeface="游ゴシック"/>
               </a:rPr>
-              <a:t>・コンセプト → 要件 → 設計 → 開発の順に積み上げ、要件の正本は prd.md 1 本に決めた</a:t>
+              <a:t>・star は「後で読む」ブックマーク代わりにも押されるので、利用実績とは意味が違う</a:t>
             </a:r>
           </a:p>
           <a:p>
@@ -7120,7 +7730,7 @@
                 <a:latin typeface="Calibri"/>
                 <a:ea typeface="游ゴシック"/>
               </a:rPr>
-              <a:t>・「何を作るか」は PRD、「なぜその技術か」は ADR（Architecture Decision Record）と役割を分けた</a:t>
+              <a:t>・約 600 万個の偽 star が観測されている（He et al., ICSE 2026）</a:t>
             </a:r>
           </a:p>
           <a:p>
@@ -7140,7 +7750,7 @@
                 <a:latin typeface="Calibri"/>
                 <a:ea typeface="游ゴシック"/>
               </a:rPr>
-              <a:t>・決めきれない論点は open-questions.md に D-n 番号で残し、決まった分だけ PRD に反映する</a:t>
+              <a:t>・debug_inspector は 25 star で 111,000 以上のプロジェクトから依存されている</a:t>
             </a:r>
           </a:p>
           <a:p>
@@ -7160,7 +7770,7 @@
                 <a:latin typeface="Calibri"/>
                 <a:ea typeface="游ゴシック"/>
               </a:rPr>
-              <a:t>・先に書いたおかげで、実装中に「これは決めたはず」と辿れる状態になった</a:t>
+              <a:t>・被依存数なら実際に組み込まれた回数を近似できるが、それだけで並べると有名どころが上位を占める</a:t>
             </a:r>
           </a:p>
           <a:p>
@@ -7180,7 +7790,7 @@
                 <a:latin typeface="Calibri"/>
                 <a:ea typeface="游ゴシック"/>
               </a:rPr>
-              <a:t>・各ドキュメントは 16:9 のインフォグラフィック 1 枚に要約してあり、この発表でもそれを使っている</a:t>
+              <a:t>・だから「実利用のわりに注目されていないもの」を測る指標が要る、というのが最初の仮説</a:t>
             </a:r>
           </a:p>
         </p:txBody>
@@ -7259,7 +7869,7 @@
                 <a:latin typeface="Calibri"/>
                 <a:ea typeface="游ゴシック"/>
               </a:rPr>
-              <a:t>依存は内側へ。中心のドメインは何も知らない</a:t>
+              <a:t>構想を、辿れるドキュメントに分解した</a:t>
             </a:r>
           </a:p>
         </p:txBody>
@@ -7354,7 +7964,7 @@
                 <a:latin typeface="Calibri"/>
                 <a:ea typeface="游ゴシック"/>
               </a:rPr>
-              <a:t>・7 層構成: domain / usecases / infrastructure / ui / composition / app（Next.js）/ shared</a:t>
+              <a:t>・初期コンセプト（IndieGems 構想）が先にあり、外部から与えられた要件でスコープを絞り直した</a:t>
             </a:r>
           </a:p>
           <a:p>
@@ -7374,7 +7984,7 @@
                 <a:latin typeface="Calibri"/>
                 <a:ea typeface="游ゴシック"/>
               </a:rPr>
-              <a:t>・唯一絶対の規則は「内側は外側を知らない」。src/domain/ は next も react も zod も import しない</a:t>
+              <a:t>・コンセプト → 要件 → 設計 → 開発の順に積み上げ、要件の正本は prd.md 1 本に決めた</a:t>
             </a:r>
           </a:p>
           <a:p>
@@ -7394,7 +8004,7 @@
                 <a:latin typeface="Calibri"/>
                 <a:ea typeface="游ゴシック"/>
               </a:rPr>
-              <a:t>・ユースケースは実装を import せず、ドメインが定義したポートを引数で受け取る（依存性逆転）</a:t>
+              <a:t>・「何を作るか」は PRD、「なぜその技術か」は ADR（Architecture Decision Record）と役割を分けた</a:t>
             </a:r>
           </a:p>
           <a:p>
@@ -7414,7 +8024,7 @@
                 <a:latin typeface="Calibri"/>
                 <a:ea typeface="游ゴシック"/>
               </a:rPr>
-              <a:t>・app/ と ui/ から infrastructure/ への直 import は禁止。実装を束ねてよいのは composition/ だけ</a:t>
+              <a:t>・決めきれない論点は open-questions.md に D-n 番号で残し、決まった分だけ PRD に反映する</a:t>
             </a:r>
           </a:p>
           <a:p>
@@ -7434,7 +8044,7 @@
                 <a:latin typeface="Calibri"/>
                 <a:ea typeface="游ゴシック"/>
               </a:rPr>
-              <a:t>・GitHub API と認証情報は infrastructure/github/、事業者固有 API は infrastructure/platform/ の中だけ</a:t>
+              <a:t>・先に書いたおかげで、実装中に「これは決めたはず」と辿れる状態になった</a:t>
             </a:r>
           </a:p>
           <a:p>
@@ -7454,7 +8064,7 @@
                 <a:latin typeface="Calibri"/>
                 <a:ea typeface="游ゴシック"/>
               </a:rPr>
-              <a:t>・ポートは 5 つ（検索・キャッシュ・レート制限・時刻・認証）。表にないポートは実装しない</a:t>
+              <a:t>・各ドキュメントは 16:9 のインフォグラフィック 1 枚に要約してあり、この発表でもそれを使っている</a:t>
             </a:r>
           </a:p>
         </p:txBody>
@@ -7533,7 +8143,7 @@
                 <a:latin typeface="Calibri"/>
                 <a:ea typeface="游ゴシック"/>
               </a:rPr>
-              <a:t>層を足す条件を、3 つに決めてある</a:t>
+              <a:t>依存は内側へ。中心のドメインは何も知らない</a:t>
             </a:r>
           </a:p>
         </p:txBody>
@@ -7617,118 +8227,138 @@
                 <a:spcPct val="125000"/>
               </a:lnSpc>
               <a:spcAft>
-                <a:spcPts val="1125"/>
-              </a:spcAft>
-            </a:pPr>
-            <a:r>
-              <a:rPr sz="1500">
-                <a:solidFill>
-                  <a:srgbClr val="1B2A3A"/>
-                </a:solidFill>
-                <a:latin typeface="Calibri"/>
-                <a:ea typeface="游ゴシック"/>
-              </a:rPr>
-              <a:t>・W-1 データ源を差し替えられる（被依存数・健全性の取得先が変わっても UI を書き換えない）</a:t>
-            </a:r>
-          </a:p>
-          <a:p>
-            <a:pPr>
-              <a:lnSpc>
-                <a:spcPct val="125000"/>
-              </a:lnSpc>
-              <a:spcAft>
-                <a:spcPts val="1125"/>
-              </a:spcAft>
-            </a:pPr>
-            <a:r>
-              <a:rPr sz="1500">
-                <a:solidFill>
-                  <a:srgbClr val="1B2A3A"/>
-                </a:solidFill>
-                <a:latin typeface="Calibri"/>
-                <a:ea typeface="游ゴシック"/>
-              </a:rPr>
-              <a:t>・W-2 事業者を差し替えられる（Cloudflare 固有の API をアプリ全体に染み出させない）</a:t>
-            </a:r>
-          </a:p>
-          <a:p>
-            <a:pPr>
-              <a:lnSpc>
-                <a:spcPct val="125000"/>
-              </a:lnSpc>
-              <a:spcAft>
-                <a:spcPts val="1125"/>
-              </a:spcAft>
-            </a:pPr>
-            <a:r>
-              <a:rPr sz="1500">
-                <a:solidFill>
-                  <a:srgbClr val="1B2A3A"/>
-                </a:solidFill>
-                <a:latin typeface="Calibri"/>
-                <a:ea typeface="游ゴシック"/>
-              </a:rPr>
-              <a:t>・W-3 速く確実にテストできる（中核ロジックがネットワークもフレームワークも要らずに動く）</a:t>
-            </a:r>
-          </a:p>
-          <a:p>
-            <a:pPr>
-              <a:lnSpc>
-                <a:spcPct val="125000"/>
-              </a:lnSpc>
-              <a:spcAft>
-                <a:spcPts val="1125"/>
-              </a:spcAft>
-            </a:pPr>
-            <a:r>
-              <a:rPr sz="1500">
-                <a:solidFill>
-                  <a:srgbClr val="1B2A3A"/>
-                </a:solidFill>
-                <a:latin typeface="Calibri"/>
-                <a:ea typeface="游ゴシック"/>
-              </a:rPr>
-              <a:t>・「クリーンアーキテクチャだから」は層を足す理由にならない。W-n のどれを守るか 1 行で言えることが条件</a:t>
-            </a:r>
-          </a:p>
-          <a:p>
-            <a:pPr>
-              <a:lnSpc>
-                <a:spcPct val="125000"/>
-              </a:lnSpc>
-              <a:spcAft>
-                <a:spcPts val="1125"/>
-              </a:spcAft>
-            </a:pPr>
-            <a:r>
-              <a:rPr sz="1500">
-                <a:solidFill>
-                  <a:srgbClr val="1B2A3A"/>
-                </a:solidFill>
-                <a:latin typeface="Calibri"/>
-                <a:ea typeface="游ゴシック"/>
-              </a:rPr>
-              <a:t>・唯一の意図的な例外がキャッシュ層。面積を get / set / invalidate + TTL に限る歯止めつきで認めた</a:t>
-            </a:r>
-          </a:p>
-          <a:p>
-            <a:pPr>
-              <a:lnSpc>
-                <a:spcPct val="125000"/>
-              </a:lnSpc>
-              <a:spcAft>
-                <a:spcPts val="1125"/>
-              </a:spcAft>
-            </a:pPr>
-            <a:r>
-              <a:rPr sz="1500">
-                <a:solidFill>
-                  <a:srgbClr val="1B2A3A"/>
-                </a:solidFill>
-                <a:latin typeface="Calibri"/>
-                <a:ea typeface="游ゴシック"/>
-              </a:rPr>
-              <a:t>・ARCH-1〜ARCH-7 は専用スクリプトが機械検査する。ARCH-4・ARCH-5 は抑止コメントも効かない</a:t>
+                <a:spcPts val="1050"/>
+              </a:spcAft>
+            </a:pPr>
+            <a:r>
+              <a:rPr sz="1400">
+                <a:solidFill>
+                  <a:srgbClr val="1B2A3A"/>
+                </a:solidFill>
+                <a:latin typeface="Calibri"/>
+                <a:ea typeface="游ゴシック"/>
+              </a:rPr>
+              <a:t>・7 層構成: domain / usecases / infrastructure / ui / composition / app（Next.js）/ shared</a:t>
+            </a:r>
+          </a:p>
+          <a:p>
+            <a:pPr>
+              <a:lnSpc>
+                <a:spcPct val="125000"/>
+              </a:lnSpc>
+              <a:spcAft>
+                <a:spcPts val="1050"/>
+              </a:spcAft>
+            </a:pPr>
+            <a:r>
+              <a:rPr sz="1400">
+                <a:solidFill>
+                  <a:srgbClr val="1B2A3A"/>
+                </a:solidFill>
+                <a:latin typeface="Calibri"/>
+                <a:ea typeface="游ゴシック"/>
+              </a:rPr>
+              <a:t>・唯一絶対の規則は「内側は外側を知らない」。src/domain/ は next も react も zod も import しない</a:t>
+            </a:r>
+          </a:p>
+          <a:p>
+            <a:pPr>
+              <a:lnSpc>
+                <a:spcPct val="125000"/>
+              </a:lnSpc>
+              <a:spcAft>
+                <a:spcPts val="1050"/>
+              </a:spcAft>
+            </a:pPr>
+            <a:r>
+              <a:rPr sz="1400">
+                <a:solidFill>
+                  <a:srgbClr val="1B2A3A"/>
+                </a:solidFill>
+                <a:latin typeface="Calibri"/>
+                <a:ea typeface="游ゴシック"/>
+              </a:rPr>
+              <a:t>・ユースケースは実装を import せず、ドメインが定義したポートを引数で受け取る（依存性逆転）</a:t>
+            </a:r>
+          </a:p>
+          <a:p>
+            <a:pPr>
+              <a:lnSpc>
+                <a:spcPct val="125000"/>
+              </a:lnSpc>
+              <a:spcAft>
+                <a:spcPts val="1050"/>
+              </a:spcAft>
+            </a:pPr>
+            <a:r>
+              <a:rPr sz="1400">
+                <a:solidFill>
+                  <a:srgbClr val="1B2A3A"/>
+                </a:solidFill>
+                <a:latin typeface="Calibri"/>
+                <a:ea typeface="游ゴシック"/>
+              </a:rPr>
+              <a:t>・app/ と ui/ から infrastructure/ への直 import は禁止。実装を束ねてよいのは composition/ だけ</a:t>
+            </a:r>
+          </a:p>
+          <a:p>
+            <a:pPr>
+              <a:lnSpc>
+                <a:spcPct val="125000"/>
+              </a:lnSpc>
+              <a:spcAft>
+                <a:spcPts val="1050"/>
+              </a:spcAft>
+            </a:pPr>
+            <a:r>
+              <a:rPr sz="1400">
+                <a:solidFill>
+                  <a:srgbClr val="1B2A3A"/>
+                </a:solidFill>
+                <a:latin typeface="Calibri"/>
+                <a:ea typeface="游ゴシック"/>
+              </a:rPr>
+              <a:t>・GitHub API と認証情報は infrastructure/github/、事業者固有 API は infrastructure/platform/ の中だけ</a:t>
+            </a:r>
+          </a:p>
+          <a:p>
+            <a:pPr>
+              <a:lnSpc>
+                <a:spcPct val="125000"/>
+              </a:lnSpc>
+              <a:spcAft>
+                <a:spcPts val="1050"/>
+              </a:spcAft>
+            </a:pPr>
+            <a:r>
+              <a:rPr sz="1400">
+                <a:solidFill>
+                  <a:srgbClr val="1B2A3A"/>
+                </a:solidFill>
+                <a:latin typeface="Calibri"/>
+                <a:ea typeface="游ゴシック"/>
+              </a:rPr>
+              <a:t>・ポートは 7 つ（検索・キャッシュ・レート制限・時刻・認証・Gem 索引・Gem ダイジェスト）</a:t>
+            </a:r>
+          </a:p>
+          <a:p>
+            <a:pPr>
+              <a:lnSpc>
+                <a:spcPct val="125000"/>
+              </a:lnSpc>
+              <a:spcAft>
+                <a:spcPts val="1050"/>
+              </a:spcAft>
+            </a:pPr>
+            <a:r>
+              <a:rPr sz="1400">
+                <a:solidFill>
+                  <a:srgbClr val="1B2A3A"/>
+                </a:solidFill>
+                <a:latin typeface="Calibri"/>
+                <a:ea typeface="游ゴシック"/>
+              </a:rPr>
+              <a:t>・Gem を足したときも層は増やさず、ポートを 2 つ足して中心の外側に閉じ込めた</a:t>
             </a:r>
           </a:p>
         </p:txBody>
@@ -7807,7 +8437,7 @@
                 <a:latin typeface="Calibri"/>
                 <a:ea typeface="游ゴシック"/>
               </a:rPr>
-              <a:t>Next.js 16 を Workers の上で動かす</a:t>
+              <a:t>層を足す条件を、3 つに決めてある</a:t>
             </a:r>
           </a:p>
         </p:txBody>
@@ -7902,7 +8532,7 @@
                 <a:latin typeface="Calibri"/>
                 <a:ea typeface="游ゴシック"/>
               </a:rPr>
-              <a:t>・Next.js 16（App Router・React Server Components）で、クライアント JS を最小限に保つ</a:t>
+              <a:t>・W-1 データ源を差し替えられる（被依存数・健全性の取得先が変わっても UI を書き換えない）</a:t>
             </a:r>
           </a:p>
           <a:p>
@@ -7922,7 +8552,7 @@
                 <a:latin typeface="Calibri"/>
                 <a:ea typeface="游ゴシック"/>
               </a:rPr>
-              <a:t>・UI は Tailwind CSS v4 + shadcn/ui（Radix UI）。デザイントークンを 1 か所に集約する</a:t>
+              <a:t>・W-2 事業者を差し替えられる（Cloudflare 固有の API をアプリ全体に染み出させない）</a:t>
             </a:r>
           </a:p>
           <a:p>
@@ -7942,7 +8572,7 @@
                 <a:latin typeface="Calibri"/>
                 <a:ea typeface="游ゴシック"/>
               </a:rPr>
-              <a:t>・実行環境は Cloudflare Workers。コールドスタートがほぼなく、無料枠で実用に足りる</a:t>
+              <a:t>・W-3 速く確実にテストできる（中核ロジックがネットワークもフレームワークも要らずに動く）</a:t>
             </a:r>
           </a:p>
           <a:p>
@@ -7962,7 +8592,7 @@
                 <a:latin typeface="Calibri"/>
                 <a:ea typeface="游ゴシック"/>
               </a:rPr>
-              <a:t>・Next.js を Workers に載せているのは OpenNext（@opennextjs/cloudflare）というアダプタ</a:t>
+              <a:t>・「クリーンアーキテクチャだから」は層を足す理由にならない。W-n のどれを守るか 1 行で言えることが条件</a:t>
             </a:r>
           </a:p>
           <a:p>
@@ -7982,7 +8612,7 @@
                 <a:latin typeface="Calibri"/>
                 <a:ea typeface="游ゴシック"/>
               </a:rPr>
-              <a:t>・テストは Vitest 4 + Testing Library + MSW 2（単体・結合）と Playwright + axe（E2E）</a:t>
+              <a:t>・唯一の意図的な例外がキャッシュ層。面積を get / set / invalidate + TTL に限る歯止めつきで認めた</a:t>
             </a:r>
           </a:p>
           <a:p>
@@ -8002,7 +8632,7 @@
                 <a:latin typeface="Calibri"/>
                 <a:ea typeface="游ゴシック"/>
               </a:rPr>
-              <a:t>・この組み合わせは「事業者固有の API をアプリコードへ持ち込まない」という制約から選んでいる</a:t>
+              <a:t>・ARCH-1〜ARCH-7 は専用スクリプトが機械検査する。ARCH-4・ARCH-5 は抑止コメントも効かない</a:t>
             </a:r>
           </a:p>
         </p:txBody>
@@ -8081,7 +8711,7 @@
                 <a:latin typeface="Calibri"/>
                 <a:ea typeface="游ゴシック"/>
               </a:rPr>
-              <a:t>同じコードでも、プレビューでだけ壊れる</a:t>
+              <a:t>Next.js 16 を Workers の上で動かす</a:t>
             </a:r>
           </a:p>
         </p:txBody>
@@ -8176,7 +8806,7 @@
                 <a:latin typeface="Calibri"/>
                 <a:ea typeface="游ゴシック"/>
               </a:rPr>
-              <a:t>・redirects の destination に :path を書くと、プレビューでだけ 500 になる</a:t>
+              <a:t>・Next.js 16（App Router・React Server Components）で、クライアント JS を最小限に保つ</a:t>
             </a:r>
           </a:p>
           <a:p>
@@ -8196,7 +8826,7 @@
                 <a:latin typeface="Calibri"/>
                 <a:ea typeface="游ゴシック"/>
               </a:rPr>
-              <a:t>・原因は OpenNext が path-to-regexp を validate: true で呼ぶこと（Next.js 本体は false）</a:t>
+              <a:t>・UI は Tailwind CSS v4 + shadcn/ui（Radix UI）。デザイントークンを 1 か所に集約する</a:t>
             </a:r>
           </a:p>
           <a:p>
@@ -8216,7 +8846,7 @@
                 <a:latin typeface="Calibri"/>
                 <a:ea typeface="游ゴシック"/>
               </a:rPr>
-              <a:t>・拡張子付きパスは /repos/angular/angular.js が 404、/ja を付けると 200 になる</a:t>
+              <a:t>・実行環境は Cloudflare Workers。コールドスタートがほぼなく、無料枠で実用に足りる</a:t>
             </a:r>
           </a:p>
           <a:p>
@@ -8236,7 +8866,7 @@
                 <a:latin typeface="Calibri"/>
                 <a:ea typeface="游ゴシック"/>
               </a:rPr>
-              <a:t>・wrangler deploy がブロックされることがある（実測 5 回失敗・2 回成功の非決定的挙動）</a:t>
+              <a:t>・Next.js を Workers に載せているのは OpenNext（@opennextjs/cloudflare）というアダプタ</a:t>
             </a:r>
           </a:p>
           <a:p>
@@ -8256,7 +8886,7 @@
                 <a:latin typeface="Calibri"/>
                 <a:ea typeface="游ゴシック"/>
               </a:rPr>
-              <a:t>・どれもローカルの next start では再現せず、プレビューに上げて初めて壊れた</a:t>
+              <a:t>・テストは Vitest 4 + Testing Library + MSW 2（単体・結合）と Playwright + axe（E2E）</a:t>
             </a:r>
           </a:p>
           <a:p>
@@ -8276,7 +8906,7 @@
                 <a:latin typeface="Calibri"/>
                 <a:ea typeface="游ゴシック"/>
               </a:rPr>
-              <a:t>・以後「動いた」ではなく「どの環境で動いたか」で記録するようにした</a:t>
+              <a:t>・この組み合わせは「事業者固有の API をアプリコードへ持ち込まない」という制約から選んでいる</a:t>
             </a:r>
           </a:p>
         </p:txBody>

--- a/content/slides/project-explanation-20260822/output/gem-hunter_text.pptx
+++ b/content/slides/project-explanation-20260822/output/gem-hunter_text.pptx
@@ -3190,7 +3190,7 @@
                 <a:latin typeface="Calibri"/>
                 <a:ea typeface="游ゴシック"/>
               </a:rPr>
-              <a:t>gem-hunter</a:t>
+              <a:t>star では埋もれる「実際に使われている OSS」を見つける</a:t>
             </a:r>
           </a:p>
         </p:txBody>
@@ -3226,7 +3226,7 @@
                 <a:latin typeface="Calibri"/>
                 <a:ea typeface="游ゴシック"/>
               </a:rPr>
-              <a:t>star では埋もれる「実際に使われている OSS」を見つける / 開発者向け解説 / 2026-08-23</a:t>
+              <a:t>開発者向け解説 / 2026-08-24</a:t>
             </a:r>
           </a:p>
         </p:txBody>
@@ -4028,7 +4028,7 @@
                 <a:latin typeface="Calibri"/>
                 <a:ea typeface="游ゴシック"/>
               </a:rPr>
-              <a:t>・いまの規模はテストが 954 ケース、E2E が 107 ケース（2026-08-23 時点の実行結果）</a:t>
+              <a:t>・いまの規模はテストが 960 ケース、E2E が 112 ケース（2026-08-24 時点の実行結果）</a:t>
             </a:r>
           </a:p>
           <a:p>
@@ -4302,7 +4302,7 @@
                 <a:latin typeface="Calibri"/>
                 <a:ea typeface="游ゴシック"/>
               </a:rPr>
-              <a:t>・検査は 38 項目。lint・型・テスト・E2E・Lighthouse の 5 点に、静的検査 15 点を重ねる</a:t>
+              <a:t>・検査は 41 項目（2026-08-24 時点）。lint・整形・型・テスト・E2E ほか 7 点に、静的検査 15 点を重ねる</a:t>
             </a:r>
           </a:p>
           <a:p>
@@ -4322,7 +4322,7 @@
                 <a:latin typeface="Calibri"/>
                 <a:ea typeface="游ゴシック"/>
               </a:rPr>
-              <a:t>・残る 18 点は運用ツール自身の self-test で、判定ロジックが壊れたことに機械で気づける</a:t>
+              <a:t>・残る 19 点は運用ツール自身の self-test で、判定ロジックが壊れたことに機械で気づける</a:t>
             </a:r>
           </a:p>
           <a:p>
@@ -7047,7 +7047,7 @@
                 <a:latin typeface="Calibri"/>
                 <a:ea typeface="游ゴシック"/>
               </a:rPr>
-              <a:t>検索語をそのまま、Gem だけの一覧へ</a:t>
+              <a:t>検索の並び順は変えない。絞り込むのは Gem 一覧だけ</a:t>
             </a:r>
           </a:p>
         </p:txBody>
@@ -7182,7 +7182,7 @@
                 <a:latin typeface="Calibri"/>
                 <a:ea typeface="游ゴシック"/>
               </a:rPr>
-              <a:t>・一覧は検索語を引き継ぎ、過小評価が強い順（Gem Index が小さい順）に 20 件ずつ並ぶ</a:t>
+              <a:t>・一覧は検索語を引き継ぎ、過小評価が強い順に 20 件ずつ並ぶ（順位づけの定義は後半で扱う）</a:t>
             </a:r>
           </a:p>
           <a:p>
@@ -7869,7 +7869,7 @@
                 <a:latin typeface="Calibri"/>
                 <a:ea typeface="游ゴシック"/>
               </a:rPr>
-              <a:t>構想を、辿れるドキュメントに分解した</a:t>
+              <a:t>与件を満たしたうえで、決定を辿れる形に残した</a:t>
             </a:r>
           </a:p>
         </p:txBody>
@@ -7953,11 +7953,11 @@
                 <a:spcPct val="125000"/>
               </a:lnSpc>
               <a:spcAft>
-                <a:spcPts val="1125"/>
-              </a:spcAft>
-            </a:pPr>
-            <a:r>
-              <a:rPr sz="1500">
+                <a:spcPts val="1050"/>
+              </a:spcAft>
+            </a:pPr>
+            <a:r>
+              <a:rPr sz="1400">
                 <a:solidFill>
                   <a:srgbClr val="1B2A3A"/>
                 </a:solidFill>
@@ -7973,11 +7973,31 @@
                 <a:spcPct val="125000"/>
               </a:lnSpc>
               <a:spcAft>
-                <a:spcPts val="1125"/>
-              </a:spcAft>
-            </a:pPr>
-            <a:r>
-              <a:rPr sz="1500">
+                <a:spcPts val="1050"/>
+              </a:spcAft>
+            </a:pPr>
+            <a:r>
+              <a:rPr sz="1400">
+                <a:solidFill>
+                  <a:srgbClr val="1B2A3A"/>
+                </a:solidFill>
+                <a:latin typeface="Calibri"/>
+                <a:ea typeface="游ゴシック"/>
+              </a:rPr>
+              <a:t>・外部要件の受け入れ基準は 11 項目で、いま全件を充足している（未充足はゼロ）</a:t>
+            </a:r>
+          </a:p>
+          <a:p>
+            <a:pPr>
+              <a:lnSpc>
+                <a:spcPct val="125000"/>
+              </a:lnSpc>
+              <a:spcAft>
+                <a:spcPts val="1050"/>
+              </a:spcAft>
+            </a:pPr>
+            <a:r>
+              <a:rPr sz="1400">
                 <a:solidFill>
                   <a:srgbClr val="1B2A3A"/>
                 </a:solidFill>
@@ -7993,11 +8013,11 @@
                 <a:spcPct val="125000"/>
               </a:lnSpc>
               <a:spcAft>
-                <a:spcPts val="1125"/>
-              </a:spcAft>
-            </a:pPr>
-            <a:r>
-              <a:rPr sz="1500">
+                <a:spcPts val="1050"/>
+              </a:spcAft>
+            </a:pPr>
+            <a:r>
+              <a:rPr sz="1400">
                 <a:solidFill>
                   <a:srgbClr val="1B2A3A"/>
                 </a:solidFill>
@@ -8013,11 +8033,11 @@
                 <a:spcPct val="125000"/>
               </a:lnSpc>
               <a:spcAft>
-                <a:spcPts val="1125"/>
-              </a:spcAft>
-            </a:pPr>
-            <a:r>
-              <a:rPr sz="1500">
+                <a:spcPts val="1050"/>
+              </a:spcAft>
+            </a:pPr>
+            <a:r>
+              <a:rPr sz="1400">
                 <a:solidFill>
                   <a:srgbClr val="1B2A3A"/>
                 </a:solidFill>
@@ -8033,11 +8053,11 @@
                 <a:spcPct val="125000"/>
               </a:lnSpc>
               <a:spcAft>
-                <a:spcPts val="1125"/>
-              </a:spcAft>
-            </a:pPr>
-            <a:r>
-              <a:rPr sz="1500">
+                <a:spcPts val="1050"/>
+              </a:spcAft>
+            </a:pPr>
+            <a:r>
+              <a:rPr sz="1400">
                 <a:solidFill>
                   <a:srgbClr val="1B2A3A"/>
                 </a:solidFill>
@@ -8053,18 +8073,18 @@
                 <a:spcPct val="125000"/>
               </a:lnSpc>
               <a:spcAft>
-                <a:spcPts val="1125"/>
-              </a:spcAft>
-            </a:pPr>
-            <a:r>
-              <a:rPr sz="1500">
-                <a:solidFill>
-                  <a:srgbClr val="1B2A3A"/>
-                </a:solidFill>
-                <a:latin typeface="Calibri"/>
-                <a:ea typeface="游ゴシック"/>
-              </a:rPr>
-              <a:t>・各ドキュメントは 16:9 のインフォグラフィック 1 枚に要約してあり、この発表でもそれを使っている</a:t>
+                <a:spcPts val="1050"/>
+              </a:spcAft>
+            </a:pPr>
+            <a:r>
+              <a:rPr sz="1400">
+                <a:solidFill>
+                  <a:srgbClr val="1B2A3A"/>
+                </a:solidFill>
+                <a:latin typeface="Calibri"/>
+                <a:ea typeface="游ゴシック"/>
+              </a:rPr>
+              <a:t>・この発表の後半で話す判断は、すべてこの与件を満たしたうえに積んだものになる</a:t>
             </a:r>
           </a:p>
         </p:txBody>
@@ -8711,7 +8731,7 @@
                 <a:latin typeface="Calibri"/>
                 <a:ea typeface="游ゴシック"/>
               </a:rPr>
-              <a:t>Next.js 16 を Workers の上で動かす</a:t>
+              <a:t>技術選定は、事業者固有 API を持ち込まない制約で決めた</a:t>
             </a:r>
           </a:p>
         </p:txBody>
